--- a/PPT.pptx
+++ b/PPT.pptx
@@ -1,46 +1,48 @@
 
 <file path=ppt/presentation.xml><?xml version="1.0" encoding="utf-8"?>
-<p:presentation xmlns:a="http://schemas.openxmlformats.org/drawingml/2006/main" xmlns:r="http://schemas.openxmlformats.org/officeDocument/2006/relationships" xmlns:p="http://schemas.openxmlformats.org/presentationml/2006/main" saveSubsetFonts="1" embedTrueTypeFonts="true">
+<p:presentation xmlns:a="http://schemas.openxmlformats.org/drawingml/2006/main" xmlns:r="http://schemas.openxmlformats.org/officeDocument/2006/relationships" xmlns:p="http://schemas.openxmlformats.org/presentationml/2006/main" embedTrueTypeFonts="1" saveSubsetFonts="1">
   <p:sldMasterIdLst>
     <p:sldMasterId id="2147483648" r:id="rId1"/>
   </p:sldMasterIdLst>
   <p:sldIdLst>
-    <p:sldId id="256" r:id="rId6"/>
-    <p:sldId id="257" r:id="rId7"/>
-    <p:sldId id="258" r:id="rId8"/>
-    <p:sldId id="259" r:id="rId9"/>
-    <p:sldId id="260" r:id="rId10"/>
+    <p:sldId id="256" r:id="rId2"/>
+    <p:sldId id="257" r:id="rId3"/>
+    <p:sldId id="262" r:id="rId4"/>
+    <p:sldId id="261" r:id="rId5"/>
+    <p:sldId id="258" r:id="rId6"/>
+    <p:sldId id="259" r:id="rId7"/>
+    <p:sldId id="260" r:id="rId8"/>
   </p:sldIdLst>
   <p:sldSz cx="18288000" cy="10287000"/>
   <p:notesSz cx="6858000" cy="9144000"/>
   <p:embeddedFontLst>
     <p:embeddedFont>
-      <p:font typeface="Tajawal" charset="1" panose="00000500000000000000"/>
+      <p:font typeface="Canva Sans" panose="020B0604020202020204" charset="0"/>
+      <p:regular r:id="rId9"/>
+    </p:embeddedFont>
+    <p:embeddedFont>
+      <p:font typeface="Canva Sans Bold" panose="020B0604020202020204" charset="0"/>
+      <p:regular r:id="rId10"/>
+    </p:embeddedFont>
+    <p:embeddedFont>
+      <p:font typeface="Open Sans" panose="020F0502020204030204" pitchFamily="34" charset="0"/>
       <p:regular r:id="rId11"/>
     </p:embeddedFont>
     <p:embeddedFont>
-      <p:font typeface="Source Sans Pro" charset="1" panose="020B0503030403020204"/>
+      <p:font typeface="Open Sans Bold" panose="020B0604020202020204" charset="0"/>
       <p:regular r:id="rId12"/>
     </p:embeddedFont>
     <p:embeddedFont>
-      <p:font typeface="Open Sans Bold" charset="1" panose="020B0806030504020204"/>
+      <p:font typeface="Source Sans Pro" panose="020F0502020204030204" pitchFamily="34" charset="0"/>
       <p:regular r:id="rId13"/>
     </p:embeddedFont>
     <p:embeddedFont>
-      <p:font typeface="Open Sans" charset="1" panose="020B0606030504020204"/>
+      <p:font typeface="Source Sans Pro Bold" panose="020B0604020202020204" charset="0"/>
       <p:regular r:id="rId14"/>
     </p:embeddedFont>
     <p:embeddedFont>
-      <p:font typeface="Source Sans Pro Bold" charset="1" panose="020B0703030403020204"/>
+      <p:font typeface="Tajawal" panose="020B0604020202020204" charset="-78"/>
       <p:regular r:id="rId15"/>
-    </p:embeddedFont>
-    <p:embeddedFont>
-      <p:font typeface="Canva Sans Bold" charset="1" panose="020B0803030501040103"/>
-      <p:regular r:id="rId16"/>
-    </p:embeddedFont>
-    <p:embeddedFont>
-      <p:font typeface="Canva Sans" charset="1" panose="020B0503030501040103"/>
-      <p:regular r:id="rId17"/>
     </p:embeddedFont>
   </p:embeddedFontLst>
   <p:defaultTextStyle>
@@ -138,6 +140,22 @@
       </a:defRPr>
     </a:lvl9pPr>
   </p:defaultTextStyle>
+  <p:extLst>
+    <p:ext uri="{EFAFB233-063F-42B5-8137-9DF3F51BA10A}">
+      <p15:sldGuideLst xmlns:p15="http://schemas.microsoft.com/office/powerpoint/2012/main">
+        <p15:guide id="1" orient="horz" pos="2160">
+          <p15:clr>
+            <a:srgbClr val="A4A3A4"/>
+          </p15:clr>
+        </p15:guide>
+        <p15:guide id="2" pos="2880">
+          <p15:clr>
+            <a:srgbClr val="A4A3A4"/>
+          </p15:clr>
+        </p15:guide>
+      </p15:sldGuideLst>
+    </p:ext>
+  </p:extLst>
 </p:presentation>
 </file>
 
@@ -179,10 +197,9 @@
           <a:lstStyle/>
           <a:p>
             <a:r>
-              <a:rPr lang="en-US" smtClean="0"/>
+              <a:rPr lang="en-US"/>
               <a:t>Click to edit Master title style</a:t>
             </a:r>
-            <a:endParaRPr lang="en-US"/>
           </a:p>
         </p:txBody>
       </p:sp>
@@ -298,10 +315,9 @@
           </a:lstStyle>
           <a:p>
             <a:r>
-              <a:rPr lang="en-US" smtClean="0"/>
+              <a:rPr lang="en-US"/>
               <a:t>Click to edit Master subtitle style</a:t>
             </a:r>
-            <a:endParaRPr lang="en-US"/>
           </a:p>
         </p:txBody>
       </p:sp>
@@ -323,7 +339,7 @@
             <a:fld id="{1D8BD707-D9CF-40AE-B4C6-C98DA3205C09}" type="datetimeFigureOut">
               <a:rPr lang="en-US" smtClean="0"/>
               <a:pPr/>
-              <a:t>8/1/2011</a:t>
+              <a:t>10/25/2026</a:t>
             </a:fld>
             <a:endParaRPr lang="en-US"/>
           </a:p>
@@ -413,10 +429,9 @@
           <a:lstStyle/>
           <a:p>
             <a:r>
-              <a:rPr lang="en-US" smtClean="0"/>
+              <a:rPr lang="en-US"/>
               <a:t>Click to edit Master title style</a:t>
             </a:r>
-            <a:endParaRPr lang="en-US"/>
           </a:p>
         </p:txBody>
       </p:sp>
@@ -437,38 +452,37 @@
           <a:p>
             <a:pPr lvl="0"/>
             <a:r>
-              <a:rPr lang="en-US" smtClean="0"/>
+              <a:rPr lang="en-US"/>
               <a:t>Click to edit Master text styles</a:t>
             </a:r>
           </a:p>
           <a:p>
             <a:pPr lvl="1"/>
             <a:r>
-              <a:rPr lang="en-US" smtClean="0"/>
+              <a:rPr lang="en-US"/>
               <a:t>Second level</a:t>
             </a:r>
           </a:p>
           <a:p>
             <a:pPr lvl="2"/>
             <a:r>
-              <a:rPr lang="en-US" smtClean="0"/>
+              <a:rPr lang="en-US"/>
               <a:t>Third level</a:t>
             </a:r>
           </a:p>
           <a:p>
             <a:pPr lvl="3"/>
             <a:r>
-              <a:rPr lang="en-US" smtClean="0"/>
+              <a:rPr lang="en-US"/>
               <a:t>Fourth level</a:t>
             </a:r>
           </a:p>
           <a:p>
             <a:pPr lvl="4"/>
             <a:r>
-              <a:rPr lang="en-US" smtClean="0"/>
+              <a:rPr lang="en-US"/>
               <a:t>Fifth level</a:t>
             </a:r>
-            <a:endParaRPr lang="en-US"/>
           </a:p>
         </p:txBody>
       </p:sp>
@@ -490,7 +504,7 @@
             <a:fld id="{1D8BD707-D9CF-40AE-B4C6-C98DA3205C09}" type="datetimeFigureOut">
               <a:rPr lang="en-US" smtClean="0"/>
               <a:pPr/>
-              <a:t>8/1/2011</a:t>
+              <a:t>10/25/2026</a:t>
             </a:fld>
             <a:endParaRPr lang="en-US"/>
           </a:p>
@@ -585,10 +599,9 @@
           <a:lstStyle/>
           <a:p>
             <a:r>
-              <a:rPr lang="en-US" smtClean="0"/>
+              <a:rPr lang="en-US"/>
               <a:t>Click to edit Master title style</a:t>
             </a:r>
-            <a:endParaRPr lang="en-US"/>
           </a:p>
         </p:txBody>
       </p:sp>
@@ -614,38 +627,37 @@
           <a:p>
             <a:pPr lvl="0"/>
             <a:r>
-              <a:rPr lang="en-US" smtClean="0"/>
+              <a:rPr lang="en-US"/>
               <a:t>Click to edit Master text styles</a:t>
             </a:r>
           </a:p>
           <a:p>
             <a:pPr lvl="1"/>
             <a:r>
-              <a:rPr lang="en-US" smtClean="0"/>
+              <a:rPr lang="en-US"/>
               <a:t>Second level</a:t>
             </a:r>
           </a:p>
           <a:p>
             <a:pPr lvl="2"/>
             <a:r>
-              <a:rPr lang="en-US" smtClean="0"/>
+              <a:rPr lang="en-US"/>
               <a:t>Third level</a:t>
             </a:r>
           </a:p>
           <a:p>
             <a:pPr lvl="3"/>
             <a:r>
-              <a:rPr lang="en-US" smtClean="0"/>
+              <a:rPr lang="en-US"/>
               <a:t>Fourth level</a:t>
             </a:r>
           </a:p>
           <a:p>
             <a:pPr lvl="4"/>
             <a:r>
-              <a:rPr lang="en-US" smtClean="0"/>
+              <a:rPr lang="en-US"/>
               <a:t>Fifth level</a:t>
             </a:r>
-            <a:endParaRPr lang="en-US"/>
           </a:p>
         </p:txBody>
       </p:sp>
@@ -667,7 +679,7 @@
             <a:fld id="{1D8BD707-D9CF-40AE-B4C6-C98DA3205C09}" type="datetimeFigureOut">
               <a:rPr lang="en-US" smtClean="0"/>
               <a:pPr/>
-              <a:t>8/1/2011</a:t>
+              <a:t>10/25/2026</a:t>
             </a:fld>
             <a:endParaRPr lang="en-US"/>
           </a:p>
@@ -757,10 +769,9 @@
           <a:lstStyle/>
           <a:p>
             <a:r>
-              <a:rPr lang="en-US" smtClean="0"/>
+              <a:rPr lang="en-US"/>
               <a:t>Click to edit Master title style</a:t>
             </a:r>
-            <a:endParaRPr lang="en-US"/>
           </a:p>
         </p:txBody>
       </p:sp>
@@ -781,38 +792,37 @@
           <a:p>
             <a:pPr lvl="0"/>
             <a:r>
-              <a:rPr lang="en-US" smtClean="0"/>
+              <a:rPr lang="en-US"/>
               <a:t>Click to edit Master text styles</a:t>
             </a:r>
           </a:p>
           <a:p>
             <a:pPr lvl="1"/>
             <a:r>
-              <a:rPr lang="en-US" smtClean="0"/>
+              <a:rPr lang="en-US"/>
               <a:t>Second level</a:t>
             </a:r>
           </a:p>
           <a:p>
             <a:pPr lvl="2"/>
             <a:r>
-              <a:rPr lang="en-US" smtClean="0"/>
+              <a:rPr lang="en-US"/>
               <a:t>Third level</a:t>
             </a:r>
           </a:p>
           <a:p>
             <a:pPr lvl="3"/>
             <a:r>
-              <a:rPr lang="en-US" smtClean="0"/>
+              <a:rPr lang="en-US"/>
               <a:t>Fourth level</a:t>
             </a:r>
           </a:p>
           <a:p>
             <a:pPr lvl="4"/>
             <a:r>
-              <a:rPr lang="en-US" smtClean="0"/>
+              <a:rPr lang="en-US"/>
               <a:t>Fifth level</a:t>
             </a:r>
-            <a:endParaRPr lang="en-US"/>
           </a:p>
         </p:txBody>
       </p:sp>
@@ -834,7 +844,7 @@
             <a:fld id="{1D8BD707-D9CF-40AE-B4C6-C98DA3205C09}" type="datetimeFigureOut">
               <a:rPr lang="en-US" smtClean="0"/>
               <a:pPr/>
-              <a:t>8/1/2011</a:t>
+              <a:t>10/25/2026</a:t>
             </a:fld>
             <a:endParaRPr lang="en-US"/>
           </a:p>
@@ -933,10 +943,9 @@
           </a:lstStyle>
           <a:p>
             <a:r>
-              <a:rPr lang="en-US" smtClean="0"/>
+              <a:rPr lang="en-US"/>
               <a:t>Click to edit Master title style</a:t>
             </a:r>
-            <a:endParaRPr lang="en-US"/>
           </a:p>
         </p:txBody>
       </p:sp>
@@ -1053,7 +1062,7 @@
           <a:p>
             <a:pPr lvl="0"/>
             <a:r>
-              <a:rPr lang="en-US" smtClean="0"/>
+              <a:rPr lang="en-US"/>
               <a:t>Click to edit Master text styles</a:t>
             </a:r>
           </a:p>
@@ -1077,7 +1086,7 @@
             <a:fld id="{1D8BD707-D9CF-40AE-B4C6-C98DA3205C09}" type="datetimeFigureOut">
               <a:rPr lang="en-US" smtClean="0"/>
               <a:pPr/>
-              <a:t>8/1/2011</a:t>
+              <a:t>10/25/2026</a:t>
             </a:fld>
             <a:endParaRPr lang="en-US"/>
           </a:p>
@@ -1167,10 +1176,9 @@
           <a:lstStyle/>
           <a:p>
             <a:r>
-              <a:rPr lang="en-US" smtClean="0"/>
+              <a:rPr lang="en-US"/>
               <a:t>Click to edit Master title style</a:t>
             </a:r>
-            <a:endParaRPr lang="en-US"/>
           </a:p>
         </p:txBody>
       </p:sp>
@@ -1224,38 +1232,37 @@
           <a:p>
             <a:pPr lvl="0"/>
             <a:r>
-              <a:rPr lang="en-US" smtClean="0"/>
+              <a:rPr lang="en-US"/>
               <a:t>Click to edit Master text styles</a:t>
             </a:r>
           </a:p>
           <a:p>
             <a:pPr lvl="1"/>
             <a:r>
-              <a:rPr lang="en-US" smtClean="0"/>
+              <a:rPr lang="en-US"/>
               <a:t>Second level</a:t>
             </a:r>
           </a:p>
           <a:p>
             <a:pPr lvl="2"/>
             <a:r>
-              <a:rPr lang="en-US" smtClean="0"/>
+              <a:rPr lang="en-US"/>
               <a:t>Third level</a:t>
             </a:r>
           </a:p>
           <a:p>
             <a:pPr lvl="3"/>
             <a:r>
-              <a:rPr lang="en-US" smtClean="0"/>
+              <a:rPr lang="en-US"/>
               <a:t>Fourth level</a:t>
             </a:r>
           </a:p>
           <a:p>
             <a:pPr lvl="4"/>
             <a:r>
-              <a:rPr lang="en-US" smtClean="0"/>
+              <a:rPr lang="en-US"/>
               <a:t>Fifth level</a:t>
             </a:r>
-            <a:endParaRPr lang="en-US"/>
           </a:p>
         </p:txBody>
       </p:sp>
@@ -1309,38 +1316,37 @@
           <a:p>
             <a:pPr lvl="0"/>
             <a:r>
-              <a:rPr lang="en-US" smtClean="0"/>
+              <a:rPr lang="en-US"/>
               <a:t>Click to edit Master text styles</a:t>
             </a:r>
           </a:p>
           <a:p>
             <a:pPr lvl="1"/>
             <a:r>
-              <a:rPr lang="en-US" smtClean="0"/>
+              <a:rPr lang="en-US"/>
               <a:t>Second level</a:t>
             </a:r>
           </a:p>
           <a:p>
             <a:pPr lvl="2"/>
             <a:r>
-              <a:rPr lang="en-US" smtClean="0"/>
+              <a:rPr lang="en-US"/>
               <a:t>Third level</a:t>
             </a:r>
           </a:p>
           <a:p>
             <a:pPr lvl="3"/>
             <a:r>
-              <a:rPr lang="en-US" smtClean="0"/>
+              <a:rPr lang="en-US"/>
               <a:t>Fourth level</a:t>
             </a:r>
           </a:p>
           <a:p>
             <a:pPr lvl="4"/>
             <a:r>
-              <a:rPr lang="en-US" smtClean="0"/>
+              <a:rPr lang="en-US"/>
               <a:t>Fifth level</a:t>
             </a:r>
-            <a:endParaRPr lang="en-US"/>
           </a:p>
         </p:txBody>
       </p:sp>
@@ -1362,7 +1368,7 @@
             <a:fld id="{1D8BD707-D9CF-40AE-B4C6-C98DA3205C09}" type="datetimeFigureOut">
               <a:rPr lang="en-US" smtClean="0"/>
               <a:pPr/>
-              <a:t>8/1/2011</a:t>
+              <a:t>10/25/2026</a:t>
             </a:fld>
             <a:endParaRPr lang="en-US"/>
           </a:p>
@@ -1456,10 +1462,9 @@
           </a:lstStyle>
           <a:p>
             <a:r>
-              <a:rPr lang="en-US" smtClean="0"/>
+              <a:rPr lang="en-US"/>
               <a:t>Click to edit Master title style</a:t>
             </a:r>
-            <a:endParaRPr lang="en-US"/>
           </a:p>
         </p:txBody>
       </p:sp>
@@ -1522,7 +1527,7 @@
           <a:p>
             <a:pPr lvl="0"/>
             <a:r>
-              <a:rPr lang="en-US" smtClean="0"/>
+              <a:rPr lang="en-US"/>
               <a:t>Click to edit Master text styles</a:t>
             </a:r>
           </a:p>
@@ -1578,38 +1583,37 @@
           <a:p>
             <a:pPr lvl="0"/>
             <a:r>
-              <a:rPr lang="en-US" smtClean="0"/>
+              <a:rPr lang="en-US"/>
               <a:t>Click to edit Master text styles</a:t>
             </a:r>
           </a:p>
           <a:p>
             <a:pPr lvl="1"/>
             <a:r>
-              <a:rPr lang="en-US" smtClean="0"/>
+              <a:rPr lang="en-US"/>
               <a:t>Second level</a:t>
             </a:r>
           </a:p>
           <a:p>
             <a:pPr lvl="2"/>
             <a:r>
-              <a:rPr lang="en-US" smtClean="0"/>
+              <a:rPr lang="en-US"/>
               <a:t>Third level</a:t>
             </a:r>
           </a:p>
           <a:p>
             <a:pPr lvl="3"/>
             <a:r>
-              <a:rPr lang="en-US" smtClean="0"/>
+              <a:rPr lang="en-US"/>
               <a:t>Fourth level</a:t>
             </a:r>
           </a:p>
           <a:p>
             <a:pPr lvl="4"/>
             <a:r>
-              <a:rPr lang="en-US" smtClean="0"/>
+              <a:rPr lang="en-US"/>
               <a:t>Fifth level</a:t>
             </a:r>
-            <a:endParaRPr lang="en-US"/>
           </a:p>
         </p:txBody>
       </p:sp>
@@ -1672,7 +1676,7 @@
           <a:p>
             <a:pPr lvl="0"/>
             <a:r>
-              <a:rPr lang="en-US" smtClean="0"/>
+              <a:rPr lang="en-US"/>
               <a:t>Click to edit Master text styles</a:t>
             </a:r>
           </a:p>
@@ -1728,38 +1732,37 @@
           <a:p>
             <a:pPr lvl="0"/>
             <a:r>
-              <a:rPr lang="en-US" smtClean="0"/>
+              <a:rPr lang="en-US"/>
               <a:t>Click to edit Master text styles</a:t>
             </a:r>
           </a:p>
           <a:p>
             <a:pPr lvl="1"/>
             <a:r>
-              <a:rPr lang="en-US" smtClean="0"/>
+              <a:rPr lang="en-US"/>
               <a:t>Second level</a:t>
             </a:r>
           </a:p>
           <a:p>
             <a:pPr lvl="2"/>
             <a:r>
-              <a:rPr lang="en-US" smtClean="0"/>
+              <a:rPr lang="en-US"/>
               <a:t>Third level</a:t>
             </a:r>
           </a:p>
           <a:p>
             <a:pPr lvl="3"/>
             <a:r>
-              <a:rPr lang="en-US" smtClean="0"/>
+              <a:rPr lang="en-US"/>
               <a:t>Fourth level</a:t>
             </a:r>
           </a:p>
           <a:p>
             <a:pPr lvl="4"/>
             <a:r>
-              <a:rPr lang="en-US" smtClean="0"/>
+              <a:rPr lang="en-US"/>
               <a:t>Fifth level</a:t>
             </a:r>
-            <a:endParaRPr lang="en-US"/>
           </a:p>
         </p:txBody>
       </p:sp>
@@ -1781,7 +1784,7 @@
             <a:fld id="{1D8BD707-D9CF-40AE-B4C6-C98DA3205C09}" type="datetimeFigureOut">
               <a:rPr lang="en-US" smtClean="0"/>
               <a:pPr/>
-              <a:t>8/1/2011</a:t>
+              <a:t>10/25/2026</a:t>
             </a:fld>
             <a:endParaRPr lang="en-US"/>
           </a:p>
@@ -1871,10 +1874,9 @@
           <a:lstStyle/>
           <a:p>
             <a:r>
-              <a:rPr lang="en-US" smtClean="0"/>
+              <a:rPr lang="en-US"/>
               <a:t>Click to edit Master title style</a:t>
             </a:r>
-            <a:endParaRPr lang="en-US"/>
           </a:p>
         </p:txBody>
       </p:sp>
@@ -1896,7 +1898,7 @@
             <a:fld id="{1D8BD707-D9CF-40AE-B4C6-C98DA3205C09}" type="datetimeFigureOut">
               <a:rPr lang="en-US" smtClean="0"/>
               <a:pPr/>
-              <a:t>8/1/2011</a:t>
+              <a:t>10/25/2026</a:t>
             </a:fld>
             <a:endParaRPr lang="en-US"/>
           </a:p>
@@ -1988,7 +1990,7 @@
             <a:fld id="{1D8BD707-D9CF-40AE-B4C6-C98DA3205C09}" type="datetimeFigureOut">
               <a:rPr lang="en-US" smtClean="0"/>
               <a:pPr/>
-              <a:t>8/1/2011</a:t>
+              <a:t>10/25/2026</a:t>
             </a:fld>
             <a:endParaRPr lang="en-US"/>
           </a:p>
@@ -2087,10 +2089,9 @@
           </a:lstStyle>
           <a:p>
             <a:r>
-              <a:rPr lang="en-US" smtClean="0"/>
+              <a:rPr lang="en-US"/>
               <a:t>Click to edit Master title style</a:t>
             </a:r>
-            <a:endParaRPr lang="en-US"/>
           </a:p>
         </p:txBody>
       </p:sp>
@@ -2144,38 +2145,37 @@
           <a:p>
             <a:pPr lvl="0"/>
             <a:r>
-              <a:rPr lang="en-US" smtClean="0"/>
+              <a:rPr lang="en-US"/>
               <a:t>Click to edit Master text styles</a:t>
             </a:r>
           </a:p>
           <a:p>
             <a:pPr lvl="1"/>
             <a:r>
-              <a:rPr lang="en-US" smtClean="0"/>
+              <a:rPr lang="en-US"/>
               <a:t>Second level</a:t>
             </a:r>
           </a:p>
           <a:p>
             <a:pPr lvl="2"/>
             <a:r>
-              <a:rPr lang="en-US" smtClean="0"/>
+              <a:rPr lang="en-US"/>
               <a:t>Third level</a:t>
             </a:r>
           </a:p>
           <a:p>
             <a:pPr lvl="3"/>
             <a:r>
-              <a:rPr lang="en-US" smtClean="0"/>
+              <a:rPr lang="en-US"/>
               <a:t>Fourth level</a:t>
             </a:r>
           </a:p>
           <a:p>
             <a:pPr lvl="4"/>
             <a:r>
-              <a:rPr lang="en-US" smtClean="0"/>
+              <a:rPr lang="en-US"/>
               <a:t>Fifth level</a:t>
             </a:r>
-            <a:endParaRPr lang="en-US"/>
           </a:p>
         </p:txBody>
       </p:sp>
@@ -2238,7 +2238,7 @@
           <a:p>
             <a:pPr lvl="0"/>
             <a:r>
-              <a:rPr lang="en-US" smtClean="0"/>
+              <a:rPr lang="en-US"/>
               <a:t>Click to edit Master text styles</a:t>
             </a:r>
           </a:p>
@@ -2262,7 +2262,7 @@
             <a:fld id="{1D8BD707-D9CF-40AE-B4C6-C98DA3205C09}" type="datetimeFigureOut">
               <a:rPr lang="en-US" smtClean="0"/>
               <a:pPr/>
-              <a:t>8/1/2011</a:t>
+              <a:t>10/25/2026</a:t>
             </a:fld>
             <a:endParaRPr lang="en-US"/>
           </a:p>
@@ -2361,10 +2361,9 @@
           </a:lstStyle>
           <a:p>
             <a:r>
-              <a:rPr lang="en-US" smtClean="0"/>
+              <a:rPr lang="en-US"/>
               <a:t>Click to edit Master title style</a:t>
             </a:r>
-            <a:endParaRPr lang="en-US"/>
           </a:p>
         </p:txBody>
       </p:sp>
@@ -2488,7 +2487,7 @@
           <a:p>
             <a:pPr lvl="0"/>
             <a:r>
-              <a:rPr lang="en-US" smtClean="0"/>
+              <a:rPr lang="en-US"/>
               <a:t>Click to edit Master text styles</a:t>
             </a:r>
           </a:p>
@@ -2512,7 +2511,7 @@
             <a:fld id="{1D8BD707-D9CF-40AE-B4C6-C98DA3205C09}" type="datetimeFigureOut">
               <a:rPr lang="en-US" smtClean="0"/>
               <a:pPr/>
-              <a:t>8/1/2011</a:t>
+              <a:t>10/25/2026</a:t>
             </a:fld>
             <a:endParaRPr lang="en-US"/>
           </a:p>
@@ -2617,10 +2616,9 @@
           <a:lstStyle/>
           <a:p>
             <a:r>
-              <a:rPr lang="en-US" smtClean="0"/>
+              <a:rPr lang="en-US"/>
               <a:t>Click to edit Master title style</a:t>
             </a:r>
-            <a:endParaRPr lang="en-US"/>
           </a:p>
         </p:txBody>
       </p:sp>
@@ -2651,38 +2649,37 @@
           <a:p>
             <a:pPr lvl="0"/>
             <a:r>
-              <a:rPr lang="en-US" smtClean="0"/>
+              <a:rPr lang="en-US"/>
               <a:t>Click to edit Master text styles</a:t>
             </a:r>
           </a:p>
           <a:p>
             <a:pPr lvl="1"/>
             <a:r>
-              <a:rPr lang="en-US" smtClean="0"/>
+              <a:rPr lang="en-US"/>
               <a:t>Second level</a:t>
             </a:r>
           </a:p>
           <a:p>
             <a:pPr lvl="2"/>
             <a:r>
-              <a:rPr lang="en-US" smtClean="0"/>
+              <a:rPr lang="en-US"/>
               <a:t>Third level</a:t>
             </a:r>
           </a:p>
           <a:p>
             <a:pPr lvl="3"/>
             <a:r>
-              <a:rPr lang="en-US" smtClean="0"/>
+              <a:rPr lang="en-US"/>
               <a:t>Fourth level</a:t>
             </a:r>
           </a:p>
           <a:p>
             <a:pPr lvl="4"/>
             <a:r>
-              <a:rPr lang="en-US" smtClean="0"/>
+              <a:rPr lang="en-US"/>
               <a:t>Fifth level</a:t>
             </a:r>
-            <a:endParaRPr lang="en-US"/>
           </a:p>
         </p:txBody>
       </p:sp>
@@ -2722,7 +2719,7 @@
             <a:fld id="{1D8BD707-D9CF-40AE-B4C6-C98DA3205C09}" type="datetimeFigureOut">
               <a:rPr lang="en-US" smtClean="0"/>
               <a:pPr/>
-              <a:t>8/1/2011</a:t>
+              <a:t>10/25/2026</a:t>
             </a:fld>
             <a:endParaRPr lang="en-US"/>
           </a:p>
@@ -3077,13 +3074,14 @@
 </file>
 
 <file path=ppt/slides/slide1.xml><?xml version="1.0" encoding="utf-8"?>
-<p:sld xmlns:p="http://schemas.openxmlformats.org/presentationml/2006/main" xmlns:a="http://schemas.openxmlformats.org/drawingml/2006/main" xmlns:r="http://schemas.openxmlformats.org/officeDocument/2006/relationships">
+<p:sld xmlns:a="http://schemas.openxmlformats.org/drawingml/2006/main" xmlns:r="http://schemas.openxmlformats.org/officeDocument/2006/relationships" xmlns:p="http://schemas.openxmlformats.org/presentationml/2006/main">
   <p:cSld>
     <p:bg>
       <p:bgPr>
         <a:solidFill>
           <a:srgbClr val="FFFBF5"/>
         </a:solidFill>
+        <a:effectLst/>
       </p:bgPr>
     </p:bg>
     <p:spTree>
@@ -3102,12 +3100,12 @@
       </p:grpSpPr>
       <p:sp>
         <p:nvSpPr>
-          <p:cNvPr name="Freeform 2" id="2"/>
+          <p:cNvPr id="2" name="Freeform 2"/>
           <p:cNvSpPr/>
           <p:nvPr/>
         </p:nvSpPr>
         <p:spPr>
-          <a:xfrm flipH="false" flipV="false" rot="0">
+          <a:xfrm>
             <a:off x="13608493" y="5414629"/>
             <a:ext cx="4679507" cy="4978199"/>
           </a:xfrm>
@@ -3116,9 +3114,9 @@
             <a:gdLst/>
             <a:ahLst/>
             <a:cxnLst/>
-            <a:rect r="r" b="b" t="t" l="l"/>
+            <a:rect l="l" t="t" r="r" b="b"/>
             <a:pathLst>
-              <a:path h="4978199" w="4679507">
+              <a:path w="4679507" h="4978199">
                 <a:moveTo>
                   <a:pt x="0" y="0"/>
                 </a:moveTo>
@@ -3139,27 +3137,27 @@
             </a:pathLst>
           </a:custGeom>
           <a:blipFill>
-            <a:blip r:embed="rId2">
+            <a:blip>
               <a:extLst>
                 <a:ext uri="{96DAC541-7B7A-43D3-8B79-37D633B846F1}">
-                  <asvg:svgBlip xmlns:asvg="http://schemas.microsoft.com/office/drawing/2016/SVG/main" r:embed="rId3"/>
+                  <asvg:svgBlip xmlns:asvg="http://schemas.microsoft.com/office/drawing/2016/SVG/main" r:embed="rId2"/>
                 </a:ext>
               </a:extLst>
             </a:blip>
             <a:stretch>
-              <a:fillRect l="0" t="0" r="0" b="0"/>
+              <a:fillRect/>
             </a:stretch>
           </a:blipFill>
         </p:spPr>
       </p:sp>
       <p:sp>
         <p:nvSpPr>
-          <p:cNvPr name="Freeform 3" id="3"/>
+          <p:cNvPr id="3" name="Freeform 3"/>
           <p:cNvSpPr/>
           <p:nvPr/>
         </p:nvSpPr>
         <p:spPr>
-          <a:xfrm flipH="true" flipV="true" rot="0">
+          <a:xfrm flipH="1" flipV="1">
             <a:off x="0" y="-32160"/>
             <a:ext cx="4679507" cy="4978199"/>
           </a:xfrm>
@@ -3168,9 +3166,9 @@
             <a:gdLst/>
             <a:ahLst/>
             <a:cxnLst/>
-            <a:rect r="r" b="b" t="t" l="l"/>
+            <a:rect l="l" t="t" r="r" b="b"/>
             <a:pathLst>
-              <a:path h="4978199" w="4679507">
+              <a:path w="4679507" h="4978199">
                 <a:moveTo>
                   <a:pt x="4679507" y="4978199"/>
                 </a:moveTo>
@@ -3191,27 +3189,27 @@
             </a:pathLst>
           </a:custGeom>
           <a:blipFill>
-            <a:blip r:embed="rId2">
+            <a:blip>
               <a:extLst>
                 <a:ext uri="{96DAC541-7B7A-43D3-8B79-37D633B846F1}">
-                  <asvg:svgBlip xmlns:asvg="http://schemas.microsoft.com/office/drawing/2016/SVG/main" r:embed="rId3"/>
+                  <asvg:svgBlip xmlns:asvg="http://schemas.microsoft.com/office/drawing/2016/SVG/main" r:embed="rId2"/>
                 </a:ext>
               </a:extLst>
             </a:blip>
             <a:stretch>
-              <a:fillRect l="0" t="0" r="0" b="0"/>
+              <a:fillRect/>
             </a:stretch>
           </a:blipFill>
         </p:spPr>
       </p:sp>
       <p:sp>
         <p:nvSpPr>
-          <p:cNvPr name="Freeform 4" id="4"/>
+          <p:cNvPr id="4" name="Freeform 4"/>
           <p:cNvSpPr/>
           <p:nvPr/>
         </p:nvSpPr>
         <p:spPr>
-          <a:xfrm flipH="false" flipV="false" rot="0">
+          <a:xfrm>
             <a:off x="0" y="5414629"/>
             <a:ext cx="4261110" cy="4872371"/>
           </a:xfrm>
@@ -3220,9 +3218,9 @@
             <a:gdLst/>
             <a:ahLst/>
             <a:cxnLst/>
-            <a:rect r="r" b="b" t="t" l="l"/>
+            <a:rect l="l" t="t" r="r" b="b"/>
             <a:pathLst>
-              <a:path h="4872371" w="4261110">
+              <a:path w="4261110" h="4872371">
                 <a:moveTo>
                   <a:pt x="0" y="0"/>
                 </a:moveTo>
@@ -3243,27 +3241,27 @@
             </a:pathLst>
           </a:custGeom>
           <a:blipFill>
-            <a:blip r:embed="rId4">
+            <a:blip>
               <a:extLst>
                 <a:ext uri="{96DAC541-7B7A-43D3-8B79-37D633B846F1}">
-                  <asvg:svgBlip xmlns:asvg="http://schemas.microsoft.com/office/drawing/2016/SVG/main" r:embed="rId5"/>
+                  <asvg:svgBlip xmlns:asvg="http://schemas.microsoft.com/office/drawing/2016/SVG/main" r:embed="rId3"/>
                 </a:ext>
               </a:extLst>
             </a:blip>
             <a:stretch>
-              <a:fillRect l="0" t="0" r="0" b="0"/>
+              <a:fillRect/>
             </a:stretch>
           </a:blipFill>
         </p:spPr>
       </p:sp>
       <p:sp>
         <p:nvSpPr>
-          <p:cNvPr name="Freeform 5" id="5"/>
+          <p:cNvPr id="5" name="Freeform 5"/>
           <p:cNvSpPr/>
           <p:nvPr/>
         </p:nvSpPr>
         <p:spPr>
-          <a:xfrm flipH="true" flipV="true" rot="0">
+          <a:xfrm flipH="1" flipV="1">
             <a:off x="13934338" y="-32160"/>
             <a:ext cx="4353662" cy="4978199"/>
           </a:xfrm>
@@ -3272,9 +3270,9 @@
             <a:gdLst/>
             <a:ahLst/>
             <a:cxnLst/>
-            <a:rect r="r" b="b" t="t" l="l"/>
+            <a:rect l="l" t="t" r="r" b="b"/>
             <a:pathLst>
-              <a:path h="4978199" w="4353662">
+              <a:path w="4353662" h="4978199">
                 <a:moveTo>
                   <a:pt x="4353662" y="4978199"/>
                 </a:moveTo>
@@ -3295,27 +3293,27 @@
             </a:pathLst>
           </a:custGeom>
           <a:blipFill>
-            <a:blip r:embed="rId4">
+            <a:blip>
               <a:extLst>
                 <a:ext uri="{96DAC541-7B7A-43D3-8B79-37D633B846F1}">
-                  <asvg:svgBlip xmlns:asvg="http://schemas.microsoft.com/office/drawing/2016/SVG/main" r:embed="rId5"/>
+                  <asvg:svgBlip xmlns:asvg="http://schemas.microsoft.com/office/drawing/2016/SVG/main" r:embed="rId3"/>
                 </a:ext>
               </a:extLst>
             </a:blip>
             <a:stretch>
-              <a:fillRect l="0" t="0" r="0" b="0"/>
+              <a:fillRect/>
             </a:stretch>
           </a:blipFill>
         </p:spPr>
       </p:sp>
       <p:grpSp>
         <p:nvGrpSpPr>
-          <p:cNvPr name="Group 6" id="6"/>
+          <p:cNvPr id="6" name="Group 6"/>
           <p:cNvGrpSpPr/>
           <p:nvPr/>
         </p:nvGrpSpPr>
         <p:grpSpPr>
-          <a:xfrm rot="0">
+          <a:xfrm>
             <a:off x="1568229" y="6020864"/>
             <a:ext cx="2797992" cy="2654390"/>
             <a:chOff x="0" y="0"/>
@@ -3324,12 +3322,12 @@
         </p:grpSpPr>
         <p:grpSp>
           <p:nvGrpSpPr>
-            <p:cNvPr name="Group 7" id="7"/>
+            <p:cNvPr id="7" name="Group 7"/>
             <p:cNvGrpSpPr/>
             <p:nvPr/>
           </p:nvGrpSpPr>
           <p:grpSpPr>
-            <a:xfrm rot="0">
+            <a:xfrm>
               <a:off x="0" y="624089"/>
               <a:ext cx="2915098" cy="2915098"/>
               <a:chOff x="0" y="0"/>
@@ -3338,12 +3336,12 @@
           </p:grpSpPr>
           <p:sp>
             <p:nvSpPr>
-              <p:cNvPr name="Freeform 8" id="8"/>
+              <p:cNvPr id="8" name="Freeform 8"/>
               <p:cNvSpPr/>
               <p:nvPr/>
             </p:nvSpPr>
             <p:spPr>
-              <a:xfrm flipH="false" flipV="false" rot="0">
+              <a:xfrm>
                 <a:off x="0" y="0"/>
                 <a:ext cx="812800" cy="812800"/>
               </a:xfrm>
@@ -3352,9 +3350,9 @@
                 <a:gdLst/>
                 <a:ahLst/>
                 <a:cxnLst/>
-                <a:rect r="r" b="b" t="t" l="l"/>
+                <a:rect l="l" t="t" r="r" b="b"/>
                 <a:pathLst>
-                  <a:path h="812800" w="812800">
+                  <a:path w="812800" h="812800">
                     <a:moveTo>
                       <a:pt x="406400" y="0"/>
                     </a:moveTo>
@@ -3391,8 +3389,8 @@
           </p:sp>
           <p:sp>
             <p:nvSpPr>
-              <p:cNvPr name="TextBox 9" id="9"/>
-              <p:cNvSpPr txBox="true"/>
+              <p:cNvPr id="9" name="TextBox 9"/>
+              <p:cNvSpPr txBox="1"/>
               <p:nvPr/>
             </p:nvSpPr>
             <p:spPr>
@@ -3405,7 +3403,7 @@
               </a:prstGeom>
             </p:spPr>
             <p:txBody>
-              <a:bodyPr anchor="ctr" rtlCol="false" tIns="50800" lIns="50800" bIns="50800" rIns="50800"/>
+              <a:bodyPr lIns="50800" tIns="50800" rIns="50800" bIns="50800" rtlCol="0" anchor="ctr"/>
               <a:lstStyle/>
               <a:p>
                 <a:pPr algn="ctr">
@@ -3416,18 +3414,19 @@
                     <a:spcPct val="0"/>
                   </a:spcBef>
                 </a:pPr>
+                <a:endParaRPr/>
               </a:p>
             </p:txBody>
           </p:sp>
         </p:grpSp>
         <p:grpSp>
           <p:nvGrpSpPr>
-            <p:cNvPr name="Group 10" id="10"/>
+            <p:cNvPr id="10" name="Group 10"/>
             <p:cNvGrpSpPr/>
             <p:nvPr/>
           </p:nvGrpSpPr>
           <p:grpSpPr>
-            <a:xfrm rot="0">
+            <a:xfrm>
               <a:off x="1457549" y="0"/>
               <a:ext cx="2273107" cy="2273107"/>
               <a:chOff x="0" y="0"/>
@@ -3436,12 +3435,12 @@
           </p:grpSpPr>
           <p:sp>
             <p:nvSpPr>
-              <p:cNvPr name="Freeform 11" id="11"/>
+              <p:cNvPr id="11" name="Freeform 11"/>
               <p:cNvSpPr/>
               <p:nvPr/>
             </p:nvSpPr>
             <p:spPr>
-              <a:xfrm flipH="false" flipV="false" rot="0">
+              <a:xfrm>
                 <a:off x="0" y="0"/>
                 <a:ext cx="812800" cy="812800"/>
               </a:xfrm>
@@ -3450,9 +3449,9 @@
                 <a:gdLst/>
                 <a:ahLst/>
                 <a:cxnLst/>
-                <a:rect r="r" b="b" t="t" l="l"/>
+                <a:rect l="l" t="t" r="r" b="b"/>
                 <a:pathLst>
-                  <a:path h="812800" w="812800">
+                  <a:path w="812800" h="812800">
                     <a:moveTo>
                       <a:pt x="406400" y="0"/>
                     </a:moveTo>
@@ -3487,8 +3486,8 @@
           </p:sp>
           <p:sp>
             <p:nvSpPr>
-              <p:cNvPr name="TextBox 12" id="12"/>
-              <p:cNvSpPr txBox="true"/>
+              <p:cNvPr id="12" name="TextBox 12"/>
+              <p:cNvSpPr txBox="1"/>
               <p:nvPr/>
             </p:nvSpPr>
             <p:spPr>
@@ -3501,7 +3500,7 @@
               </a:prstGeom>
             </p:spPr>
             <p:txBody>
-              <a:bodyPr anchor="ctr" rtlCol="false" tIns="50800" lIns="50800" bIns="50800" rIns="50800"/>
+              <a:bodyPr lIns="50800" tIns="50800" rIns="50800" bIns="50800" rtlCol="0" anchor="ctr"/>
               <a:lstStyle/>
               <a:p>
                 <a:pPr algn="ctr">
@@ -3512,6 +3511,7 @@
                     <a:spcPct val="0"/>
                   </a:spcBef>
                 </a:pPr>
+                <a:endParaRPr/>
               </a:p>
             </p:txBody>
           </p:sp>
@@ -3519,7 +3519,7 @@
       </p:grpSp>
       <p:grpSp>
         <p:nvGrpSpPr>
-          <p:cNvPr name="Group 13" id="13"/>
+          <p:cNvPr id="13" name="Group 13"/>
           <p:cNvGrpSpPr/>
           <p:nvPr/>
         </p:nvGrpSpPr>
@@ -3533,12 +3533,12 @@
         </p:grpSpPr>
         <p:grpSp>
           <p:nvGrpSpPr>
-            <p:cNvPr name="Group 14" id="14"/>
+            <p:cNvPr id="14" name="Group 14"/>
             <p:cNvGrpSpPr/>
             <p:nvPr/>
           </p:nvGrpSpPr>
           <p:grpSpPr>
-            <a:xfrm rot="0">
+            <a:xfrm>
               <a:off x="0" y="624089"/>
               <a:ext cx="2915098" cy="2915098"/>
               <a:chOff x="0" y="0"/>
@@ -3547,12 +3547,12 @@
           </p:grpSpPr>
           <p:sp>
             <p:nvSpPr>
-              <p:cNvPr name="Freeform 15" id="15"/>
+              <p:cNvPr id="15" name="Freeform 15"/>
               <p:cNvSpPr/>
               <p:nvPr/>
             </p:nvSpPr>
             <p:spPr>
-              <a:xfrm flipH="false" flipV="false" rot="0">
+              <a:xfrm>
                 <a:off x="0" y="0"/>
                 <a:ext cx="812800" cy="812800"/>
               </a:xfrm>
@@ -3561,9 +3561,9 @@
                 <a:gdLst/>
                 <a:ahLst/>
                 <a:cxnLst/>
-                <a:rect r="r" b="b" t="t" l="l"/>
+                <a:rect l="l" t="t" r="r" b="b"/>
                 <a:pathLst>
-                  <a:path h="812800" w="812800">
+                  <a:path w="812800" h="812800">
                     <a:moveTo>
                       <a:pt x="406400" y="0"/>
                     </a:moveTo>
@@ -3600,8 +3600,8 @@
           </p:sp>
           <p:sp>
             <p:nvSpPr>
-              <p:cNvPr name="TextBox 16" id="16"/>
-              <p:cNvSpPr txBox="true"/>
+              <p:cNvPr id="16" name="TextBox 16"/>
+              <p:cNvSpPr txBox="1"/>
               <p:nvPr/>
             </p:nvSpPr>
             <p:spPr>
@@ -3614,7 +3614,7 @@
               </a:prstGeom>
             </p:spPr>
             <p:txBody>
-              <a:bodyPr anchor="ctr" rtlCol="false" tIns="50800" lIns="50800" bIns="50800" rIns="50800"/>
+              <a:bodyPr lIns="50800" tIns="50800" rIns="50800" bIns="50800" rtlCol="0" anchor="ctr"/>
               <a:lstStyle/>
               <a:p>
                 <a:pPr algn="ctr">
@@ -3625,18 +3625,19 @@
                     <a:spcPct val="0"/>
                   </a:spcBef>
                 </a:pPr>
+                <a:endParaRPr/>
               </a:p>
             </p:txBody>
           </p:sp>
         </p:grpSp>
         <p:grpSp>
           <p:nvGrpSpPr>
-            <p:cNvPr name="Group 17" id="17"/>
+            <p:cNvPr id="17" name="Group 17"/>
             <p:cNvGrpSpPr/>
             <p:nvPr/>
           </p:nvGrpSpPr>
           <p:grpSpPr>
-            <a:xfrm rot="0">
+            <a:xfrm>
               <a:off x="1457549" y="0"/>
               <a:ext cx="2273107" cy="2273107"/>
               <a:chOff x="0" y="0"/>
@@ -3645,12 +3646,12 @@
           </p:grpSpPr>
           <p:sp>
             <p:nvSpPr>
-              <p:cNvPr name="Freeform 18" id="18"/>
+              <p:cNvPr id="18" name="Freeform 18"/>
               <p:cNvSpPr/>
               <p:nvPr/>
             </p:nvSpPr>
             <p:spPr>
-              <a:xfrm flipH="false" flipV="false" rot="0">
+              <a:xfrm>
                 <a:off x="0" y="0"/>
                 <a:ext cx="812800" cy="812800"/>
               </a:xfrm>
@@ -3659,9 +3660,9 @@
                 <a:gdLst/>
                 <a:ahLst/>
                 <a:cxnLst/>
-                <a:rect r="r" b="b" t="t" l="l"/>
+                <a:rect l="l" t="t" r="r" b="b"/>
                 <a:pathLst>
-                  <a:path h="812800" w="812800">
+                  <a:path w="812800" h="812800">
                     <a:moveTo>
                       <a:pt x="406400" y="0"/>
                     </a:moveTo>
@@ -3696,8 +3697,8 @@
           </p:sp>
           <p:sp>
             <p:nvSpPr>
-              <p:cNvPr name="TextBox 19" id="19"/>
-              <p:cNvSpPr txBox="true"/>
+              <p:cNvPr id="19" name="TextBox 19"/>
+              <p:cNvSpPr txBox="1"/>
               <p:nvPr/>
             </p:nvSpPr>
             <p:spPr>
@@ -3710,7 +3711,7 @@
               </a:prstGeom>
             </p:spPr>
             <p:txBody>
-              <a:bodyPr anchor="ctr" rtlCol="false" tIns="50800" lIns="50800" bIns="50800" rIns="50800"/>
+              <a:bodyPr lIns="50800" tIns="50800" rIns="50800" bIns="50800" rtlCol="0" anchor="ctr"/>
               <a:lstStyle/>
               <a:p>
                 <a:pPr algn="ctr">
@@ -3721,6 +3722,7 @@
                     <a:spcPct val="0"/>
                   </a:spcBef>
                 </a:pPr>
+                <a:endParaRPr/>
               </a:p>
             </p:txBody>
           </p:sp>
@@ -3728,12 +3730,12 @@
       </p:grpSp>
       <p:sp>
         <p:nvSpPr>
-          <p:cNvPr name="TextBox 20" id="20"/>
-          <p:cNvSpPr txBox="true"/>
+          <p:cNvPr id="20" name="TextBox 20"/>
+          <p:cNvSpPr txBox="1"/>
           <p:nvPr/>
         </p:nvSpPr>
         <p:spPr>
-          <a:xfrm rot="0">
+          <a:xfrm>
             <a:off x="4679507" y="2263211"/>
             <a:ext cx="9038496" cy="6843404"/>
           </a:xfrm>
@@ -3742,12 +3744,12 @@
           </a:prstGeom>
         </p:spPr>
         <p:txBody>
-          <a:bodyPr anchor="t" rtlCol="false" tIns="0" lIns="0" bIns="0" rIns="0">
+          <a:bodyPr lIns="0" tIns="0" rIns="0" bIns="0" rtlCol="0" anchor="t">
             <a:spAutoFit/>
           </a:bodyPr>
           <a:lstStyle/>
           <a:p>
-            <a:pPr algn="ctr" marL="0" indent="0" lvl="0">
+            <a:pPr marL="0" lvl="0" indent="0" algn="ctr">
               <a:lnSpc>
                 <a:spcPts val="24564"/>
               </a:lnSpc>
@@ -3776,13 +3778,14 @@
 </file>
 
 <file path=ppt/slides/slide2.xml><?xml version="1.0" encoding="utf-8"?>
-<p:sld xmlns:p="http://schemas.openxmlformats.org/presentationml/2006/main" xmlns:a="http://schemas.openxmlformats.org/drawingml/2006/main" xmlns:r="http://schemas.openxmlformats.org/officeDocument/2006/relationships">
+<p:sld xmlns:a="http://schemas.openxmlformats.org/drawingml/2006/main" xmlns:r="http://schemas.openxmlformats.org/officeDocument/2006/relationships" xmlns:p="http://schemas.openxmlformats.org/presentationml/2006/main">
   <p:cSld>
     <p:bg>
       <p:bgPr>
         <a:solidFill>
           <a:srgbClr val="FFFBF5"/>
         </a:solidFill>
+        <a:effectLst/>
       </p:bgPr>
     </p:bg>
     <p:spTree>
@@ -3801,12 +3804,12 @@
       </p:grpSpPr>
       <p:sp>
         <p:nvSpPr>
-          <p:cNvPr name="Freeform 2" id="2"/>
+          <p:cNvPr id="2" name="Freeform 2"/>
           <p:cNvSpPr/>
           <p:nvPr/>
         </p:nvSpPr>
         <p:spPr>
-          <a:xfrm flipH="false" flipV="false" rot="0">
+          <a:xfrm>
             <a:off x="0" y="5414629"/>
             <a:ext cx="4261110" cy="4872371"/>
           </a:xfrm>
@@ -3815,9 +3818,9 @@
             <a:gdLst/>
             <a:ahLst/>
             <a:cxnLst/>
-            <a:rect r="r" b="b" t="t" l="l"/>
+            <a:rect l="l" t="t" r="r" b="b"/>
             <a:pathLst>
-              <a:path h="4872371" w="4261110">
+              <a:path w="4261110" h="4872371">
                 <a:moveTo>
                   <a:pt x="0" y="0"/>
                 </a:moveTo>
@@ -3838,27 +3841,27 @@
             </a:pathLst>
           </a:custGeom>
           <a:blipFill>
-            <a:blip r:embed="rId2">
+            <a:blip>
               <a:extLst>
                 <a:ext uri="{96DAC541-7B7A-43D3-8B79-37D633B846F1}">
-                  <asvg:svgBlip xmlns:asvg="http://schemas.microsoft.com/office/drawing/2016/SVG/main" r:embed="rId3"/>
+                  <asvg:svgBlip xmlns:asvg="http://schemas.microsoft.com/office/drawing/2016/SVG/main" r:embed="rId2"/>
                 </a:ext>
               </a:extLst>
             </a:blip>
             <a:stretch>
-              <a:fillRect l="0" t="0" r="0" b="0"/>
+              <a:fillRect/>
             </a:stretch>
           </a:blipFill>
         </p:spPr>
       </p:sp>
       <p:sp>
         <p:nvSpPr>
-          <p:cNvPr name="Freeform 3" id="3"/>
+          <p:cNvPr id="3" name="Freeform 3"/>
           <p:cNvSpPr/>
           <p:nvPr/>
         </p:nvSpPr>
         <p:spPr>
-          <a:xfrm flipH="true" flipV="true" rot="0">
+          <a:xfrm flipH="1" flipV="1">
             <a:off x="13934338" y="-32160"/>
             <a:ext cx="4353662" cy="4978199"/>
           </a:xfrm>
@@ -3867,9 +3870,9 @@
             <a:gdLst/>
             <a:ahLst/>
             <a:cxnLst/>
-            <a:rect r="r" b="b" t="t" l="l"/>
+            <a:rect l="l" t="t" r="r" b="b"/>
             <a:pathLst>
-              <a:path h="4978199" w="4353662">
+              <a:path w="4353662" h="4978199">
                 <a:moveTo>
                   <a:pt x="4353662" y="4978199"/>
                 </a:moveTo>
@@ -3890,27 +3893,27 @@
             </a:pathLst>
           </a:custGeom>
           <a:blipFill>
-            <a:blip r:embed="rId2">
+            <a:blip>
               <a:extLst>
                 <a:ext uri="{96DAC541-7B7A-43D3-8B79-37D633B846F1}">
-                  <asvg:svgBlip xmlns:asvg="http://schemas.microsoft.com/office/drawing/2016/SVG/main" r:embed="rId3"/>
+                  <asvg:svgBlip xmlns:asvg="http://schemas.microsoft.com/office/drawing/2016/SVG/main" r:embed="rId2"/>
                 </a:ext>
               </a:extLst>
             </a:blip>
             <a:stretch>
-              <a:fillRect l="0" t="0" r="0" b="0"/>
+              <a:fillRect/>
             </a:stretch>
           </a:blipFill>
         </p:spPr>
       </p:sp>
       <p:sp>
         <p:nvSpPr>
-          <p:cNvPr name="Freeform 4" id="4"/>
+          <p:cNvPr id="4" name="Freeform 4"/>
           <p:cNvSpPr/>
           <p:nvPr/>
         </p:nvSpPr>
         <p:spPr>
-          <a:xfrm flipH="true" flipV="false" rot="0">
+          <a:xfrm flipH="1">
             <a:off x="13934338" y="5361715"/>
             <a:ext cx="4353662" cy="4978199"/>
           </a:xfrm>
@@ -3919,9 +3922,9 @@
             <a:gdLst/>
             <a:ahLst/>
             <a:cxnLst/>
-            <a:rect r="r" b="b" t="t" l="l"/>
+            <a:rect l="l" t="t" r="r" b="b"/>
             <a:pathLst>
-              <a:path h="4978199" w="4353662">
+              <a:path w="4353662" h="4978199">
                 <a:moveTo>
                   <a:pt x="4353662" y="0"/>
                 </a:moveTo>
@@ -3942,27 +3945,27 @@
             </a:pathLst>
           </a:custGeom>
           <a:blipFill>
-            <a:blip r:embed="rId2">
+            <a:blip>
               <a:extLst>
                 <a:ext uri="{96DAC541-7B7A-43D3-8B79-37D633B846F1}">
-                  <asvg:svgBlip xmlns:asvg="http://schemas.microsoft.com/office/drawing/2016/SVG/main" r:embed="rId3"/>
+                  <asvg:svgBlip xmlns:asvg="http://schemas.microsoft.com/office/drawing/2016/SVG/main" r:embed="rId2"/>
                 </a:ext>
               </a:extLst>
             </a:blip>
             <a:stretch>
-              <a:fillRect l="0" t="0" r="0" b="0"/>
+              <a:fillRect/>
             </a:stretch>
           </a:blipFill>
         </p:spPr>
       </p:sp>
       <p:sp>
         <p:nvSpPr>
-          <p:cNvPr name="Freeform 5" id="5"/>
+          <p:cNvPr id="5" name="Freeform 5"/>
           <p:cNvSpPr/>
           <p:nvPr/>
         </p:nvSpPr>
         <p:spPr>
-          <a:xfrm flipH="false" flipV="true" rot="0">
+          <a:xfrm flipV="1">
             <a:off x="0" y="0"/>
             <a:ext cx="4353662" cy="4978199"/>
           </a:xfrm>
@@ -3971,9 +3974,9 @@
             <a:gdLst/>
             <a:ahLst/>
             <a:cxnLst/>
-            <a:rect r="r" b="b" t="t" l="l"/>
+            <a:rect l="l" t="t" r="r" b="b"/>
             <a:pathLst>
-              <a:path h="4978199" w="4353662">
+              <a:path w="4353662" h="4978199">
                 <a:moveTo>
                   <a:pt x="0" y="4978199"/>
                 </a:moveTo>
@@ -3994,27 +3997,27 @@
             </a:pathLst>
           </a:custGeom>
           <a:blipFill>
-            <a:blip r:embed="rId2">
+            <a:blip>
               <a:extLst>
                 <a:ext uri="{96DAC541-7B7A-43D3-8B79-37D633B846F1}">
-                  <asvg:svgBlip xmlns:asvg="http://schemas.microsoft.com/office/drawing/2016/SVG/main" r:embed="rId3"/>
+                  <asvg:svgBlip xmlns:asvg="http://schemas.microsoft.com/office/drawing/2016/SVG/main" r:embed="rId2"/>
                 </a:ext>
               </a:extLst>
             </a:blip>
             <a:stretch>
-              <a:fillRect l="0" t="0" r="0" b="0"/>
+              <a:fillRect/>
             </a:stretch>
           </a:blipFill>
         </p:spPr>
       </p:sp>
       <p:sp>
         <p:nvSpPr>
-          <p:cNvPr name="Freeform 6" id="6"/>
+          <p:cNvPr id="6" name="Freeform 6"/>
           <p:cNvSpPr/>
           <p:nvPr/>
         </p:nvSpPr>
         <p:spPr>
-          <a:xfrm flipH="false" flipV="false" rot="0">
+          <a:xfrm>
             <a:off x="1028700" y="4655960"/>
             <a:ext cx="6290437" cy="2251061"/>
           </a:xfrm>
@@ -4023,9 +4026,9 @@
             <a:gdLst/>
             <a:ahLst/>
             <a:cxnLst/>
-            <a:rect r="r" b="b" t="t" l="l"/>
+            <a:rect l="l" t="t" r="r" b="b"/>
             <a:pathLst>
-              <a:path h="2251061" w="6290437">
+              <a:path w="6290437" h="2251061">
                 <a:moveTo>
                   <a:pt x="0" y="0"/>
                 </a:moveTo>
@@ -4046,21 +4049,21 @@
             </a:pathLst>
           </a:custGeom>
           <a:blipFill>
-            <a:blip r:embed="rId4"/>
+            <a:blip r:embed="rId3"/>
             <a:stretch>
-              <a:fillRect l="0" t="0" r="0" b="0"/>
+              <a:fillRect/>
             </a:stretch>
           </a:blipFill>
         </p:spPr>
       </p:sp>
       <p:sp>
         <p:nvSpPr>
-          <p:cNvPr name="Freeform 7" id="7"/>
+          <p:cNvPr id="7" name="Freeform 7"/>
           <p:cNvSpPr/>
           <p:nvPr/>
         </p:nvSpPr>
         <p:spPr>
-          <a:xfrm flipH="false" flipV="false" rot="0">
+          <a:xfrm>
             <a:off x="7319137" y="4655960"/>
             <a:ext cx="8678788" cy="2251061"/>
           </a:xfrm>
@@ -4069,9 +4072,9 @@
             <a:gdLst/>
             <a:ahLst/>
             <a:cxnLst/>
-            <a:rect r="r" b="b" t="t" l="l"/>
+            <a:rect l="l" t="t" r="r" b="b"/>
             <a:pathLst>
-              <a:path h="2251061" w="8678788">
+              <a:path w="8678788" h="2251061">
                 <a:moveTo>
                   <a:pt x="0" y="0"/>
                 </a:moveTo>
@@ -4092,21 +4095,21 @@
             </a:pathLst>
           </a:custGeom>
           <a:blipFill>
-            <a:blip r:embed="rId5"/>
+            <a:blip r:embed="rId4"/>
             <a:stretch>
-              <a:fillRect l="0" t="0" r="0" b="0"/>
+              <a:fillRect/>
             </a:stretch>
           </a:blipFill>
         </p:spPr>
       </p:sp>
       <p:sp>
         <p:nvSpPr>
-          <p:cNvPr name="Freeform 8" id="8"/>
+          <p:cNvPr id="8" name="Freeform 8"/>
           <p:cNvSpPr/>
           <p:nvPr/>
         </p:nvSpPr>
         <p:spPr>
-          <a:xfrm flipH="false" flipV="false" rot="0">
+          <a:xfrm>
             <a:off x="1848470" y="6907021"/>
             <a:ext cx="4825280" cy="2112738"/>
           </a:xfrm>
@@ -4115,9 +4118,9 @@
             <a:gdLst/>
             <a:ahLst/>
             <a:cxnLst/>
-            <a:rect r="r" b="b" t="t" l="l"/>
+            <a:rect l="l" t="t" r="r" b="b"/>
             <a:pathLst>
-              <a:path h="2112738" w="4825280">
+              <a:path w="4825280" h="2112738">
                 <a:moveTo>
                   <a:pt x="0" y="0"/>
                 </a:moveTo>
@@ -4138,67 +4141,21 @@
             </a:pathLst>
           </a:custGeom>
           <a:blipFill>
-            <a:blip r:embed="rId6"/>
+            <a:blip r:embed="rId5"/>
             <a:stretch>
-              <a:fillRect l="0" t="0" r="0" b="0"/>
+              <a:fillRect/>
             </a:stretch>
           </a:blipFill>
         </p:spPr>
       </p:sp>
       <p:sp>
         <p:nvSpPr>
-          <p:cNvPr name="Freeform 9" id="9"/>
+          <p:cNvPr id="10" name="Freeform 10"/>
           <p:cNvSpPr/>
           <p:nvPr/>
         </p:nvSpPr>
         <p:spPr>
-          <a:xfrm flipH="false" flipV="false" rot="0">
-            <a:off x="6861856" y="7390694"/>
-            <a:ext cx="3829571" cy="3258131"/>
-          </a:xfrm>
-          <a:custGeom>
-            <a:avLst/>
-            <a:gdLst/>
-            <a:ahLst/>
-            <a:cxnLst/>
-            <a:rect r="r" b="b" t="t" l="l"/>
-            <a:pathLst>
-              <a:path h="3258131" w="3829571">
-                <a:moveTo>
-                  <a:pt x="0" y="0"/>
-                </a:moveTo>
-                <a:lnTo>
-                  <a:pt x="3829572" y="0"/>
-                </a:lnTo>
-                <a:lnTo>
-                  <a:pt x="3829572" y="3258131"/>
-                </a:lnTo>
-                <a:lnTo>
-                  <a:pt x="0" y="3258131"/>
-                </a:lnTo>
-                <a:lnTo>
-                  <a:pt x="0" y="0"/>
-                </a:lnTo>
-                <a:close/>
-              </a:path>
-            </a:pathLst>
-          </a:custGeom>
-          <a:blipFill>
-            <a:blip r:embed="rId7"/>
-            <a:stretch>
-              <a:fillRect l="0" t="0" r="0" b="0"/>
-            </a:stretch>
-          </a:blipFill>
-        </p:spPr>
-      </p:sp>
-      <p:sp>
-        <p:nvSpPr>
-          <p:cNvPr name="Freeform 10" id="10"/>
-          <p:cNvSpPr/>
-          <p:nvPr/>
-        </p:nvSpPr>
-        <p:spPr>
-          <a:xfrm flipH="false" flipV="false" rot="0">
+          <a:xfrm>
             <a:off x="10691428" y="6907021"/>
             <a:ext cx="5306497" cy="2264428"/>
           </a:xfrm>
@@ -4207,9 +4164,9 @@
             <a:gdLst/>
             <a:ahLst/>
             <a:cxnLst/>
-            <a:rect r="r" b="b" t="t" l="l"/>
+            <a:rect l="l" t="t" r="r" b="b"/>
             <a:pathLst>
-              <a:path h="2264428" w="5306497">
+              <a:path w="5306497" h="2264428">
                 <a:moveTo>
                   <a:pt x="0" y="0"/>
                 </a:moveTo>
@@ -4230,21 +4187,21 @@
             </a:pathLst>
           </a:custGeom>
           <a:blipFill>
-            <a:blip r:embed="rId8"/>
+            <a:blip r:embed="rId6"/>
             <a:stretch>
-              <a:fillRect l="0" t="0" r="0" b="0"/>
+              <a:fillRect/>
             </a:stretch>
           </a:blipFill>
         </p:spPr>
       </p:sp>
       <p:sp>
         <p:nvSpPr>
-          <p:cNvPr name="Freeform 11" id="11"/>
+          <p:cNvPr id="11" name="Freeform 11"/>
           <p:cNvSpPr/>
           <p:nvPr/>
         </p:nvSpPr>
         <p:spPr>
-          <a:xfrm flipH="false" flipV="false" rot="0">
+          <a:xfrm>
             <a:off x="5528751" y="5781491"/>
             <a:ext cx="5992167" cy="3098491"/>
           </a:xfrm>
@@ -4253,9 +4210,9 @@
             <a:gdLst/>
             <a:ahLst/>
             <a:cxnLst/>
-            <a:rect r="r" b="b" t="t" l="l"/>
+            <a:rect l="l" t="t" r="r" b="b"/>
             <a:pathLst>
-              <a:path h="3098491" w="5992167">
+              <a:path w="5992167" h="3098491">
                 <a:moveTo>
                   <a:pt x="0" y="0"/>
                 </a:moveTo>
@@ -4276,41 +4233,41 @@
             </a:pathLst>
           </a:custGeom>
           <a:blipFill>
-            <a:blip r:embed="rId9"/>
+            <a:blip r:embed="rId7"/>
             <a:stretch>
-              <a:fillRect l="0" t="0" r="0" b="0"/>
+              <a:fillRect/>
             </a:stretch>
           </a:blipFill>
         </p:spPr>
       </p:sp>
       <p:sp>
         <p:nvSpPr>
-          <p:cNvPr name="TextBox 12" id="12"/>
-          <p:cNvSpPr txBox="true"/>
+          <p:cNvPr id="12" name="TextBox 12"/>
+          <p:cNvSpPr txBox="1"/>
           <p:nvPr/>
         </p:nvSpPr>
         <p:spPr>
-          <a:xfrm rot="0">
+          <a:xfrm>
             <a:off x="5984137" y="354172"/>
-            <a:ext cx="6319726" cy="1172179"/>
+            <a:ext cx="6319726" cy="1034514"/>
           </a:xfrm>
           <a:prstGeom prst="rect">
             <a:avLst/>
           </a:prstGeom>
         </p:spPr>
         <p:txBody>
-          <a:bodyPr anchor="t" rtlCol="false" tIns="0" lIns="0" bIns="0" rIns="0">
+          <a:bodyPr lIns="0" tIns="0" rIns="0" bIns="0" rtlCol="0" anchor="t">
             <a:spAutoFit/>
           </a:bodyPr>
           <a:lstStyle/>
           <a:p>
-            <a:pPr algn="ctr" marL="0" indent="0" lvl="0">
+            <a:pPr marL="0" lvl="0" indent="0" algn="ctr">
               <a:lnSpc>
                 <a:spcPts val="7717"/>
               </a:lnSpc>
             </a:pPr>
             <a:r>
-              <a:rPr lang="en-US" sz="7640">
+              <a:rPr lang="en-US" sz="7640" dirty="0">
                 <a:solidFill>
                   <a:srgbClr val="272530"/>
                 </a:solidFill>
@@ -4319,19 +4276,19 @@
                 <a:cs typeface="Tajawal"/>
                 <a:sym typeface="Tajawal"/>
               </a:rPr>
-              <a:t>PS3</a:t>
+              <a:t>PS1</a:t>
             </a:r>
           </a:p>
         </p:txBody>
       </p:sp>
       <p:sp>
         <p:nvSpPr>
-          <p:cNvPr name="TextBox 13" id="13"/>
-          <p:cNvSpPr txBox="true"/>
+          <p:cNvPr id="13" name="TextBox 13"/>
+          <p:cNvSpPr txBox="1"/>
           <p:nvPr/>
         </p:nvSpPr>
         <p:spPr>
-          <a:xfrm rot="0">
+          <a:xfrm>
             <a:off x="1028700" y="1730859"/>
             <a:ext cx="16230600" cy="2925101"/>
           </a:xfrm>
@@ -4340,12 +4297,12 @@
           </a:prstGeom>
         </p:spPr>
         <p:txBody>
-          <a:bodyPr anchor="t" rtlCol="false" tIns="0" lIns="0" bIns="0" rIns="0">
+          <a:bodyPr lIns="0" tIns="0" rIns="0" bIns="0" rtlCol="0" anchor="t">
             <a:spAutoFit/>
           </a:bodyPr>
           <a:lstStyle/>
           <a:p>
-            <a:pPr algn="l" marL="720790" indent="-360395" lvl="1">
+            <a:pPr marL="720790" lvl="1" indent="-360395" algn="l">
               <a:lnSpc>
                 <a:spcPts val="4673"/>
               </a:lnSpc>
@@ -4366,7 +4323,7 @@
             </a:r>
           </a:p>
           <a:p>
-            <a:pPr algn="l" marL="720790" indent="-360395" lvl="1">
+            <a:pPr marL="720790" lvl="1" indent="-360395" algn="l">
               <a:lnSpc>
                 <a:spcPts val="4673"/>
               </a:lnSpc>
@@ -4387,7 +4344,7 @@
             </a:r>
           </a:p>
           <a:p>
-            <a:pPr algn="l" marL="720790" indent="-360395" lvl="1">
+            <a:pPr marL="720790" lvl="1" indent="-360395" algn="l">
               <a:lnSpc>
                 <a:spcPts val="4673"/>
               </a:lnSpc>
@@ -4409,6 +4366,36 @@
           </a:p>
         </p:txBody>
       </p:sp>
+      <p:pic>
+        <p:nvPicPr>
+          <p:cNvPr id="15" name="Picture 14">
+            <a:extLst>
+              <a:ext uri="{FF2B5EF4-FFF2-40B4-BE49-F238E27FC236}">
+                <a16:creationId xmlns:a16="http://schemas.microsoft.com/office/drawing/2014/main" id="{95096FA3-B303-633B-F024-F8D95F515BD2}"/>
+              </a:ext>
+            </a:extLst>
+          </p:cNvPr>
+          <p:cNvPicPr>
+            <a:picLocks noChangeAspect="1"/>
+          </p:cNvPicPr>
+          <p:nvPr/>
+        </p:nvPicPr>
+        <p:blipFill>
+          <a:blip r:embed="rId8"/>
+          <a:stretch>
+            <a:fillRect/>
+          </a:stretch>
+        </p:blipFill>
+        <p:spPr>
+          <a:xfrm>
+            <a:off x="1289753" y="1493624"/>
+            <a:ext cx="15759825" cy="7840875"/>
+          </a:xfrm>
+          <a:prstGeom prst="rect">
+            <a:avLst/>
+          </a:prstGeom>
+        </p:spPr>
+      </p:pic>
     </p:spTree>
   </p:cSld>
   <p:clrMapOvr>
@@ -4418,13 +4405,1376 @@
 </file>
 
 <file path=ppt/slides/slide3.xml><?xml version="1.0" encoding="utf-8"?>
-<p:sld xmlns:p="http://schemas.openxmlformats.org/presentationml/2006/main" xmlns:a="http://schemas.openxmlformats.org/drawingml/2006/main" xmlns:r="http://schemas.openxmlformats.org/officeDocument/2006/relationships">
+<p:sld xmlns:a="http://schemas.openxmlformats.org/drawingml/2006/main" xmlns:r="http://schemas.openxmlformats.org/officeDocument/2006/relationships" xmlns:p="http://schemas.openxmlformats.org/presentationml/2006/main">
+  <p:cSld>
+    <p:spTree>
+      <p:nvGrpSpPr>
+        <p:cNvPr id="1" name="">
+          <a:extLst>
+            <a:ext uri="{FF2B5EF4-FFF2-40B4-BE49-F238E27FC236}">
+              <a16:creationId xmlns:a16="http://schemas.microsoft.com/office/drawing/2014/main" id="{3CBCEAD0-329D-2298-E817-09ED379EF52B}"/>
+            </a:ext>
+          </a:extLst>
+        </p:cNvPr>
+        <p:cNvGrpSpPr/>
+        <p:nvPr/>
+      </p:nvGrpSpPr>
+      <p:grpSpPr>
+        <a:xfrm>
+          <a:off x="0" y="0"/>
+          <a:ext cx="0" cy="0"/>
+          <a:chOff x="0" y="0"/>
+          <a:chExt cx="0" cy="0"/>
+        </a:xfrm>
+      </p:grpSpPr>
+      <p:sp>
+        <p:nvSpPr>
+          <p:cNvPr id="2" name="Freeform 2">
+            <a:extLst>
+              <a:ext uri="{FF2B5EF4-FFF2-40B4-BE49-F238E27FC236}">
+                <a16:creationId xmlns:a16="http://schemas.microsoft.com/office/drawing/2014/main" id="{4A9E21DD-7F82-6DD3-C561-F200602EC23C}"/>
+              </a:ext>
+            </a:extLst>
+          </p:cNvPr>
+          <p:cNvSpPr/>
+          <p:nvPr/>
+        </p:nvSpPr>
+        <p:spPr>
+          <a:xfrm>
+            <a:off x="0" y="5414629"/>
+            <a:ext cx="4261110" cy="4872371"/>
+          </a:xfrm>
+          <a:custGeom>
+            <a:avLst/>
+            <a:gdLst/>
+            <a:ahLst/>
+            <a:cxnLst/>
+            <a:rect l="l" t="t" r="r" b="b"/>
+            <a:pathLst>
+              <a:path w="4261110" h="4872371">
+                <a:moveTo>
+                  <a:pt x="0" y="0"/>
+                </a:moveTo>
+                <a:lnTo>
+                  <a:pt x="4261110" y="0"/>
+                </a:lnTo>
+                <a:lnTo>
+                  <a:pt x="4261110" y="4872371"/>
+                </a:lnTo>
+                <a:lnTo>
+                  <a:pt x="0" y="4872371"/>
+                </a:lnTo>
+                <a:lnTo>
+                  <a:pt x="0" y="0"/>
+                </a:lnTo>
+                <a:close/>
+              </a:path>
+            </a:pathLst>
+          </a:custGeom>
+          <a:blipFill>
+            <a:blip>
+              <a:extLst>
+                <a:ext uri="{96DAC541-7B7A-43D3-8B79-37D633B846F1}">
+                  <asvg:svgBlip xmlns:asvg="http://schemas.microsoft.com/office/drawing/2016/SVG/main" r:embed="rId2"/>
+                </a:ext>
+              </a:extLst>
+            </a:blip>
+            <a:stretch>
+              <a:fillRect/>
+            </a:stretch>
+          </a:blipFill>
+        </p:spPr>
+      </p:sp>
+      <p:sp>
+        <p:nvSpPr>
+          <p:cNvPr id="3" name="Freeform 3">
+            <a:extLst>
+              <a:ext uri="{FF2B5EF4-FFF2-40B4-BE49-F238E27FC236}">
+                <a16:creationId xmlns:a16="http://schemas.microsoft.com/office/drawing/2014/main" id="{1B5F85C0-DDB9-4173-F697-DAD23EED6083}"/>
+              </a:ext>
+            </a:extLst>
+          </p:cNvPr>
+          <p:cNvSpPr/>
+          <p:nvPr/>
+        </p:nvSpPr>
+        <p:spPr>
+          <a:xfrm flipH="1" flipV="1">
+            <a:off x="13934338" y="-32160"/>
+            <a:ext cx="4353662" cy="4978199"/>
+          </a:xfrm>
+          <a:custGeom>
+            <a:avLst/>
+            <a:gdLst/>
+            <a:ahLst/>
+            <a:cxnLst/>
+            <a:rect l="l" t="t" r="r" b="b"/>
+            <a:pathLst>
+              <a:path w="4353662" h="4978199">
+                <a:moveTo>
+                  <a:pt x="4353662" y="4978199"/>
+                </a:moveTo>
+                <a:lnTo>
+                  <a:pt x="0" y="4978199"/>
+                </a:lnTo>
+                <a:lnTo>
+                  <a:pt x="0" y="0"/>
+                </a:lnTo>
+                <a:lnTo>
+                  <a:pt x="4353662" y="0"/>
+                </a:lnTo>
+                <a:lnTo>
+                  <a:pt x="4353662" y="4978199"/>
+                </a:lnTo>
+                <a:close/>
+              </a:path>
+            </a:pathLst>
+          </a:custGeom>
+          <a:blipFill>
+            <a:blip>
+              <a:extLst>
+                <a:ext uri="{96DAC541-7B7A-43D3-8B79-37D633B846F1}">
+                  <asvg:svgBlip xmlns:asvg="http://schemas.microsoft.com/office/drawing/2016/SVG/main" r:embed="rId2"/>
+                </a:ext>
+              </a:extLst>
+            </a:blip>
+            <a:stretch>
+              <a:fillRect/>
+            </a:stretch>
+          </a:blipFill>
+        </p:spPr>
+      </p:sp>
+      <p:sp>
+        <p:nvSpPr>
+          <p:cNvPr id="4" name="Freeform 4">
+            <a:extLst>
+              <a:ext uri="{FF2B5EF4-FFF2-40B4-BE49-F238E27FC236}">
+                <a16:creationId xmlns:a16="http://schemas.microsoft.com/office/drawing/2014/main" id="{54C34259-A59E-F7D4-8AD4-BECCF1D30758}"/>
+              </a:ext>
+            </a:extLst>
+          </p:cNvPr>
+          <p:cNvSpPr/>
+          <p:nvPr/>
+        </p:nvSpPr>
+        <p:spPr>
+          <a:xfrm flipH="1">
+            <a:off x="13934338" y="5361715"/>
+            <a:ext cx="4353662" cy="4978199"/>
+          </a:xfrm>
+          <a:custGeom>
+            <a:avLst/>
+            <a:gdLst/>
+            <a:ahLst/>
+            <a:cxnLst/>
+            <a:rect l="l" t="t" r="r" b="b"/>
+            <a:pathLst>
+              <a:path w="4353662" h="4978199">
+                <a:moveTo>
+                  <a:pt x="4353662" y="0"/>
+                </a:moveTo>
+                <a:lnTo>
+                  <a:pt x="0" y="0"/>
+                </a:lnTo>
+                <a:lnTo>
+                  <a:pt x="0" y="4978199"/>
+                </a:lnTo>
+                <a:lnTo>
+                  <a:pt x="4353662" y="4978199"/>
+                </a:lnTo>
+                <a:lnTo>
+                  <a:pt x="4353662" y="0"/>
+                </a:lnTo>
+                <a:close/>
+              </a:path>
+            </a:pathLst>
+          </a:custGeom>
+          <a:blipFill>
+            <a:blip>
+              <a:extLst>
+                <a:ext uri="{96DAC541-7B7A-43D3-8B79-37D633B846F1}">
+                  <asvg:svgBlip xmlns:asvg="http://schemas.microsoft.com/office/drawing/2016/SVG/main" r:embed="rId2"/>
+                </a:ext>
+              </a:extLst>
+            </a:blip>
+            <a:stretch>
+              <a:fillRect/>
+            </a:stretch>
+          </a:blipFill>
+        </p:spPr>
+      </p:sp>
+      <p:sp>
+        <p:nvSpPr>
+          <p:cNvPr id="5" name="Freeform 5">
+            <a:extLst>
+              <a:ext uri="{FF2B5EF4-FFF2-40B4-BE49-F238E27FC236}">
+                <a16:creationId xmlns:a16="http://schemas.microsoft.com/office/drawing/2014/main" id="{B44651CB-DF86-C6BA-9167-69AF9C37AFEE}"/>
+              </a:ext>
+            </a:extLst>
+          </p:cNvPr>
+          <p:cNvSpPr/>
+          <p:nvPr/>
+        </p:nvSpPr>
+        <p:spPr>
+          <a:xfrm flipV="1">
+            <a:off x="0" y="0"/>
+            <a:ext cx="4353662" cy="4978199"/>
+          </a:xfrm>
+          <a:custGeom>
+            <a:avLst/>
+            <a:gdLst/>
+            <a:ahLst/>
+            <a:cxnLst/>
+            <a:rect l="l" t="t" r="r" b="b"/>
+            <a:pathLst>
+              <a:path w="4353662" h="4978199">
+                <a:moveTo>
+                  <a:pt x="0" y="4978199"/>
+                </a:moveTo>
+                <a:lnTo>
+                  <a:pt x="4353662" y="4978199"/>
+                </a:lnTo>
+                <a:lnTo>
+                  <a:pt x="4353662" y="0"/>
+                </a:lnTo>
+                <a:lnTo>
+                  <a:pt x="0" y="0"/>
+                </a:lnTo>
+                <a:lnTo>
+                  <a:pt x="0" y="4978199"/>
+                </a:lnTo>
+                <a:close/>
+              </a:path>
+            </a:pathLst>
+          </a:custGeom>
+          <a:blipFill>
+            <a:blip>
+              <a:extLst>
+                <a:ext uri="{96DAC541-7B7A-43D3-8B79-37D633B846F1}">
+                  <asvg:svgBlip xmlns:asvg="http://schemas.microsoft.com/office/drawing/2016/SVG/main" r:embed="rId2"/>
+                </a:ext>
+              </a:extLst>
+            </a:blip>
+            <a:stretch>
+              <a:fillRect/>
+            </a:stretch>
+          </a:blipFill>
+        </p:spPr>
+      </p:sp>
+      <p:sp>
+        <p:nvSpPr>
+          <p:cNvPr id="7" name="Freeform 7">
+            <a:extLst>
+              <a:ext uri="{FF2B5EF4-FFF2-40B4-BE49-F238E27FC236}">
+                <a16:creationId xmlns:a16="http://schemas.microsoft.com/office/drawing/2014/main" id="{A16A3747-6ADA-F582-ECAD-CADFD55AD994}"/>
+              </a:ext>
+            </a:extLst>
+          </p:cNvPr>
+          <p:cNvSpPr/>
+          <p:nvPr/>
+        </p:nvSpPr>
+        <p:spPr>
+          <a:xfrm>
+            <a:off x="7319137" y="4655960"/>
+            <a:ext cx="8678788" cy="2251061"/>
+          </a:xfrm>
+          <a:custGeom>
+            <a:avLst/>
+            <a:gdLst/>
+            <a:ahLst/>
+            <a:cxnLst/>
+            <a:rect l="l" t="t" r="r" b="b"/>
+            <a:pathLst>
+              <a:path w="8678788" h="2251061">
+                <a:moveTo>
+                  <a:pt x="0" y="0"/>
+                </a:moveTo>
+                <a:lnTo>
+                  <a:pt x="8678788" y="0"/>
+                </a:lnTo>
+                <a:lnTo>
+                  <a:pt x="8678788" y="2251061"/>
+                </a:lnTo>
+                <a:lnTo>
+                  <a:pt x="0" y="2251061"/>
+                </a:lnTo>
+                <a:lnTo>
+                  <a:pt x="0" y="0"/>
+                </a:lnTo>
+                <a:close/>
+              </a:path>
+            </a:pathLst>
+          </a:custGeom>
+          <a:blipFill>
+            <a:blip r:embed="rId3"/>
+            <a:stretch>
+              <a:fillRect/>
+            </a:stretch>
+          </a:blipFill>
+        </p:spPr>
+      </p:sp>
+      <p:sp>
+        <p:nvSpPr>
+          <p:cNvPr id="8" name="Freeform 8">
+            <a:extLst>
+              <a:ext uri="{FF2B5EF4-FFF2-40B4-BE49-F238E27FC236}">
+                <a16:creationId xmlns:a16="http://schemas.microsoft.com/office/drawing/2014/main" id="{5503B198-933D-A05F-C29D-CFB6E754FC51}"/>
+              </a:ext>
+            </a:extLst>
+          </p:cNvPr>
+          <p:cNvSpPr/>
+          <p:nvPr/>
+        </p:nvSpPr>
+        <p:spPr>
+          <a:xfrm>
+            <a:off x="1848470" y="6907021"/>
+            <a:ext cx="4825280" cy="2112738"/>
+          </a:xfrm>
+          <a:custGeom>
+            <a:avLst/>
+            <a:gdLst/>
+            <a:ahLst/>
+            <a:cxnLst/>
+            <a:rect l="l" t="t" r="r" b="b"/>
+            <a:pathLst>
+              <a:path w="4825280" h="2112738">
+                <a:moveTo>
+                  <a:pt x="0" y="0"/>
+                </a:moveTo>
+                <a:lnTo>
+                  <a:pt x="4825280" y="0"/>
+                </a:lnTo>
+                <a:lnTo>
+                  <a:pt x="4825280" y="2112738"/>
+                </a:lnTo>
+                <a:lnTo>
+                  <a:pt x="0" y="2112738"/>
+                </a:lnTo>
+                <a:lnTo>
+                  <a:pt x="0" y="0"/>
+                </a:lnTo>
+                <a:close/>
+              </a:path>
+            </a:pathLst>
+          </a:custGeom>
+          <a:blipFill>
+            <a:blip r:embed="rId4"/>
+            <a:stretch>
+              <a:fillRect/>
+            </a:stretch>
+          </a:blipFill>
+        </p:spPr>
+      </p:sp>
+      <p:sp>
+        <p:nvSpPr>
+          <p:cNvPr id="10" name="Freeform 10">
+            <a:extLst>
+              <a:ext uri="{FF2B5EF4-FFF2-40B4-BE49-F238E27FC236}">
+                <a16:creationId xmlns:a16="http://schemas.microsoft.com/office/drawing/2014/main" id="{747DE1A7-2F58-0DA8-4A11-0785F609E577}"/>
+              </a:ext>
+            </a:extLst>
+          </p:cNvPr>
+          <p:cNvSpPr/>
+          <p:nvPr/>
+        </p:nvSpPr>
+        <p:spPr>
+          <a:xfrm>
+            <a:off x="10691428" y="6907021"/>
+            <a:ext cx="5306497" cy="2264428"/>
+          </a:xfrm>
+          <a:custGeom>
+            <a:avLst/>
+            <a:gdLst/>
+            <a:ahLst/>
+            <a:cxnLst/>
+            <a:rect l="l" t="t" r="r" b="b"/>
+            <a:pathLst>
+              <a:path w="5306497" h="2264428">
+                <a:moveTo>
+                  <a:pt x="0" y="0"/>
+                </a:moveTo>
+                <a:lnTo>
+                  <a:pt x="5306497" y="0"/>
+                </a:lnTo>
+                <a:lnTo>
+                  <a:pt x="5306497" y="2264428"/>
+                </a:lnTo>
+                <a:lnTo>
+                  <a:pt x="0" y="2264428"/>
+                </a:lnTo>
+                <a:lnTo>
+                  <a:pt x="0" y="0"/>
+                </a:lnTo>
+                <a:close/>
+              </a:path>
+            </a:pathLst>
+          </a:custGeom>
+          <a:blipFill>
+            <a:blip r:embed="rId5"/>
+            <a:stretch>
+              <a:fillRect/>
+            </a:stretch>
+          </a:blipFill>
+        </p:spPr>
+      </p:sp>
+      <p:sp>
+        <p:nvSpPr>
+          <p:cNvPr id="11" name="Freeform 11">
+            <a:extLst>
+              <a:ext uri="{FF2B5EF4-FFF2-40B4-BE49-F238E27FC236}">
+                <a16:creationId xmlns:a16="http://schemas.microsoft.com/office/drawing/2014/main" id="{42832281-BC62-7A42-3AC4-9D52BACBB955}"/>
+              </a:ext>
+            </a:extLst>
+          </p:cNvPr>
+          <p:cNvSpPr/>
+          <p:nvPr/>
+        </p:nvSpPr>
+        <p:spPr>
+          <a:xfrm>
+            <a:off x="5528751" y="5781491"/>
+            <a:ext cx="5992167" cy="3098491"/>
+          </a:xfrm>
+          <a:custGeom>
+            <a:avLst/>
+            <a:gdLst/>
+            <a:ahLst/>
+            <a:cxnLst/>
+            <a:rect l="l" t="t" r="r" b="b"/>
+            <a:pathLst>
+              <a:path w="5992167" h="3098491">
+                <a:moveTo>
+                  <a:pt x="0" y="0"/>
+                </a:moveTo>
+                <a:lnTo>
+                  <a:pt x="5992168" y="0"/>
+                </a:lnTo>
+                <a:lnTo>
+                  <a:pt x="5992168" y="3098491"/>
+                </a:lnTo>
+                <a:lnTo>
+                  <a:pt x="0" y="3098491"/>
+                </a:lnTo>
+                <a:lnTo>
+                  <a:pt x="0" y="0"/>
+                </a:lnTo>
+                <a:close/>
+              </a:path>
+            </a:pathLst>
+          </a:custGeom>
+          <a:blipFill>
+            <a:blip r:embed="rId6"/>
+            <a:stretch>
+              <a:fillRect/>
+            </a:stretch>
+          </a:blipFill>
+        </p:spPr>
+      </p:sp>
+      <p:sp>
+        <p:nvSpPr>
+          <p:cNvPr id="12" name="TextBox 12">
+            <a:extLst>
+              <a:ext uri="{FF2B5EF4-FFF2-40B4-BE49-F238E27FC236}">
+                <a16:creationId xmlns:a16="http://schemas.microsoft.com/office/drawing/2014/main" id="{378E95DE-AD29-D5A3-C336-D079046B4A12}"/>
+              </a:ext>
+            </a:extLst>
+          </p:cNvPr>
+          <p:cNvSpPr txBox="1"/>
+          <p:nvPr/>
+        </p:nvSpPr>
+        <p:spPr>
+          <a:xfrm>
+            <a:off x="5984137" y="354172"/>
+            <a:ext cx="6319726" cy="1034514"/>
+          </a:xfrm>
+          <a:prstGeom prst="rect">
+            <a:avLst/>
+          </a:prstGeom>
+        </p:spPr>
+        <p:txBody>
+          <a:bodyPr lIns="0" tIns="0" rIns="0" bIns="0" rtlCol="0" anchor="t">
+            <a:spAutoFit/>
+          </a:bodyPr>
+          <a:lstStyle/>
+          <a:p>
+            <a:pPr marL="0" lvl="0" indent="0" algn="ctr">
+              <a:lnSpc>
+                <a:spcPts val="7717"/>
+              </a:lnSpc>
+            </a:pPr>
+            <a:r>
+              <a:rPr lang="en-US" sz="7640" dirty="0">
+                <a:solidFill>
+                  <a:srgbClr val="272530"/>
+                </a:solidFill>
+                <a:latin typeface="Tajawal"/>
+                <a:ea typeface="Tajawal"/>
+                <a:cs typeface="Tajawal"/>
+                <a:sym typeface="Tajawal"/>
+              </a:rPr>
+              <a:t>PS1</a:t>
+            </a:r>
+          </a:p>
+        </p:txBody>
+      </p:sp>
+      <p:sp>
+        <p:nvSpPr>
+          <p:cNvPr id="13" name="TextBox 13">
+            <a:extLst>
+              <a:ext uri="{FF2B5EF4-FFF2-40B4-BE49-F238E27FC236}">
+                <a16:creationId xmlns:a16="http://schemas.microsoft.com/office/drawing/2014/main" id="{690802EE-91DC-6D10-D02A-65EE57F907A0}"/>
+              </a:ext>
+            </a:extLst>
+          </p:cNvPr>
+          <p:cNvSpPr txBox="1"/>
+          <p:nvPr/>
+        </p:nvSpPr>
+        <p:spPr>
+          <a:xfrm>
+            <a:off x="1028700" y="1730859"/>
+            <a:ext cx="16230600" cy="2925101"/>
+          </a:xfrm>
+          <a:prstGeom prst="rect">
+            <a:avLst/>
+          </a:prstGeom>
+        </p:spPr>
+        <p:txBody>
+          <a:bodyPr lIns="0" tIns="0" rIns="0" bIns="0" rtlCol="0" anchor="t">
+            <a:spAutoFit/>
+          </a:bodyPr>
+          <a:lstStyle/>
+          <a:p>
+            <a:pPr marL="720790" lvl="1" indent="-360395" algn="l">
+              <a:lnSpc>
+                <a:spcPts val="4673"/>
+              </a:lnSpc>
+              <a:buFont typeface="Arial"/>
+              <a:buChar char="•"/>
+            </a:pPr>
+            <a:r>
+              <a:rPr lang="en-US" sz="3338">
+                <a:solidFill>
+                  <a:srgbClr val="272530"/>
+                </a:solidFill>
+                <a:latin typeface="Source Sans Pro"/>
+                <a:ea typeface="Source Sans Pro"/>
+                <a:cs typeface="Source Sans Pro"/>
+                <a:sym typeface="Source Sans Pro"/>
+              </a:rPr>
+              <a:t>Used pandas, numpy and matplotlib to create graphs out of the 32,000 rows of data.</a:t>
+            </a:r>
+          </a:p>
+          <a:p>
+            <a:pPr marL="720790" lvl="1" indent="-360395" algn="l">
+              <a:lnSpc>
+                <a:spcPts val="4673"/>
+              </a:lnSpc>
+              <a:buFont typeface="Arial"/>
+              <a:buChar char="•"/>
+            </a:pPr>
+            <a:r>
+              <a:rPr lang="en-US" sz="3338">
+                <a:solidFill>
+                  <a:srgbClr val="272530"/>
+                </a:solidFill>
+                <a:latin typeface="Source Sans Pro"/>
+                <a:ea typeface="Source Sans Pro"/>
+                <a:cs typeface="Source Sans Pro"/>
+                <a:sym typeface="Source Sans Pro"/>
+              </a:rPr>
+              <a:t>Compared different weather patterns such as radiation, temperature and humidity to see trends.</a:t>
+            </a:r>
+          </a:p>
+          <a:p>
+            <a:pPr marL="720790" lvl="1" indent="-360395" algn="l">
+              <a:lnSpc>
+                <a:spcPts val="4673"/>
+              </a:lnSpc>
+              <a:buFont typeface="Arial"/>
+              <a:buChar char="•"/>
+            </a:pPr>
+            <a:r>
+              <a:rPr lang="en-US" sz="3338">
+                <a:solidFill>
+                  <a:srgbClr val="272530"/>
+                </a:solidFill>
+                <a:latin typeface="Source Sans Pro"/>
+                <a:ea typeface="Source Sans Pro"/>
+                <a:cs typeface="Source Sans Pro"/>
+                <a:sym typeface="Source Sans Pro"/>
+              </a:rPr>
+              <a:t>Used plots, scatter graphs, bar graphs, twin graphs and heatmaps to relate various quantities.</a:t>
+            </a:r>
+          </a:p>
+        </p:txBody>
+      </p:sp>
+      <p:pic>
+        <p:nvPicPr>
+          <p:cNvPr id="15" name="Picture 14">
+            <a:extLst>
+              <a:ext uri="{FF2B5EF4-FFF2-40B4-BE49-F238E27FC236}">
+                <a16:creationId xmlns:a16="http://schemas.microsoft.com/office/drawing/2014/main" id="{05C31167-CB19-253D-3385-6635CB259068}"/>
+              </a:ext>
+            </a:extLst>
+          </p:cNvPr>
+          <p:cNvPicPr>
+            <a:picLocks noChangeAspect="1"/>
+          </p:cNvPicPr>
+          <p:nvPr/>
+        </p:nvPicPr>
+        <p:blipFill>
+          <a:blip r:embed="rId7"/>
+          <a:stretch>
+            <a:fillRect/>
+          </a:stretch>
+        </p:blipFill>
+        <p:spPr>
+          <a:xfrm>
+            <a:off x="1325507" y="1548196"/>
+            <a:ext cx="15481379" cy="7585531"/>
+          </a:xfrm>
+          <a:prstGeom prst="rect">
+            <a:avLst/>
+          </a:prstGeom>
+        </p:spPr>
+      </p:pic>
+    </p:spTree>
+    <p:extLst>
+      <p:ext uri="{BB962C8B-B14F-4D97-AF65-F5344CB8AC3E}">
+        <p14:creationId xmlns:p14="http://schemas.microsoft.com/office/powerpoint/2010/main" val="2361208432"/>
+      </p:ext>
+    </p:extLst>
+  </p:cSld>
+  <p:clrMapOvr>
+    <a:masterClrMapping/>
+  </p:clrMapOvr>
+</p:sld>
+</file>
+
+<file path=ppt/slides/slide4.xml><?xml version="1.0" encoding="utf-8"?>
+<p:sld xmlns:a="http://schemas.openxmlformats.org/drawingml/2006/main" xmlns:r="http://schemas.openxmlformats.org/officeDocument/2006/relationships" xmlns:p="http://schemas.openxmlformats.org/presentationml/2006/main">
+  <p:cSld>
+    <p:spTree>
+      <p:nvGrpSpPr>
+        <p:cNvPr id="1" name="">
+          <a:extLst>
+            <a:ext uri="{FF2B5EF4-FFF2-40B4-BE49-F238E27FC236}">
+              <a16:creationId xmlns:a16="http://schemas.microsoft.com/office/drawing/2014/main" id="{71D6EAE1-8E00-D3A0-F9E9-04452FA1EEDC}"/>
+            </a:ext>
+          </a:extLst>
+        </p:cNvPr>
+        <p:cNvGrpSpPr/>
+        <p:nvPr/>
+      </p:nvGrpSpPr>
+      <p:grpSpPr>
+        <a:xfrm>
+          <a:off x="0" y="0"/>
+          <a:ext cx="0" cy="0"/>
+          <a:chOff x="0" y="0"/>
+          <a:chExt cx="0" cy="0"/>
+        </a:xfrm>
+      </p:grpSpPr>
+      <p:sp>
+        <p:nvSpPr>
+          <p:cNvPr id="2" name="Freeform 2">
+            <a:extLst>
+              <a:ext uri="{FF2B5EF4-FFF2-40B4-BE49-F238E27FC236}">
+                <a16:creationId xmlns:a16="http://schemas.microsoft.com/office/drawing/2014/main" id="{D9B3A9F9-6387-2F09-BF19-9464C0CEBA2C}"/>
+              </a:ext>
+            </a:extLst>
+          </p:cNvPr>
+          <p:cNvSpPr/>
+          <p:nvPr/>
+        </p:nvSpPr>
+        <p:spPr>
+          <a:xfrm>
+            <a:off x="0" y="5414629"/>
+            <a:ext cx="4261110" cy="4872371"/>
+          </a:xfrm>
+          <a:custGeom>
+            <a:avLst/>
+            <a:gdLst/>
+            <a:ahLst/>
+            <a:cxnLst/>
+            <a:rect l="l" t="t" r="r" b="b"/>
+            <a:pathLst>
+              <a:path w="4261110" h="4872371">
+                <a:moveTo>
+                  <a:pt x="0" y="0"/>
+                </a:moveTo>
+                <a:lnTo>
+                  <a:pt x="4261110" y="0"/>
+                </a:lnTo>
+                <a:lnTo>
+                  <a:pt x="4261110" y="4872371"/>
+                </a:lnTo>
+                <a:lnTo>
+                  <a:pt x="0" y="4872371"/>
+                </a:lnTo>
+                <a:lnTo>
+                  <a:pt x="0" y="0"/>
+                </a:lnTo>
+                <a:close/>
+              </a:path>
+            </a:pathLst>
+          </a:custGeom>
+          <a:blipFill>
+            <a:blip>
+              <a:extLst>
+                <a:ext uri="{96DAC541-7B7A-43D3-8B79-37D633B846F1}">
+                  <asvg:svgBlip xmlns:asvg="http://schemas.microsoft.com/office/drawing/2016/SVG/main" r:embed="rId2"/>
+                </a:ext>
+              </a:extLst>
+            </a:blip>
+            <a:stretch>
+              <a:fillRect/>
+            </a:stretch>
+          </a:blipFill>
+        </p:spPr>
+      </p:sp>
+      <p:sp>
+        <p:nvSpPr>
+          <p:cNvPr id="3" name="Freeform 3">
+            <a:extLst>
+              <a:ext uri="{FF2B5EF4-FFF2-40B4-BE49-F238E27FC236}">
+                <a16:creationId xmlns:a16="http://schemas.microsoft.com/office/drawing/2014/main" id="{C4CAF747-7D57-F19D-1777-BE2E34D0E12B}"/>
+              </a:ext>
+            </a:extLst>
+          </p:cNvPr>
+          <p:cNvSpPr/>
+          <p:nvPr/>
+        </p:nvSpPr>
+        <p:spPr>
+          <a:xfrm flipH="1" flipV="1">
+            <a:off x="13934338" y="-32160"/>
+            <a:ext cx="4353662" cy="4978199"/>
+          </a:xfrm>
+          <a:custGeom>
+            <a:avLst/>
+            <a:gdLst/>
+            <a:ahLst/>
+            <a:cxnLst/>
+            <a:rect l="l" t="t" r="r" b="b"/>
+            <a:pathLst>
+              <a:path w="4353662" h="4978199">
+                <a:moveTo>
+                  <a:pt x="4353662" y="4978199"/>
+                </a:moveTo>
+                <a:lnTo>
+                  <a:pt x="0" y="4978199"/>
+                </a:lnTo>
+                <a:lnTo>
+                  <a:pt x="0" y="0"/>
+                </a:lnTo>
+                <a:lnTo>
+                  <a:pt x="4353662" y="0"/>
+                </a:lnTo>
+                <a:lnTo>
+                  <a:pt x="4353662" y="4978199"/>
+                </a:lnTo>
+                <a:close/>
+              </a:path>
+            </a:pathLst>
+          </a:custGeom>
+          <a:blipFill>
+            <a:blip>
+              <a:extLst>
+                <a:ext uri="{96DAC541-7B7A-43D3-8B79-37D633B846F1}">
+                  <asvg:svgBlip xmlns:asvg="http://schemas.microsoft.com/office/drawing/2016/SVG/main" r:embed="rId2"/>
+                </a:ext>
+              </a:extLst>
+            </a:blip>
+            <a:stretch>
+              <a:fillRect/>
+            </a:stretch>
+          </a:blipFill>
+        </p:spPr>
+      </p:sp>
+      <p:sp>
+        <p:nvSpPr>
+          <p:cNvPr id="4" name="Freeform 4">
+            <a:extLst>
+              <a:ext uri="{FF2B5EF4-FFF2-40B4-BE49-F238E27FC236}">
+                <a16:creationId xmlns:a16="http://schemas.microsoft.com/office/drawing/2014/main" id="{F6B5CF94-865B-1B7D-CED6-A3F54514B011}"/>
+              </a:ext>
+            </a:extLst>
+          </p:cNvPr>
+          <p:cNvSpPr/>
+          <p:nvPr/>
+        </p:nvSpPr>
+        <p:spPr>
+          <a:xfrm flipH="1">
+            <a:off x="13934338" y="5361715"/>
+            <a:ext cx="4353662" cy="4978199"/>
+          </a:xfrm>
+          <a:custGeom>
+            <a:avLst/>
+            <a:gdLst/>
+            <a:ahLst/>
+            <a:cxnLst/>
+            <a:rect l="l" t="t" r="r" b="b"/>
+            <a:pathLst>
+              <a:path w="4353662" h="4978199">
+                <a:moveTo>
+                  <a:pt x="4353662" y="0"/>
+                </a:moveTo>
+                <a:lnTo>
+                  <a:pt x="0" y="0"/>
+                </a:lnTo>
+                <a:lnTo>
+                  <a:pt x="0" y="4978199"/>
+                </a:lnTo>
+                <a:lnTo>
+                  <a:pt x="4353662" y="4978199"/>
+                </a:lnTo>
+                <a:lnTo>
+                  <a:pt x="4353662" y="0"/>
+                </a:lnTo>
+                <a:close/>
+              </a:path>
+            </a:pathLst>
+          </a:custGeom>
+          <a:blipFill>
+            <a:blip>
+              <a:extLst>
+                <a:ext uri="{96DAC541-7B7A-43D3-8B79-37D633B846F1}">
+                  <asvg:svgBlip xmlns:asvg="http://schemas.microsoft.com/office/drawing/2016/SVG/main" r:embed="rId2"/>
+                </a:ext>
+              </a:extLst>
+            </a:blip>
+            <a:stretch>
+              <a:fillRect/>
+            </a:stretch>
+          </a:blipFill>
+        </p:spPr>
+      </p:sp>
+      <p:sp>
+        <p:nvSpPr>
+          <p:cNvPr id="5" name="Freeform 5">
+            <a:extLst>
+              <a:ext uri="{FF2B5EF4-FFF2-40B4-BE49-F238E27FC236}">
+                <a16:creationId xmlns:a16="http://schemas.microsoft.com/office/drawing/2014/main" id="{5D5D27FB-5A78-6D7E-48AA-694E413BEF8E}"/>
+              </a:ext>
+            </a:extLst>
+          </p:cNvPr>
+          <p:cNvSpPr/>
+          <p:nvPr/>
+        </p:nvSpPr>
+        <p:spPr>
+          <a:xfrm flipV="1">
+            <a:off x="0" y="0"/>
+            <a:ext cx="4353662" cy="4978199"/>
+          </a:xfrm>
+          <a:custGeom>
+            <a:avLst/>
+            <a:gdLst/>
+            <a:ahLst/>
+            <a:cxnLst/>
+            <a:rect l="l" t="t" r="r" b="b"/>
+            <a:pathLst>
+              <a:path w="4353662" h="4978199">
+                <a:moveTo>
+                  <a:pt x="0" y="4978199"/>
+                </a:moveTo>
+                <a:lnTo>
+                  <a:pt x="4353662" y="4978199"/>
+                </a:lnTo>
+                <a:lnTo>
+                  <a:pt x="4353662" y="0"/>
+                </a:lnTo>
+                <a:lnTo>
+                  <a:pt x="0" y="0"/>
+                </a:lnTo>
+                <a:lnTo>
+                  <a:pt x="0" y="4978199"/>
+                </a:lnTo>
+                <a:close/>
+              </a:path>
+            </a:pathLst>
+          </a:custGeom>
+          <a:blipFill>
+            <a:blip>
+              <a:extLst>
+                <a:ext uri="{96DAC541-7B7A-43D3-8B79-37D633B846F1}">
+                  <asvg:svgBlip xmlns:asvg="http://schemas.microsoft.com/office/drawing/2016/SVG/main" r:embed="rId2"/>
+                </a:ext>
+              </a:extLst>
+            </a:blip>
+            <a:stretch>
+              <a:fillRect/>
+            </a:stretch>
+          </a:blipFill>
+        </p:spPr>
+      </p:sp>
+      <p:sp>
+        <p:nvSpPr>
+          <p:cNvPr id="6" name="Freeform 6">
+            <a:extLst>
+              <a:ext uri="{FF2B5EF4-FFF2-40B4-BE49-F238E27FC236}">
+                <a16:creationId xmlns:a16="http://schemas.microsoft.com/office/drawing/2014/main" id="{9D5B7AEF-7FBD-4886-660B-77C9ED5F6C02}"/>
+              </a:ext>
+            </a:extLst>
+          </p:cNvPr>
+          <p:cNvSpPr/>
+          <p:nvPr/>
+        </p:nvSpPr>
+        <p:spPr>
+          <a:xfrm>
+            <a:off x="1028700" y="4655960"/>
+            <a:ext cx="6290437" cy="2251061"/>
+          </a:xfrm>
+          <a:custGeom>
+            <a:avLst/>
+            <a:gdLst/>
+            <a:ahLst/>
+            <a:cxnLst/>
+            <a:rect l="l" t="t" r="r" b="b"/>
+            <a:pathLst>
+              <a:path w="6290437" h="2251061">
+                <a:moveTo>
+                  <a:pt x="0" y="0"/>
+                </a:moveTo>
+                <a:lnTo>
+                  <a:pt x="6290437" y="0"/>
+                </a:lnTo>
+                <a:lnTo>
+                  <a:pt x="6290437" y="2251061"/>
+                </a:lnTo>
+                <a:lnTo>
+                  <a:pt x="0" y="2251061"/>
+                </a:lnTo>
+                <a:lnTo>
+                  <a:pt x="0" y="0"/>
+                </a:lnTo>
+                <a:close/>
+              </a:path>
+            </a:pathLst>
+          </a:custGeom>
+          <a:blipFill>
+            <a:blip r:embed="rId3"/>
+            <a:stretch>
+              <a:fillRect/>
+            </a:stretch>
+          </a:blipFill>
+        </p:spPr>
+      </p:sp>
+      <p:sp>
+        <p:nvSpPr>
+          <p:cNvPr id="7" name="Freeform 7">
+            <a:extLst>
+              <a:ext uri="{FF2B5EF4-FFF2-40B4-BE49-F238E27FC236}">
+                <a16:creationId xmlns:a16="http://schemas.microsoft.com/office/drawing/2014/main" id="{94C7AE92-5386-E41C-F386-1D0A4303286B}"/>
+              </a:ext>
+            </a:extLst>
+          </p:cNvPr>
+          <p:cNvSpPr/>
+          <p:nvPr/>
+        </p:nvSpPr>
+        <p:spPr>
+          <a:xfrm>
+            <a:off x="7319137" y="4655960"/>
+            <a:ext cx="8678788" cy="2251061"/>
+          </a:xfrm>
+          <a:custGeom>
+            <a:avLst/>
+            <a:gdLst/>
+            <a:ahLst/>
+            <a:cxnLst/>
+            <a:rect l="l" t="t" r="r" b="b"/>
+            <a:pathLst>
+              <a:path w="8678788" h="2251061">
+                <a:moveTo>
+                  <a:pt x="0" y="0"/>
+                </a:moveTo>
+                <a:lnTo>
+                  <a:pt x="8678788" y="0"/>
+                </a:lnTo>
+                <a:lnTo>
+                  <a:pt x="8678788" y="2251061"/>
+                </a:lnTo>
+                <a:lnTo>
+                  <a:pt x="0" y="2251061"/>
+                </a:lnTo>
+                <a:lnTo>
+                  <a:pt x="0" y="0"/>
+                </a:lnTo>
+                <a:close/>
+              </a:path>
+            </a:pathLst>
+          </a:custGeom>
+          <a:blipFill>
+            <a:blip r:embed="rId4"/>
+            <a:stretch>
+              <a:fillRect/>
+            </a:stretch>
+          </a:blipFill>
+        </p:spPr>
+      </p:sp>
+      <p:sp>
+        <p:nvSpPr>
+          <p:cNvPr id="8" name="Freeform 8">
+            <a:extLst>
+              <a:ext uri="{FF2B5EF4-FFF2-40B4-BE49-F238E27FC236}">
+                <a16:creationId xmlns:a16="http://schemas.microsoft.com/office/drawing/2014/main" id="{7940C7AB-58C7-EF0F-C887-798513F1A389}"/>
+              </a:ext>
+            </a:extLst>
+          </p:cNvPr>
+          <p:cNvSpPr/>
+          <p:nvPr/>
+        </p:nvSpPr>
+        <p:spPr>
+          <a:xfrm>
+            <a:off x="1848470" y="6907021"/>
+            <a:ext cx="4825280" cy="2112738"/>
+          </a:xfrm>
+          <a:custGeom>
+            <a:avLst/>
+            <a:gdLst/>
+            <a:ahLst/>
+            <a:cxnLst/>
+            <a:rect l="l" t="t" r="r" b="b"/>
+            <a:pathLst>
+              <a:path w="4825280" h="2112738">
+                <a:moveTo>
+                  <a:pt x="0" y="0"/>
+                </a:moveTo>
+                <a:lnTo>
+                  <a:pt x="4825280" y="0"/>
+                </a:lnTo>
+                <a:lnTo>
+                  <a:pt x="4825280" y="2112738"/>
+                </a:lnTo>
+                <a:lnTo>
+                  <a:pt x="0" y="2112738"/>
+                </a:lnTo>
+                <a:lnTo>
+                  <a:pt x="0" y="0"/>
+                </a:lnTo>
+                <a:close/>
+              </a:path>
+            </a:pathLst>
+          </a:custGeom>
+          <a:blipFill>
+            <a:blip r:embed="rId5"/>
+            <a:stretch>
+              <a:fillRect/>
+            </a:stretch>
+          </a:blipFill>
+        </p:spPr>
+      </p:sp>
+      <p:sp>
+        <p:nvSpPr>
+          <p:cNvPr id="9" name="Freeform 9">
+            <a:extLst>
+              <a:ext uri="{FF2B5EF4-FFF2-40B4-BE49-F238E27FC236}">
+                <a16:creationId xmlns:a16="http://schemas.microsoft.com/office/drawing/2014/main" id="{59001EE2-CB26-408F-55B9-3309BE3EE033}"/>
+              </a:ext>
+            </a:extLst>
+          </p:cNvPr>
+          <p:cNvSpPr/>
+          <p:nvPr/>
+        </p:nvSpPr>
+        <p:spPr>
+          <a:xfrm>
+            <a:off x="6861856" y="7390694"/>
+            <a:ext cx="3829571" cy="3258131"/>
+          </a:xfrm>
+          <a:custGeom>
+            <a:avLst/>
+            <a:gdLst/>
+            <a:ahLst/>
+            <a:cxnLst/>
+            <a:rect l="l" t="t" r="r" b="b"/>
+            <a:pathLst>
+              <a:path w="3829571" h="3258131">
+                <a:moveTo>
+                  <a:pt x="0" y="0"/>
+                </a:moveTo>
+                <a:lnTo>
+                  <a:pt x="3829572" y="0"/>
+                </a:lnTo>
+                <a:lnTo>
+                  <a:pt x="3829572" y="3258131"/>
+                </a:lnTo>
+                <a:lnTo>
+                  <a:pt x="0" y="3258131"/>
+                </a:lnTo>
+                <a:lnTo>
+                  <a:pt x="0" y="0"/>
+                </a:lnTo>
+                <a:close/>
+              </a:path>
+            </a:pathLst>
+          </a:custGeom>
+          <a:blipFill>
+            <a:blip r:embed="rId6"/>
+            <a:stretch>
+              <a:fillRect/>
+            </a:stretch>
+          </a:blipFill>
+        </p:spPr>
+      </p:sp>
+      <p:sp>
+        <p:nvSpPr>
+          <p:cNvPr id="10" name="Freeform 10">
+            <a:extLst>
+              <a:ext uri="{FF2B5EF4-FFF2-40B4-BE49-F238E27FC236}">
+                <a16:creationId xmlns:a16="http://schemas.microsoft.com/office/drawing/2014/main" id="{282E160D-FC8A-FF1A-0BBF-BC065CD5C4F5}"/>
+              </a:ext>
+            </a:extLst>
+          </p:cNvPr>
+          <p:cNvSpPr/>
+          <p:nvPr/>
+        </p:nvSpPr>
+        <p:spPr>
+          <a:xfrm>
+            <a:off x="10691428" y="6907021"/>
+            <a:ext cx="5306497" cy="2264428"/>
+          </a:xfrm>
+          <a:custGeom>
+            <a:avLst/>
+            <a:gdLst/>
+            <a:ahLst/>
+            <a:cxnLst/>
+            <a:rect l="l" t="t" r="r" b="b"/>
+            <a:pathLst>
+              <a:path w="5306497" h="2264428">
+                <a:moveTo>
+                  <a:pt x="0" y="0"/>
+                </a:moveTo>
+                <a:lnTo>
+                  <a:pt x="5306497" y="0"/>
+                </a:lnTo>
+                <a:lnTo>
+                  <a:pt x="5306497" y="2264428"/>
+                </a:lnTo>
+                <a:lnTo>
+                  <a:pt x="0" y="2264428"/>
+                </a:lnTo>
+                <a:lnTo>
+                  <a:pt x="0" y="0"/>
+                </a:lnTo>
+                <a:close/>
+              </a:path>
+            </a:pathLst>
+          </a:custGeom>
+          <a:blipFill>
+            <a:blip r:embed="rId7"/>
+            <a:stretch>
+              <a:fillRect/>
+            </a:stretch>
+          </a:blipFill>
+        </p:spPr>
+      </p:sp>
+      <p:sp>
+        <p:nvSpPr>
+          <p:cNvPr id="11" name="Freeform 11">
+            <a:extLst>
+              <a:ext uri="{FF2B5EF4-FFF2-40B4-BE49-F238E27FC236}">
+                <a16:creationId xmlns:a16="http://schemas.microsoft.com/office/drawing/2014/main" id="{0D38865F-AED1-DAC2-183A-94977D8179C2}"/>
+              </a:ext>
+            </a:extLst>
+          </p:cNvPr>
+          <p:cNvSpPr/>
+          <p:nvPr/>
+        </p:nvSpPr>
+        <p:spPr>
+          <a:xfrm>
+            <a:off x="5528751" y="5781491"/>
+            <a:ext cx="5992167" cy="3098491"/>
+          </a:xfrm>
+          <a:custGeom>
+            <a:avLst/>
+            <a:gdLst/>
+            <a:ahLst/>
+            <a:cxnLst/>
+            <a:rect l="l" t="t" r="r" b="b"/>
+            <a:pathLst>
+              <a:path w="5992167" h="3098491">
+                <a:moveTo>
+                  <a:pt x="0" y="0"/>
+                </a:moveTo>
+                <a:lnTo>
+                  <a:pt x="5992168" y="0"/>
+                </a:lnTo>
+                <a:lnTo>
+                  <a:pt x="5992168" y="3098491"/>
+                </a:lnTo>
+                <a:lnTo>
+                  <a:pt x="0" y="3098491"/>
+                </a:lnTo>
+                <a:lnTo>
+                  <a:pt x="0" y="0"/>
+                </a:lnTo>
+                <a:close/>
+              </a:path>
+            </a:pathLst>
+          </a:custGeom>
+          <a:blipFill>
+            <a:blip r:embed="rId8"/>
+            <a:stretch>
+              <a:fillRect/>
+            </a:stretch>
+          </a:blipFill>
+        </p:spPr>
+      </p:sp>
+      <p:sp>
+        <p:nvSpPr>
+          <p:cNvPr id="12" name="TextBox 12">
+            <a:extLst>
+              <a:ext uri="{FF2B5EF4-FFF2-40B4-BE49-F238E27FC236}">
+                <a16:creationId xmlns:a16="http://schemas.microsoft.com/office/drawing/2014/main" id="{6EE3265A-843D-4421-9DB5-CDC2D822BE89}"/>
+              </a:ext>
+            </a:extLst>
+          </p:cNvPr>
+          <p:cNvSpPr txBox="1"/>
+          <p:nvPr/>
+        </p:nvSpPr>
+        <p:spPr>
+          <a:xfrm>
+            <a:off x="5984137" y="354172"/>
+            <a:ext cx="6319726" cy="1034514"/>
+          </a:xfrm>
+          <a:prstGeom prst="rect">
+            <a:avLst/>
+          </a:prstGeom>
+        </p:spPr>
+        <p:txBody>
+          <a:bodyPr lIns="0" tIns="0" rIns="0" bIns="0" rtlCol="0" anchor="t">
+            <a:spAutoFit/>
+          </a:bodyPr>
+          <a:lstStyle/>
+          <a:p>
+            <a:pPr marL="0" lvl="0" indent="0" algn="ctr">
+              <a:lnSpc>
+                <a:spcPts val="7717"/>
+              </a:lnSpc>
+            </a:pPr>
+            <a:r>
+              <a:rPr lang="en-US" sz="7640" dirty="0">
+                <a:solidFill>
+                  <a:srgbClr val="272530"/>
+                </a:solidFill>
+                <a:latin typeface="Tajawal"/>
+                <a:ea typeface="Tajawal"/>
+                <a:cs typeface="Tajawal"/>
+                <a:sym typeface="Tajawal"/>
+              </a:rPr>
+              <a:t>PS2</a:t>
+            </a:r>
+          </a:p>
+        </p:txBody>
+      </p:sp>
+      <p:sp>
+        <p:nvSpPr>
+          <p:cNvPr id="13" name="TextBox 13">
+            <a:extLst>
+              <a:ext uri="{FF2B5EF4-FFF2-40B4-BE49-F238E27FC236}">
+                <a16:creationId xmlns:a16="http://schemas.microsoft.com/office/drawing/2014/main" id="{7F1B089D-13BC-9203-F177-F5D8A5FF08C5}"/>
+              </a:ext>
+            </a:extLst>
+          </p:cNvPr>
+          <p:cNvSpPr txBox="1"/>
+          <p:nvPr/>
+        </p:nvSpPr>
+        <p:spPr>
+          <a:xfrm>
+            <a:off x="1028700" y="1730859"/>
+            <a:ext cx="16230600" cy="2925101"/>
+          </a:xfrm>
+          <a:prstGeom prst="rect">
+            <a:avLst/>
+          </a:prstGeom>
+        </p:spPr>
+        <p:txBody>
+          <a:bodyPr lIns="0" tIns="0" rIns="0" bIns="0" rtlCol="0" anchor="t">
+            <a:spAutoFit/>
+          </a:bodyPr>
+          <a:lstStyle/>
+          <a:p>
+            <a:pPr marL="720790" lvl="1" indent="-360395" algn="l">
+              <a:lnSpc>
+                <a:spcPts val="4673"/>
+              </a:lnSpc>
+              <a:buFont typeface="Arial"/>
+              <a:buChar char="•"/>
+            </a:pPr>
+            <a:r>
+              <a:rPr lang="en-US" sz="3338">
+                <a:solidFill>
+                  <a:srgbClr val="272530"/>
+                </a:solidFill>
+                <a:latin typeface="Source Sans Pro"/>
+                <a:ea typeface="Source Sans Pro"/>
+                <a:cs typeface="Source Sans Pro"/>
+                <a:sym typeface="Source Sans Pro"/>
+              </a:rPr>
+              <a:t>Used pandas, numpy and matplotlib to create graphs out of the 32,000 rows of data.</a:t>
+            </a:r>
+          </a:p>
+          <a:p>
+            <a:pPr marL="720790" lvl="1" indent="-360395" algn="l">
+              <a:lnSpc>
+                <a:spcPts val="4673"/>
+              </a:lnSpc>
+              <a:buFont typeface="Arial"/>
+              <a:buChar char="•"/>
+            </a:pPr>
+            <a:r>
+              <a:rPr lang="en-US" sz="3338">
+                <a:solidFill>
+                  <a:srgbClr val="272530"/>
+                </a:solidFill>
+                <a:latin typeface="Source Sans Pro"/>
+                <a:ea typeface="Source Sans Pro"/>
+                <a:cs typeface="Source Sans Pro"/>
+                <a:sym typeface="Source Sans Pro"/>
+              </a:rPr>
+              <a:t>Compared different weather patterns such as radiation, temperature and humidity to see trends.</a:t>
+            </a:r>
+          </a:p>
+          <a:p>
+            <a:pPr marL="720790" lvl="1" indent="-360395" algn="l">
+              <a:lnSpc>
+                <a:spcPts val="4673"/>
+              </a:lnSpc>
+              <a:buFont typeface="Arial"/>
+              <a:buChar char="•"/>
+            </a:pPr>
+            <a:r>
+              <a:rPr lang="en-US" sz="3338">
+                <a:solidFill>
+                  <a:srgbClr val="272530"/>
+                </a:solidFill>
+                <a:latin typeface="Source Sans Pro"/>
+                <a:ea typeface="Source Sans Pro"/>
+                <a:cs typeface="Source Sans Pro"/>
+                <a:sym typeface="Source Sans Pro"/>
+              </a:rPr>
+              <a:t>Used plots, scatter graphs, bar graphs, twin graphs and heatmaps to relate various quantities.</a:t>
+            </a:r>
+          </a:p>
+        </p:txBody>
+      </p:sp>
+    </p:spTree>
+    <p:extLst>
+      <p:ext uri="{BB962C8B-B14F-4D97-AF65-F5344CB8AC3E}">
+        <p14:creationId xmlns:p14="http://schemas.microsoft.com/office/powerpoint/2010/main" val="1231292053"/>
+      </p:ext>
+    </p:extLst>
+  </p:cSld>
+  <p:clrMapOvr>
+    <a:masterClrMapping/>
+  </p:clrMapOvr>
+</p:sld>
+</file>
+
+<file path=ppt/slides/slide5.xml><?xml version="1.0" encoding="utf-8"?>
+<p:sld xmlns:a="http://schemas.openxmlformats.org/drawingml/2006/main" xmlns:r="http://schemas.openxmlformats.org/officeDocument/2006/relationships" xmlns:p="http://schemas.openxmlformats.org/presentationml/2006/main">
   <p:cSld>
     <p:bg>
       <p:bgPr>
         <a:solidFill>
           <a:srgbClr val="FFFBF5"/>
         </a:solidFill>
+        <a:effectLst/>
       </p:bgPr>
     </p:bg>
     <p:spTree>
@@ -4443,12 +5793,12 @@
       </p:grpSpPr>
       <p:sp>
         <p:nvSpPr>
-          <p:cNvPr name="Freeform 2" id="2"/>
+          <p:cNvPr id="2" name="Freeform 2"/>
           <p:cNvSpPr/>
           <p:nvPr/>
         </p:nvSpPr>
         <p:spPr>
-          <a:xfrm flipH="false" flipV="false" rot="0">
+          <a:xfrm>
             <a:off x="0" y="5414629"/>
             <a:ext cx="4261110" cy="4872371"/>
           </a:xfrm>
@@ -4457,9 +5807,9 @@
             <a:gdLst/>
             <a:ahLst/>
             <a:cxnLst/>
-            <a:rect r="r" b="b" t="t" l="l"/>
+            <a:rect l="l" t="t" r="r" b="b"/>
             <a:pathLst>
-              <a:path h="4872371" w="4261110">
+              <a:path w="4261110" h="4872371">
                 <a:moveTo>
                   <a:pt x="0" y="0"/>
                 </a:moveTo>
@@ -4480,27 +5830,27 @@
             </a:pathLst>
           </a:custGeom>
           <a:blipFill>
-            <a:blip r:embed="rId2">
+            <a:blip>
               <a:extLst>
                 <a:ext uri="{96DAC541-7B7A-43D3-8B79-37D633B846F1}">
-                  <asvg:svgBlip xmlns:asvg="http://schemas.microsoft.com/office/drawing/2016/SVG/main" r:embed="rId3"/>
+                  <asvg:svgBlip xmlns:asvg="http://schemas.microsoft.com/office/drawing/2016/SVG/main" r:embed="rId2"/>
                 </a:ext>
               </a:extLst>
             </a:blip>
             <a:stretch>
-              <a:fillRect l="0" t="0" r="0" b="0"/>
+              <a:fillRect/>
             </a:stretch>
           </a:blipFill>
         </p:spPr>
       </p:sp>
       <p:sp>
         <p:nvSpPr>
-          <p:cNvPr name="Freeform 3" id="3"/>
+          <p:cNvPr id="3" name="Freeform 3"/>
           <p:cNvSpPr/>
           <p:nvPr/>
         </p:nvSpPr>
         <p:spPr>
-          <a:xfrm flipH="true" flipV="true" rot="0">
+          <a:xfrm flipH="1" flipV="1">
             <a:off x="13934338" y="-32160"/>
             <a:ext cx="4353662" cy="4978199"/>
           </a:xfrm>
@@ -4509,9 +5859,9 @@
             <a:gdLst/>
             <a:ahLst/>
             <a:cxnLst/>
-            <a:rect r="r" b="b" t="t" l="l"/>
+            <a:rect l="l" t="t" r="r" b="b"/>
             <a:pathLst>
-              <a:path h="4978199" w="4353662">
+              <a:path w="4353662" h="4978199">
                 <a:moveTo>
                   <a:pt x="4353662" y="4978199"/>
                 </a:moveTo>
@@ -4532,27 +5882,27 @@
             </a:pathLst>
           </a:custGeom>
           <a:blipFill>
-            <a:blip r:embed="rId2">
+            <a:blip>
               <a:extLst>
                 <a:ext uri="{96DAC541-7B7A-43D3-8B79-37D633B846F1}">
-                  <asvg:svgBlip xmlns:asvg="http://schemas.microsoft.com/office/drawing/2016/SVG/main" r:embed="rId3"/>
+                  <asvg:svgBlip xmlns:asvg="http://schemas.microsoft.com/office/drawing/2016/SVG/main" r:embed="rId2"/>
                 </a:ext>
               </a:extLst>
             </a:blip>
             <a:stretch>
-              <a:fillRect l="0" t="0" r="0" b="0"/>
+              <a:fillRect/>
             </a:stretch>
           </a:blipFill>
         </p:spPr>
       </p:sp>
       <p:sp>
         <p:nvSpPr>
-          <p:cNvPr name="Freeform 4" id="4"/>
+          <p:cNvPr id="4" name="Freeform 4"/>
           <p:cNvSpPr/>
           <p:nvPr/>
         </p:nvSpPr>
         <p:spPr>
-          <a:xfrm flipH="true" flipV="false" rot="0">
+          <a:xfrm flipH="1">
             <a:off x="13934338" y="5361715"/>
             <a:ext cx="4353662" cy="4978199"/>
           </a:xfrm>
@@ -4561,9 +5911,9 @@
             <a:gdLst/>
             <a:ahLst/>
             <a:cxnLst/>
-            <a:rect r="r" b="b" t="t" l="l"/>
+            <a:rect l="l" t="t" r="r" b="b"/>
             <a:pathLst>
-              <a:path h="4978199" w="4353662">
+              <a:path w="4353662" h="4978199">
                 <a:moveTo>
                   <a:pt x="4353662" y="0"/>
                 </a:moveTo>
@@ -4584,27 +5934,27 @@
             </a:pathLst>
           </a:custGeom>
           <a:blipFill>
-            <a:blip r:embed="rId2">
+            <a:blip>
               <a:extLst>
                 <a:ext uri="{96DAC541-7B7A-43D3-8B79-37D633B846F1}">
-                  <asvg:svgBlip xmlns:asvg="http://schemas.microsoft.com/office/drawing/2016/SVG/main" r:embed="rId3"/>
+                  <asvg:svgBlip xmlns:asvg="http://schemas.microsoft.com/office/drawing/2016/SVG/main" r:embed="rId2"/>
                 </a:ext>
               </a:extLst>
             </a:blip>
             <a:stretch>
-              <a:fillRect l="0" t="0" r="0" b="0"/>
+              <a:fillRect/>
             </a:stretch>
           </a:blipFill>
         </p:spPr>
       </p:sp>
       <p:sp>
         <p:nvSpPr>
-          <p:cNvPr name="Freeform 5" id="5"/>
+          <p:cNvPr id="5" name="Freeform 5"/>
           <p:cNvSpPr/>
           <p:nvPr/>
         </p:nvSpPr>
         <p:spPr>
-          <a:xfrm flipH="false" flipV="true" rot="0">
+          <a:xfrm flipV="1">
             <a:off x="0" y="0"/>
             <a:ext cx="4353662" cy="4978199"/>
           </a:xfrm>
@@ -4613,9 +5963,9 @@
             <a:gdLst/>
             <a:ahLst/>
             <a:cxnLst/>
-            <a:rect r="r" b="b" t="t" l="l"/>
+            <a:rect l="l" t="t" r="r" b="b"/>
             <a:pathLst>
-              <a:path h="4978199" w="4353662">
+              <a:path w="4353662" h="4978199">
                 <a:moveTo>
                   <a:pt x="0" y="4978199"/>
                 </a:moveTo>
@@ -4636,27 +5986,27 @@
             </a:pathLst>
           </a:custGeom>
           <a:blipFill>
-            <a:blip r:embed="rId2">
+            <a:blip>
               <a:extLst>
                 <a:ext uri="{96DAC541-7B7A-43D3-8B79-37D633B846F1}">
-                  <asvg:svgBlip xmlns:asvg="http://schemas.microsoft.com/office/drawing/2016/SVG/main" r:embed="rId3"/>
+                  <asvg:svgBlip xmlns:asvg="http://schemas.microsoft.com/office/drawing/2016/SVG/main" r:embed="rId2"/>
                 </a:ext>
               </a:extLst>
             </a:blip>
             <a:stretch>
-              <a:fillRect l="0" t="0" r="0" b="0"/>
+              <a:fillRect/>
             </a:stretch>
           </a:blipFill>
         </p:spPr>
       </p:sp>
       <p:sp>
         <p:nvSpPr>
-          <p:cNvPr name="TextBox 6" id="6"/>
-          <p:cNvSpPr txBox="true"/>
+          <p:cNvPr id="6" name="TextBox 6"/>
+          <p:cNvSpPr txBox="1"/>
           <p:nvPr/>
         </p:nvSpPr>
         <p:spPr>
-          <a:xfrm rot="0">
+          <a:xfrm>
             <a:off x="5016331" y="267178"/>
             <a:ext cx="8255338" cy="1172179"/>
           </a:xfrm>
@@ -4665,12 +6015,12 @@
           </a:prstGeom>
         </p:spPr>
         <p:txBody>
-          <a:bodyPr anchor="t" rtlCol="false" tIns="0" lIns="0" bIns="0" rIns="0">
+          <a:bodyPr lIns="0" tIns="0" rIns="0" bIns="0" rtlCol="0" anchor="t">
             <a:spAutoFit/>
           </a:bodyPr>
           <a:lstStyle/>
           <a:p>
-            <a:pPr algn="ctr" marL="0" indent="0" lvl="0">
+            <a:pPr marL="0" lvl="0" indent="0" algn="ctr">
               <a:lnSpc>
                 <a:spcPts val="7717"/>
               </a:lnSpc>
@@ -4692,12 +6042,12 @@
       </p:sp>
       <p:sp>
         <p:nvSpPr>
-          <p:cNvPr name="TextBox 7" id="7"/>
-          <p:cNvSpPr txBox="true"/>
+          <p:cNvPr id="7" name="TextBox 7"/>
+          <p:cNvSpPr txBox="1"/>
           <p:nvPr/>
         </p:nvSpPr>
         <p:spPr>
-          <a:xfrm rot="0">
+          <a:xfrm>
             <a:off x="1028700" y="1730859"/>
             <a:ext cx="16230600" cy="6335051"/>
           </a:xfrm>
@@ -4706,12 +6056,12 @@
           </a:prstGeom>
         </p:spPr>
         <p:txBody>
-          <a:bodyPr anchor="t" rtlCol="false" tIns="0" lIns="0" bIns="0" rIns="0">
+          <a:bodyPr lIns="0" tIns="0" rIns="0" bIns="0" rtlCol="0" anchor="t">
             <a:spAutoFit/>
           </a:bodyPr>
           <a:lstStyle/>
           <a:p>
-            <a:pPr algn="l" marL="720790" indent="-360395" lvl="1">
+            <a:pPr marL="720790" lvl="1" indent="-360395" algn="l">
               <a:lnSpc>
                 <a:spcPts val="4673"/>
               </a:lnSpc>
@@ -4732,7 +6082,7 @@
             </a:r>
           </a:p>
           <a:p>
-            <a:pPr algn="l" marL="720790" indent="-360395" lvl="1">
+            <a:pPr marL="720790" lvl="1" indent="-360395" algn="l">
               <a:lnSpc>
                 <a:spcPts val="4673"/>
               </a:lnSpc>
@@ -4753,7 +6103,7 @@
             </a:r>
           </a:p>
           <a:p>
-            <a:pPr algn="l" marL="720790" indent="-360395" lvl="1">
+            <a:pPr marL="720790" lvl="1" indent="-360395" algn="l">
               <a:lnSpc>
                 <a:spcPts val="4673"/>
               </a:lnSpc>
@@ -4779,6 +6129,15 @@
                 <a:spcPts val="4673"/>
               </a:lnSpc>
             </a:pPr>
+            <a:endParaRPr lang="en-US" sz="3338">
+              <a:solidFill>
+                <a:srgbClr val="272530"/>
+              </a:solidFill>
+              <a:latin typeface="Source Sans Pro"/>
+              <a:ea typeface="Source Sans Pro"/>
+              <a:cs typeface="Source Sans Pro"/>
+              <a:sym typeface="Source Sans Pro"/>
+            </a:endParaRPr>
           </a:p>
           <a:p>
             <a:pPr algn="l">
@@ -4805,9 +6164,18 @@
                 <a:spcPts val="6493"/>
               </a:lnSpc>
             </a:pPr>
-          </a:p>
-          <a:p>
-            <a:pPr algn="l" marL="720790" indent="-360395" lvl="1">
+            <a:endParaRPr lang="en-US" sz="4638">
+              <a:solidFill>
+                <a:srgbClr val="272530"/>
+              </a:solidFill>
+              <a:latin typeface="Source Sans Pro"/>
+              <a:ea typeface="Source Sans Pro"/>
+              <a:cs typeface="Source Sans Pro"/>
+              <a:sym typeface="Source Sans Pro"/>
+            </a:endParaRPr>
+          </a:p>
+          <a:p>
+            <a:pPr marL="720790" lvl="1" indent="-360395" algn="l">
               <a:lnSpc>
                 <a:spcPts val="4673"/>
               </a:lnSpc>
@@ -4828,7 +6196,7 @@
             </a:r>
           </a:p>
           <a:p>
-            <a:pPr algn="l" marL="720790" indent="-360395" lvl="1">
+            <a:pPr marL="720790" lvl="1" indent="-360395" algn="l">
               <a:lnSpc>
                 <a:spcPts val="4673"/>
               </a:lnSpc>
@@ -4849,7 +6217,7 @@
             </a:r>
           </a:p>
           <a:p>
-            <a:pPr algn="l" marL="720790" indent="-360395" lvl="1">
+            <a:pPr marL="720790" lvl="1" indent="-360395" algn="l">
               <a:lnSpc>
                 <a:spcPts val="4673"/>
               </a:lnSpc>
@@ -4879,14 +6247,15 @@
 </p:sld>
 </file>
 
-<file path=ppt/slides/slide4.xml><?xml version="1.0" encoding="utf-8"?>
-<p:sld xmlns:p="http://schemas.openxmlformats.org/presentationml/2006/main" xmlns:a="http://schemas.openxmlformats.org/drawingml/2006/main" xmlns:r="http://schemas.openxmlformats.org/officeDocument/2006/relationships">
+<file path=ppt/slides/slide6.xml><?xml version="1.0" encoding="utf-8"?>
+<p:sld xmlns:a="http://schemas.openxmlformats.org/drawingml/2006/main" xmlns:r="http://schemas.openxmlformats.org/officeDocument/2006/relationships" xmlns:p="http://schemas.openxmlformats.org/presentationml/2006/main">
   <p:cSld>
     <p:bg>
       <p:bgPr>
         <a:solidFill>
           <a:srgbClr val="FFFBF5"/>
         </a:solidFill>
+        <a:effectLst/>
       </p:bgPr>
     </p:bg>
     <p:spTree>
@@ -4905,12 +6274,12 @@
       </p:grpSpPr>
       <p:sp>
         <p:nvSpPr>
-          <p:cNvPr name="Freeform 2" id="2"/>
+          <p:cNvPr id="2" name="Freeform 2"/>
           <p:cNvSpPr/>
           <p:nvPr/>
         </p:nvSpPr>
         <p:spPr>
-          <a:xfrm flipH="false" flipV="false" rot="0">
+          <a:xfrm>
             <a:off x="0" y="5414629"/>
             <a:ext cx="4261110" cy="4872371"/>
           </a:xfrm>
@@ -4919,9 +6288,9 @@
             <a:gdLst/>
             <a:ahLst/>
             <a:cxnLst/>
-            <a:rect r="r" b="b" t="t" l="l"/>
+            <a:rect l="l" t="t" r="r" b="b"/>
             <a:pathLst>
-              <a:path h="4872371" w="4261110">
+              <a:path w="4261110" h="4872371">
                 <a:moveTo>
                   <a:pt x="0" y="0"/>
                 </a:moveTo>
@@ -4942,27 +6311,27 @@
             </a:pathLst>
           </a:custGeom>
           <a:blipFill>
-            <a:blip r:embed="rId2">
+            <a:blip>
               <a:extLst>
                 <a:ext uri="{96DAC541-7B7A-43D3-8B79-37D633B846F1}">
-                  <asvg:svgBlip xmlns:asvg="http://schemas.microsoft.com/office/drawing/2016/SVG/main" r:embed="rId3"/>
+                  <asvg:svgBlip xmlns:asvg="http://schemas.microsoft.com/office/drawing/2016/SVG/main" r:embed="rId2"/>
                 </a:ext>
               </a:extLst>
             </a:blip>
             <a:stretch>
-              <a:fillRect l="0" t="0" r="0" b="0"/>
+              <a:fillRect/>
             </a:stretch>
           </a:blipFill>
         </p:spPr>
       </p:sp>
       <p:sp>
         <p:nvSpPr>
-          <p:cNvPr name="Freeform 3" id="3"/>
+          <p:cNvPr id="3" name="Freeform 3"/>
           <p:cNvSpPr/>
           <p:nvPr/>
         </p:nvSpPr>
         <p:spPr>
-          <a:xfrm flipH="true" flipV="true" rot="0">
+          <a:xfrm flipH="1" flipV="1">
             <a:off x="13934338" y="-32160"/>
             <a:ext cx="4353662" cy="4978199"/>
           </a:xfrm>
@@ -4971,9 +6340,9 @@
             <a:gdLst/>
             <a:ahLst/>
             <a:cxnLst/>
-            <a:rect r="r" b="b" t="t" l="l"/>
+            <a:rect l="l" t="t" r="r" b="b"/>
             <a:pathLst>
-              <a:path h="4978199" w="4353662">
+              <a:path w="4353662" h="4978199">
                 <a:moveTo>
                   <a:pt x="4353662" y="4978199"/>
                 </a:moveTo>
@@ -4994,27 +6363,27 @@
             </a:pathLst>
           </a:custGeom>
           <a:blipFill>
-            <a:blip r:embed="rId2">
+            <a:blip>
               <a:extLst>
                 <a:ext uri="{96DAC541-7B7A-43D3-8B79-37D633B846F1}">
-                  <asvg:svgBlip xmlns:asvg="http://schemas.microsoft.com/office/drawing/2016/SVG/main" r:embed="rId3"/>
+                  <asvg:svgBlip xmlns:asvg="http://schemas.microsoft.com/office/drawing/2016/SVG/main" r:embed="rId2"/>
                 </a:ext>
               </a:extLst>
             </a:blip>
             <a:stretch>
-              <a:fillRect l="0" t="0" r="0" b="0"/>
+              <a:fillRect/>
             </a:stretch>
           </a:blipFill>
         </p:spPr>
       </p:sp>
       <p:sp>
         <p:nvSpPr>
-          <p:cNvPr name="Freeform 4" id="4"/>
+          <p:cNvPr id="4" name="Freeform 4"/>
           <p:cNvSpPr/>
           <p:nvPr/>
         </p:nvSpPr>
         <p:spPr>
-          <a:xfrm flipH="true" flipV="false" rot="0">
+          <a:xfrm flipH="1">
             <a:off x="13934338" y="5361715"/>
             <a:ext cx="4353662" cy="4978199"/>
           </a:xfrm>
@@ -5023,9 +6392,9 @@
             <a:gdLst/>
             <a:ahLst/>
             <a:cxnLst/>
-            <a:rect r="r" b="b" t="t" l="l"/>
+            <a:rect l="l" t="t" r="r" b="b"/>
             <a:pathLst>
-              <a:path h="4978199" w="4353662">
+              <a:path w="4353662" h="4978199">
                 <a:moveTo>
                   <a:pt x="4353662" y="0"/>
                 </a:moveTo>
@@ -5046,27 +6415,27 @@
             </a:pathLst>
           </a:custGeom>
           <a:blipFill>
-            <a:blip r:embed="rId2">
+            <a:blip>
               <a:extLst>
                 <a:ext uri="{96DAC541-7B7A-43D3-8B79-37D633B846F1}">
-                  <asvg:svgBlip xmlns:asvg="http://schemas.microsoft.com/office/drawing/2016/SVG/main" r:embed="rId3"/>
+                  <asvg:svgBlip xmlns:asvg="http://schemas.microsoft.com/office/drawing/2016/SVG/main" r:embed="rId2"/>
                 </a:ext>
               </a:extLst>
             </a:blip>
             <a:stretch>
-              <a:fillRect l="0" t="0" r="0" b="0"/>
+              <a:fillRect/>
             </a:stretch>
           </a:blipFill>
         </p:spPr>
       </p:sp>
       <p:sp>
         <p:nvSpPr>
-          <p:cNvPr name="Freeform 5" id="5"/>
+          <p:cNvPr id="5" name="Freeform 5"/>
           <p:cNvSpPr/>
           <p:nvPr/>
         </p:nvSpPr>
         <p:spPr>
-          <a:xfrm flipH="false" flipV="true" rot="0">
+          <a:xfrm flipV="1">
             <a:off x="0" y="0"/>
             <a:ext cx="4353662" cy="4978199"/>
           </a:xfrm>
@@ -5075,9 +6444,9 @@
             <a:gdLst/>
             <a:ahLst/>
             <a:cxnLst/>
-            <a:rect r="r" b="b" t="t" l="l"/>
+            <a:rect l="l" t="t" r="r" b="b"/>
             <a:pathLst>
-              <a:path h="4978199" w="4353662">
+              <a:path w="4353662" h="4978199">
                 <a:moveTo>
                   <a:pt x="0" y="4978199"/>
                 </a:moveTo>
@@ -5098,24 +6467,24 @@
             </a:pathLst>
           </a:custGeom>
           <a:blipFill>
-            <a:blip r:embed="rId2">
+            <a:blip>
               <a:extLst>
                 <a:ext uri="{96DAC541-7B7A-43D3-8B79-37D633B846F1}">
-                  <asvg:svgBlip xmlns:asvg="http://schemas.microsoft.com/office/drawing/2016/SVG/main" r:embed="rId3"/>
+                  <asvg:svgBlip xmlns:asvg="http://schemas.microsoft.com/office/drawing/2016/SVG/main" r:embed="rId2"/>
                 </a:ext>
               </a:extLst>
             </a:blip>
             <a:stretch>
-              <a:fillRect l="0" t="0" r="0" b="0"/>
+              <a:fillRect/>
             </a:stretch>
           </a:blipFill>
         </p:spPr>
       </p:sp>
       <p:graphicFrame>
         <p:nvGraphicFramePr>
-          <p:cNvPr name="Table 6" id="6"/>
+          <p:cNvPr id="6" name="Table 6"/>
           <p:cNvGraphicFramePr>
-            <a:graphicFrameLocks noGrp="true"/>
+            <a:graphicFrameLocks noGrp="1"/>
           </p:cNvGraphicFramePr>
           <p:nvPr/>
         </p:nvGraphicFramePr>
@@ -5128,18 +6497,60 @@
             <a:tbl>
               <a:tblPr/>
               <a:tblGrid>
-                <a:gridCol w="2303227"/>
-                <a:gridCol w="2303227"/>
-                <a:gridCol w="2303227"/>
-                <a:gridCol w="2303227"/>
-                <a:gridCol w="2303227"/>
-                <a:gridCol w="2303227"/>
-                <a:gridCol w="2303227"/>
+                <a:gridCol w="2303227">
+                  <a:extLst>
+                    <a:ext uri="{9D8B030D-6E8A-4147-A177-3AD203B41FA5}">
+                      <a16:colId xmlns:a16="http://schemas.microsoft.com/office/drawing/2014/main" val="20000"/>
+                    </a:ext>
+                  </a:extLst>
+                </a:gridCol>
+                <a:gridCol w="2303227">
+                  <a:extLst>
+                    <a:ext uri="{9D8B030D-6E8A-4147-A177-3AD203B41FA5}">
+                      <a16:colId xmlns:a16="http://schemas.microsoft.com/office/drawing/2014/main" val="20001"/>
+                    </a:ext>
+                  </a:extLst>
+                </a:gridCol>
+                <a:gridCol w="2303227">
+                  <a:extLst>
+                    <a:ext uri="{9D8B030D-6E8A-4147-A177-3AD203B41FA5}">
+                      <a16:colId xmlns:a16="http://schemas.microsoft.com/office/drawing/2014/main" val="20002"/>
+                    </a:ext>
+                  </a:extLst>
+                </a:gridCol>
+                <a:gridCol w="2303227">
+                  <a:extLst>
+                    <a:ext uri="{9D8B030D-6E8A-4147-A177-3AD203B41FA5}">
+                      <a16:colId xmlns:a16="http://schemas.microsoft.com/office/drawing/2014/main" val="20003"/>
+                    </a:ext>
+                  </a:extLst>
+                </a:gridCol>
+                <a:gridCol w="2303227">
+                  <a:extLst>
+                    <a:ext uri="{9D8B030D-6E8A-4147-A177-3AD203B41FA5}">
+                      <a16:colId xmlns:a16="http://schemas.microsoft.com/office/drawing/2014/main" val="20004"/>
+                    </a:ext>
+                  </a:extLst>
+                </a:gridCol>
+                <a:gridCol w="2303227">
+                  <a:extLst>
+                    <a:ext uri="{9D8B030D-6E8A-4147-A177-3AD203B41FA5}">
+                      <a16:colId xmlns:a16="http://schemas.microsoft.com/office/drawing/2014/main" val="20005"/>
+                    </a:ext>
+                  </a:extLst>
+                </a:gridCol>
+                <a:gridCol w="2303227">
+                  <a:extLst>
+                    <a:ext uri="{9D8B030D-6E8A-4147-A177-3AD203B41FA5}">
+                      <a16:colId xmlns:a16="http://schemas.microsoft.com/office/drawing/2014/main" val="20006"/>
+                    </a:ext>
+                  </a:extLst>
+                </a:gridCol>
               </a:tblGrid>
               <a:tr h="2101293">
                 <a:tc>
                   <a:txBody>
-                    <a:bodyPr anchor="t" rtlCol="false"/>
+                    <a:bodyPr/>
                     <a:lstStyle/>
                     <a:p>
                       <a:pPr algn="ctr">
@@ -5149,7 +6560,7 @@
                         <a:defRPr/>
                       </a:pPr>
                       <a:r>
-                        <a:rPr lang="en-US" sz="1899" b="true">
+                        <a:rPr lang="en-US" sz="1899" b="1">
                           <a:solidFill>
                             <a:srgbClr val="000000"/>
                           </a:solidFill>
@@ -5164,7 +6575,7 @@
                     </a:p>
                   </a:txBody>
                   <a:tcPr marL="190500" marR="190500" marT="190500" marB="190500" anchor="ctr">
-                    <a:lnL cmpd="sng" algn="ctr" cap="flat" w="38100">
+                    <a:lnL w="38100" cap="flat" cmpd="sng" algn="ctr">
                       <a:solidFill>
                         <a:srgbClr val="000000"/>
                       </a:solidFill>
@@ -5173,7 +6584,7 @@
                       <a:headEnd type="none" w="med" len="med"/>
                       <a:tailEnd type="none" w="med" len="med"/>
                     </a:lnL>
-                    <a:lnR cmpd="sng" algn="ctr" cap="flat" w="38100">
+                    <a:lnR w="38100" cap="flat" cmpd="sng" algn="ctr">
                       <a:solidFill>
                         <a:srgbClr val="000000"/>
                       </a:solidFill>
@@ -5182,7 +6593,7 @@
                       <a:headEnd type="none" w="med" len="med"/>
                       <a:tailEnd type="none" w="med" len="med"/>
                     </a:lnR>
-                    <a:lnT cmpd="sng" algn="ctr" cap="flat" w="38100">
+                    <a:lnT w="38100" cap="flat" cmpd="sng" algn="ctr">
                       <a:solidFill>
                         <a:srgbClr val="000000"/>
                       </a:solidFill>
@@ -5191,7 +6602,7 @@
                       <a:headEnd type="none" w="med" len="med"/>
                       <a:tailEnd type="none" w="med" len="med"/>
                     </a:lnT>
-                    <a:lnB cmpd="sng" algn="ctr" cap="flat" w="38100">
+                    <a:lnB w="38100" cap="flat" cmpd="sng" algn="ctr">
                       <a:solidFill>
                         <a:srgbClr val="000000"/>
                       </a:solidFill>
@@ -5204,7 +6615,7 @@
                 </a:tc>
                 <a:tc>
                   <a:txBody>
-                    <a:bodyPr anchor="t" rtlCol="false"/>
+                    <a:bodyPr/>
                     <a:lstStyle/>
                     <a:p>
                       <a:pPr algn="ctr">
@@ -5214,7 +6625,7 @@
                         <a:defRPr/>
                       </a:pPr>
                       <a:r>
-                        <a:rPr lang="en-US" sz="1899" b="true">
+                        <a:rPr lang="en-US" sz="1899" b="1">
                           <a:solidFill>
                             <a:srgbClr val="000000"/>
                           </a:solidFill>
@@ -5234,7 +6645,7 @@
                         </a:lnSpc>
                       </a:pPr>
                       <a:r>
-                        <a:rPr lang="en-US" sz="1899" b="true">
+                        <a:rPr lang="en-US" sz="1899" b="1">
                           <a:solidFill>
                             <a:srgbClr val="000000"/>
                           </a:solidFill>
@@ -5248,7 +6659,7 @@
                     </a:p>
                   </a:txBody>
                   <a:tcPr marL="190500" marR="190500" marT="190500" marB="190500" anchor="ctr">
-                    <a:lnL cmpd="sng" algn="ctr" cap="flat" w="38100">
+                    <a:lnL w="38100" cap="flat" cmpd="sng" algn="ctr">
                       <a:solidFill>
                         <a:srgbClr val="000000"/>
                       </a:solidFill>
@@ -5257,7 +6668,7 @@
                       <a:headEnd type="none" w="med" len="med"/>
                       <a:tailEnd type="none" w="med" len="med"/>
                     </a:lnL>
-                    <a:lnR cmpd="sng" algn="ctr" cap="flat" w="38100">
+                    <a:lnR w="38100" cap="flat" cmpd="sng" algn="ctr">
                       <a:solidFill>
                         <a:srgbClr val="000000"/>
                       </a:solidFill>
@@ -5266,7 +6677,7 @@
                       <a:headEnd type="none" w="med" len="med"/>
                       <a:tailEnd type="none" w="med" len="med"/>
                     </a:lnR>
-                    <a:lnT cmpd="sng" algn="ctr" cap="flat" w="38100">
+                    <a:lnT w="38100" cap="flat" cmpd="sng" algn="ctr">
                       <a:solidFill>
                         <a:srgbClr val="000000"/>
                       </a:solidFill>
@@ -5275,7 +6686,7 @@
                       <a:headEnd type="none" w="med" len="med"/>
                       <a:tailEnd type="none" w="med" len="med"/>
                     </a:lnT>
-                    <a:lnB cmpd="sng" algn="ctr" cap="flat" w="38100">
+                    <a:lnB w="38100" cap="flat" cmpd="sng" algn="ctr">
                       <a:solidFill>
                         <a:srgbClr val="000000"/>
                       </a:solidFill>
@@ -5288,7 +6699,7 @@
                 </a:tc>
                 <a:tc>
                   <a:txBody>
-                    <a:bodyPr anchor="t" rtlCol="false"/>
+                    <a:bodyPr/>
                     <a:lstStyle/>
                     <a:p>
                       <a:pPr algn="ctr">
@@ -5298,7 +6709,7 @@
                         <a:defRPr/>
                       </a:pPr>
                       <a:r>
-                        <a:rPr lang="en-US" sz="1899" b="true">
+                        <a:rPr lang="en-US" sz="1899" b="1">
                           <a:solidFill>
                             <a:srgbClr val="000000"/>
                           </a:solidFill>
@@ -5313,7 +6724,7 @@
                     </a:p>
                   </a:txBody>
                   <a:tcPr marL="190500" marR="190500" marT="190500" marB="190500" anchor="ctr">
-                    <a:lnL cmpd="sng" algn="ctr" cap="flat" w="38100">
+                    <a:lnL w="38100" cap="flat" cmpd="sng" algn="ctr">
                       <a:solidFill>
                         <a:srgbClr val="000000"/>
                       </a:solidFill>
@@ -5322,7 +6733,7 @@
                       <a:headEnd type="none" w="med" len="med"/>
                       <a:tailEnd type="none" w="med" len="med"/>
                     </a:lnL>
-                    <a:lnR cmpd="sng" algn="ctr" cap="flat" w="38100">
+                    <a:lnR w="38100" cap="flat" cmpd="sng" algn="ctr">
                       <a:solidFill>
                         <a:srgbClr val="000000"/>
                       </a:solidFill>
@@ -5331,7 +6742,7 @@
                       <a:headEnd type="none" w="med" len="med"/>
                       <a:tailEnd type="none" w="med" len="med"/>
                     </a:lnR>
-                    <a:lnT cmpd="sng" algn="ctr" cap="flat" w="38100">
+                    <a:lnT w="38100" cap="flat" cmpd="sng" algn="ctr">
                       <a:solidFill>
                         <a:srgbClr val="000000"/>
                       </a:solidFill>
@@ -5340,7 +6751,7 @@
                       <a:headEnd type="none" w="med" len="med"/>
                       <a:tailEnd type="none" w="med" len="med"/>
                     </a:lnT>
-                    <a:lnB cmpd="sng" algn="ctr" cap="flat" w="38100">
+                    <a:lnB w="38100" cap="flat" cmpd="sng" algn="ctr">
                       <a:solidFill>
                         <a:srgbClr val="000000"/>
                       </a:solidFill>
@@ -5353,7 +6764,7 @@
                 </a:tc>
                 <a:tc>
                   <a:txBody>
-                    <a:bodyPr anchor="t" rtlCol="false"/>
+                    <a:bodyPr/>
                     <a:lstStyle/>
                     <a:p>
                       <a:pPr algn="ctr">
@@ -5363,7 +6774,7 @@
                         <a:defRPr/>
                       </a:pPr>
                       <a:r>
-                        <a:rPr lang="en-US" sz="1899" b="true">
+                        <a:rPr lang="en-US" sz="1899" b="1">
                           <a:solidFill>
                             <a:srgbClr val="000000"/>
                           </a:solidFill>
@@ -5383,7 +6794,7 @@
                         </a:lnSpc>
                       </a:pPr>
                       <a:r>
-                        <a:rPr lang="en-US" sz="1899" b="true">
+                        <a:rPr lang="en-US" sz="1899" b="1">
                           <a:solidFill>
                             <a:srgbClr val="000000"/>
                           </a:solidFill>
@@ -5397,7 +6808,7 @@
                     </a:p>
                   </a:txBody>
                   <a:tcPr marL="190500" marR="190500" marT="190500" marB="190500" anchor="ctr">
-                    <a:lnL cmpd="sng" algn="ctr" cap="flat" w="38100">
+                    <a:lnL w="38100" cap="flat" cmpd="sng" algn="ctr">
                       <a:solidFill>
                         <a:srgbClr val="000000"/>
                       </a:solidFill>
@@ -5406,7 +6817,7 @@
                       <a:headEnd type="none" w="med" len="med"/>
                       <a:tailEnd type="none" w="med" len="med"/>
                     </a:lnL>
-                    <a:lnR cmpd="sng" algn="ctr" cap="flat" w="38100">
+                    <a:lnR w="38100" cap="flat" cmpd="sng" algn="ctr">
                       <a:solidFill>
                         <a:srgbClr val="000000"/>
                       </a:solidFill>
@@ -5415,7 +6826,7 @@
                       <a:headEnd type="none" w="med" len="med"/>
                       <a:tailEnd type="none" w="med" len="med"/>
                     </a:lnR>
-                    <a:lnT cmpd="sng" algn="ctr" cap="flat" w="38100">
+                    <a:lnT w="38100" cap="flat" cmpd="sng" algn="ctr">
                       <a:solidFill>
                         <a:srgbClr val="000000"/>
                       </a:solidFill>
@@ -5424,7 +6835,7 @@
                       <a:headEnd type="none" w="med" len="med"/>
                       <a:tailEnd type="none" w="med" len="med"/>
                     </a:lnT>
-                    <a:lnB cmpd="sng" algn="ctr" cap="flat" w="38100">
+                    <a:lnB w="38100" cap="flat" cmpd="sng" algn="ctr">
                       <a:solidFill>
                         <a:srgbClr val="000000"/>
                       </a:solidFill>
@@ -5437,7 +6848,7 @@
                 </a:tc>
                 <a:tc>
                   <a:txBody>
-                    <a:bodyPr anchor="t" rtlCol="false"/>
+                    <a:bodyPr/>
                     <a:lstStyle/>
                     <a:p>
                       <a:pPr algn="ctr">
@@ -5447,7 +6858,7 @@
                         <a:defRPr/>
                       </a:pPr>
                       <a:r>
-                        <a:rPr lang="en-US" sz="1899" b="true">
+                        <a:rPr lang="en-US" sz="1899" b="1">
                           <a:solidFill>
                             <a:srgbClr val="000000"/>
                           </a:solidFill>
@@ -5462,7 +6873,7 @@
                     </a:p>
                   </a:txBody>
                   <a:tcPr marL="190500" marR="190500" marT="190500" marB="190500" anchor="ctr">
-                    <a:lnL cmpd="sng" algn="ctr" cap="flat" w="38100">
+                    <a:lnL w="38100" cap="flat" cmpd="sng" algn="ctr">
                       <a:solidFill>
                         <a:srgbClr val="000000"/>
                       </a:solidFill>
@@ -5471,7 +6882,7 @@
                       <a:headEnd type="none" w="med" len="med"/>
                       <a:tailEnd type="none" w="med" len="med"/>
                     </a:lnL>
-                    <a:lnR cmpd="sng" algn="ctr" cap="flat" w="38100">
+                    <a:lnR w="38100" cap="flat" cmpd="sng" algn="ctr">
                       <a:solidFill>
                         <a:srgbClr val="000000"/>
                       </a:solidFill>
@@ -5480,7 +6891,7 @@
                       <a:headEnd type="none" w="med" len="med"/>
                       <a:tailEnd type="none" w="med" len="med"/>
                     </a:lnR>
-                    <a:lnT cmpd="sng" algn="ctr" cap="flat" w="38100">
+                    <a:lnT w="38100" cap="flat" cmpd="sng" algn="ctr">
                       <a:solidFill>
                         <a:srgbClr val="000000"/>
                       </a:solidFill>
@@ -5489,7 +6900,7 @@
                       <a:headEnd type="none" w="med" len="med"/>
                       <a:tailEnd type="none" w="med" len="med"/>
                     </a:lnT>
-                    <a:lnB cmpd="sng" algn="ctr" cap="flat" w="38100">
+                    <a:lnB w="38100" cap="flat" cmpd="sng" algn="ctr">
                       <a:solidFill>
                         <a:srgbClr val="000000"/>
                       </a:solidFill>
@@ -5502,7 +6913,7 @@
                 </a:tc>
                 <a:tc>
                   <a:txBody>
-                    <a:bodyPr anchor="t" rtlCol="false"/>
+                    <a:bodyPr/>
                     <a:lstStyle/>
                     <a:p>
                       <a:pPr algn="ctr">
@@ -5512,7 +6923,7 @@
                         <a:defRPr/>
                       </a:pPr>
                       <a:r>
-                        <a:rPr lang="en-US" sz="1899" b="true">
+                        <a:rPr lang="en-US" sz="1899" b="1">
                           <a:solidFill>
                             <a:srgbClr val="000000"/>
                           </a:solidFill>
@@ -5532,7 +6943,7 @@
                         </a:lnSpc>
                       </a:pPr>
                       <a:r>
-                        <a:rPr lang="en-US" sz="1899" b="true">
+                        <a:rPr lang="en-US" sz="1899" b="1">
                           <a:solidFill>
                             <a:srgbClr val="000000"/>
                           </a:solidFill>
@@ -5546,7 +6957,7 @@
                     </a:p>
                   </a:txBody>
                   <a:tcPr marL="190500" marR="190500" marT="190500" marB="190500" anchor="ctr">
-                    <a:lnL cmpd="sng" algn="ctr" cap="flat" w="38100">
+                    <a:lnL w="38100" cap="flat" cmpd="sng" algn="ctr">
                       <a:solidFill>
                         <a:srgbClr val="000000"/>
                       </a:solidFill>
@@ -5555,7 +6966,7 @@
                       <a:headEnd type="none" w="med" len="med"/>
                       <a:tailEnd type="none" w="med" len="med"/>
                     </a:lnL>
-                    <a:lnR cmpd="sng" algn="ctr" cap="flat" w="38100">
+                    <a:lnR w="38100" cap="flat" cmpd="sng" algn="ctr">
                       <a:solidFill>
                         <a:srgbClr val="000000"/>
                       </a:solidFill>
@@ -5564,7 +6975,7 @@
                       <a:headEnd type="none" w="med" len="med"/>
                       <a:tailEnd type="none" w="med" len="med"/>
                     </a:lnR>
-                    <a:lnT cmpd="sng" algn="ctr" cap="flat" w="38100">
+                    <a:lnT w="38100" cap="flat" cmpd="sng" algn="ctr">
                       <a:solidFill>
                         <a:srgbClr val="000000"/>
                       </a:solidFill>
@@ -5573,7 +6984,7 @@
                       <a:headEnd type="none" w="med" len="med"/>
                       <a:tailEnd type="none" w="med" len="med"/>
                     </a:lnT>
-                    <a:lnB cmpd="sng" algn="ctr" cap="flat" w="38100">
+                    <a:lnB w="38100" cap="flat" cmpd="sng" algn="ctr">
                       <a:solidFill>
                         <a:srgbClr val="000000"/>
                       </a:solidFill>
@@ -5586,7 +6997,7 @@
                 </a:tc>
                 <a:tc>
                   <a:txBody>
-                    <a:bodyPr anchor="t" rtlCol="false"/>
+                    <a:bodyPr/>
                     <a:lstStyle/>
                     <a:p>
                       <a:pPr algn="ctr">
@@ -5596,7 +7007,7 @@
                         <a:defRPr/>
                       </a:pPr>
                       <a:r>
-                        <a:rPr lang="en-US" sz="1899" b="true">
+                        <a:rPr lang="en-US" sz="1899" b="1">
                           <a:solidFill>
                             <a:srgbClr val="000000"/>
                           </a:solidFill>
@@ -5616,7 +7027,7 @@
                         </a:lnSpc>
                       </a:pPr>
                       <a:r>
-                        <a:rPr lang="en-US" sz="1899" b="true">
+                        <a:rPr lang="en-US" sz="1899" b="1">
                           <a:solidFill>
                             <a:srgbClr val="000000"/>
                           </a:solidFill>
@@ -5630,7 +7041,7 @@
                     </a:p>
                   </a:txBody>
                   <a:tcPr marL="190500" marR="190500" marT="190500" marB="190500" anchor="ctr">
-                    <a:lnL cmpd="sng" algn="ctr" cap="flat" w="38100">
+                    <a:lnL w="38100" cap="flat" cmpd="sng" algn="ctr">
                       <a:solidFill>
                         <a:srgbClr val="000000"/>
                       </a:solidFill>
@@ -5639,7 +7050,7 @@
                       <a:headEnd type="none" w="med" len="med"/>
                       <a:tailEnd type="none" w="med" len="med"/>
                     </a:lnL>
-                    <a:lnR cmpd="sng" algn="ctr" cap="flat" w="38100">
+                    <a:lnR w="38100" cap="flat" cmpd="sng" algn="ctr">
                       <a:solidFill>
                         <a:srgbClr val="000000"/>
                       </a:solidFill>
@@ -5648,7 +7059,7 @@
                       <a:headEnd type="none" w="med" len="med"/>
                       <a:tailEnd type="none" w="med" len="med"/>
                     </a:lnR>
-                    <a:lnT cmpd="sng" algn="ctr" cap="flat" w="38100">
+                    <a:lnT w="38100" cap="flat" cmpd="sng" algn="ctr">
                       <a:solidFill>
                         <a:srgbClr val="000000"/>
                       </a:solidFill>
@@ -5657,7 +7068,7 @@
                       <a:headEnd type="none" w="med" len="med"/>
                       <a:tailEnd type="none" w="med" len="med"/>
                     </a:lnT>
-                    <a:lnB cmpd="sng" algn="ctr" cap="flat" w="38100">
+                    <a:lnB w="38100" cap="flat" cmpd="sng" algn="ctr">
                       <a:solidFill>
                         <a:srgbClr val="000000"/>
                       </a:solidFill>
@@ -5668,11 +7079,16 @@
                     </a:lnB>
                   </a:tcPr>
                 </a:tc>
+                <a:extLst>
+                  <a:ext uri="{0D108BD9-81ED-4DB2-BD59-A6C34878D82A}">
+                    <a16:rowId xmlns:a16="http://schemas.microsoft.com/office/drawing/2014/main" val="10000"/>
+                  </a:ext>
+                </a:extLst>
               </a:tr>
               <a:tr h="1160445">
                 <a:tc>
                   <a:txBody>
-                    <a:bodyPr anchor="t" rtlCol="false"/>
+                    <a:bodyPr/>
                     <a:lstStyle/>
                     <a:p>
                       <a:pPr algn="ctr">
@@ -5697,7 +7113,7 @@
                     </a:p>
                   </a:txBody>
                   <a:tcPr marL="190500" marR="190500" marT="190500" marB="190500" anchor="ctr">
-                    <a:lnL cmpd="sng" algn="ctr" cap="flat" w="38100">
+                    <a:lnL w="38100" cap="flat" cmpd="sng" algn="ctr">
                       <a:solidFill>
                         <a:srgbClr val="000000"/>
                       </a:solidFill>
@@ -5706,7 +7122,7 @@
                       <a:headEnd type="none" w="med" len="med"/>
                       <a:tailEnd type="none" w="med" len="med"/>
                     </a:lnL>
-                    <a:lnR cmpd="sng" algn="ctr" cap="flat" w="38100">
+                    <a:lnR w="38100" cap="flat" cmpd="sng" algn="ctr">
                       <a:solidFill>
                         <a:srgbClr val="000000"/>
                       </a:solidFill>
@@ -5715,7 +7131,7 @@
                       <a:headEnd type="none" w="med" len="med"/>
                       <a:tailEnd type="none" w="med" len="med"/>
                     </a:lnR>
-                    <a:lnT cmpd="sng" algn="ctr" cap="flat" w="38100">
+                    <a:lnT w="38100" cap="flat" cmpd="sng" algn="ctr">
                       <a:solidFill>
                         <a:srgbClr val="000000"/>
                       </a:solidFill>
@@ -5724,7 +7140,7 @@
                       <a:headEnd type="none" w="med" len="med"/>
                       <a:tailEnd type="none" w="med" len="med"/>
                     </a:lnT>
-                    <a:lnB cmpd="sng" algn="ctr" cap="flat" w="38100">
+                    <a:lnB w="38100" cap="flat" cmpd="sng" algn="ctr">
                       <a:solidFill>
                         <a:srgbClr val="000000"/>
                       </a:solidFill>
@@ -5737,7 +7153,7 @@
                 </a:tc>
                 <a:tc>
                   <a:txBody>
-                    <a:bodyPr anchor="t" rtlCol="false"/>
+                    <a:bodyPr/>
                     <a:lstStyle/>
                     <a:p>
                       <a:pPr algn="ctr">
@@ -5762,7 +7178,7 @@
                     </a:p>
                   </a:txBody>
                   <a:tcPr marL="190500" marR="190500" marT="190500" marB="190500" anchor="ctr">
-                    <a:lnL cmpd="sng" algn="ctr" cap="flat" w="38100">
+                    <a:lnL w="38100" cap="flat" cmpd="sng" algn="ctr">
                       <a:solidFill>
                         <a:srgbClr val="000000"/>
                       </a:solidFill>
@@ -5771,7 +7187,7 @@
                       <a:headEnd type="none" w="med" len="med"/>
                       <a:tailEnd type="none" w="med" len="med"/>
                     </a:lnL>
-                    <a:lnR cmpd="sng" algn="ctr" cap="flat" w="38100">
+                    <a:lnR w="38100" cap="flat" cmpd="sng" algn="ctr">
                       <a:solidFill>
                         <a:srgbClr val="000000"/>
                       </a:solidFill>
@@ -5780,7 +7196,7 @@
                       <a:headEnd type="none" w="med" len="med"/>
                       <a:tailEnd type="none" w="med" len="med"/>
                     </a:lnR>
-                    <a:lnT cmpd="sng" algn="ctr" cap="flat" w="38100">
+                    <a:lnT w="38100" cap="flat" cmpd="sng" algn="ctr">
                       <a:solidFill>
                         <a:srgbClr val="000000"/>
                       </a:solidFill>
@@ -5789,7 +7205,7 @@
                       <a:headEnd type="none" w="med" len="med"/>
                       <a:tailEnd type="none" w="med" len="med"/>
                     </a:lnT>
-                    <a:lnB cmpd="sng" algn="ctr" cap="flat" w="38100">
+                    <a:lnB w="38100" cap="flat" cmpd="sng" algn="ctr">
                       <a:solidFill>
                         <a:srgbClr val="000000"/>
                       </a:solidFill>
@@ -5802,7 +7218,7 @@
                 </a:tc>
                 <a:tc>
                   <a:txBody>
-                    <a:bodyPr anchor="t" rtlCol="false"/>
+                    <a:bodyPr/>
                     <a:lstStyle/>
                     <a:p>
                       <a:pPr algn="ctr">
@@ -5827,7 +7243,7 @@
                     </a:p>
                   </a:txBody>
                   <a:tcPr marL="190500" marR="190500" marT="190500" marB="190500" anchor="ctr">
-                    <a:lnL cmpd="sng" algn="ctr" cap="flat" w="38100">
+                    <a:lnL w="38100" cap="flat" cmpd="sng" algn="ctr">
                       <a:solidFill>
                         <a:srgbClr val="000000"/>
                       </a:solidFill>
@@ -5836,7 +7252,7 @@
                       <a:headEnd type="none" w="med" len="med"/>
                       <a:tailEnd type="none" w="med" len="med"/>
                     </a:lnL>
-                    <a:lnR cmpd="sng" algn="ctr" cap="flat" w="38100">
+                    <a:lnR w="38100" cap="flat" cmpd="sng" algn="ctr">
                       <a:solidFill>
                         <a:srgbClr val="000000"/>
                       </a:solidFill>
@@ -5845,7 +7261,7 @@
                       <a:headEnd type="none" w="med" len="med"/>
                       <a:tailEnd type="none" w="med" len="med"/>
                     </a:lnR>
-                    <a:lnT cmpd="sng" algn="ctr" cap="flat" w="38100">
+                    <a:lnT w="38100" cap="flat" cmpd="sng" algn="ctr">
                       <a:solidFill>
                         <a:srgbClr val="000000"/>
                       </a:solidFill>
@@ -5854,7 +7270,7 @@
                       <a:headEnd type="none" w="med" len="med"/>
                       <a:tailEnd type="none" w="med" len="med"/>
                     </a:lnT>
-                    <a:lnB cmpd="sng" algn="ctr" cap="flat" w="38100">
+                    <a:lnB w="38100" cap="flat" cmpd="sng" algn="ctr">
                       <a:solidFill>
                         <a:srgbClr val="000000"/>
                       </a:solidFill>
@@ -5867,7 +7283,7 @@
                 </a:tc>
                 <a:tc>
                   <a:txBody>
-                    <a:bodyPr anchor="t" rtlCol="false"/>
+                    <a:bodyPr/>
                     <a:lstStyle/>
                     <a:p>
                       <a:pPr algn="ctr">
@@ -5892,7 +7308,7 @@
                     </a:p>
                   </a:txBody>
                   <a:tcPr marL="190500" marR="190500" marT="190500" marB="190500" anchor="ctr">
-                    <a:lnL cmpd="sng" algn="ctr" cap="flat" w="38100">
+                    <a:lnL w="38100" cap="flat" cmpd="sng" algn="ctr">
                       <a:solidFill>
                         <a:srgbClr val="000000"/>
                       </a:solidFill>
@@ -5901,7 +7317,7 @@
                       <a:headEnd type="none" w="med" len="med"/>
                       <a:tailEnd type="none" w="med" len="med"/>
                     </a:lnL>
-                    <a:lnR cmpd="sng" algn="ctr" cap="flat" w="38100">
+                    <a:lnR w="38100" cap="flat" cmpd="sng" algn="ctr">
                       <a:solidFill>
                         <a:srgbClr val="000000"/>
                       </a:solidFill>
@@ -5910,7 +7326,7 @@
                       <a:headEnd type="none" w="med" len="med"/>
                       <a:tailEnd type="none" w="med" len="med"/>
                     </a:lnR>
-                    <a:lnT cmpd="sng" algn="ctr" cap="flat" w="38100">
+                    <a:lnT w="38100" cap="flat" cmpd="sng" algn="ctr">
                       <a:solidFill>
                         <a:srgbClr val="000000"/>
                       </a:solidFill>
@@ -5919,7 +7335,7 @@
                       <a:headEnd type="none" w="med" len="med"/>
                       <a:tailEnd type="none" w="med" len="med"/>
                     </a:lnT>
-                    <a:lnB cmpd="sng" algn="ctr" cap="flat" w="38100">
+                    <a:lnB w="38100" cap="flat" cmpd="sng" algn="ctr">
                       <a:solidFill>
                         <a:srgbClr val="000000"/>
                       </a:solidFill>
@@ -5932,7 +7348,7 @@
                 </a:tc>
                 <a:tc>
                   <a:txBody>
-                    <a:bodyPr anchor="t" rtlCol="false"/>
+                    <a:bodyPr/>
                     <a:lstStyle/>
                     <a:p>
                       <a:pPr algn="ctr">
@@ -5957,7 +7373,7 @@
                     </a:p>
                   </a:txBody>
                   <a:tcPr marL="190500" marR="190500" marT="190500" marB="190500" anchor="ctr">
-                    <a:lnL cmpd="sng" algn="ctr" cap="flat" w="38100">
+                    <a:lnL w="38100" cap="flat" cmpd="sng" algn="ctr">
                       <a:solidFill>
                         <a:srgbClr val="000000"/>
                       </a:solidFill>
@@ -5966,7 +7382,7 @@
                       <a:headEnd type="none" w="med" len="med"/>
                       <a:tailEnd type="none" w="med" len="med"/>
                     </a:lnL>
-                    <a:lnR cmpd="sng" algn="ctr" cap="flat" w="38100">
+                    <a:lnR w="38100" cap="flat" cmpd="sng" algn="ctr">
                       <a:solidFill>
                         <a:srgbClr val="000000"/>
                       </a:solidFill>
@@ -5975,7 +7391,7 @@
                       <a:headEnd type="none" w="med" len="med"/>
                       <a:tailEnd type="none" w="med" len="med"/>
                     </a:lnR>
-                    <a:lnT cmpd="sng" algn="ctr" cap="flat" w="38100">
+                    <a:lnT w="38100" cap="flat" cmpd="sng" algn="ctr">
                       <a:solidFill>
                         <a:srgbClr val="000000"/>
                       </a:solidFill>
@@ -5984,7 +7400,7 @@
                       <a:headEnd type="none" w="med" len="med"/>
                       <a:tailEnd type="none" w="med" len="med"/>
                     </a:lnT>
-                    <a:lnB cmpd="sng" algn="ctr" cap="flat" w="38100">
+                    <a:lnB w="38100" cap="flat" cmpd="sng" algn="ctr">
                       <a:solidFill>
                         <a:srgbClr val="000000"/>
                       </a:solidFill>
@@ -5997,7 +7413,7 @@
                 </a:tc>
                 <a:tc>
                   <a:txBody>
-                    <a:bodyPr anchor="t" rtlCol="false"/>
+                    <a:bodyPr/>
                     <a:lstStyle/>
                     <a:p>
                       <a:pPr algn="ctr">
@@ -6022,7 +7438,7 @@
                     </a:p>
                   </a:txBody>
                   <a:tcPr marL="190500" marR="190500" marT="190500" marB="190500" anchor="ctr">
-                    <a:lnL cmpd="sng" algn="ctr" cap="flat" w="38100">
+                    <a:lnL w="38100" cap="flat" cmpd="sng" algn="ctr">
                       <a:solidFill>
                         <a:srgbClr val="000000"/>
                       </a:solidFill>
@@ -6031,7 +7447,7 @@
                       <a:headEnd type="none" w="med" len="med"/>
                       <a:tailEnd type="none" w="med" len="med"/>
                     </a:lnL>
-                    <a:lnR cmpd="sng" algn="ctr" cap="flat" w="38100">
+                    <a:lnR w="38100" cap="flat" cmpd="sng" algn="ctr">
                       <a:solidFill>
                         <a:srgbClr val="000000"/>
                       </a:solidFill>
@@ -6040,7 +7456,7 @@
                       <a:headEnd type="none" w="med" len="med"/>
                       <a:tailEnd type="none" w="med" len="med"/>
                     </a:lnR>
-                    <a:lnT cmpd="sng" algn="ctr" cap="flat" w="38100">
+                    <a:lnT w="38100" cap="flat" cmpd="sng" algn="ctr">
                       <a:solidFill>
                         <a:srgbClr val="000000"/>
                       </a:solidFill>
@@ -6049,7 +7465,7 @@
                       <a:headEnd type="none" w="med" len="med"/>
                       <a:tailEnd type="none" w="med" len="med"/>
                     </a:lnT>
-                    <a:lnB cmpd="sng" algn="ctr" cap="flat" w="38100">
+                    <a:lnB w="38100" cap="flat" cmpd="sng" algn="ctr">
                       <a:solidFill>
                         <a:srgbClr val="000000"/>
                       </a:solidFill>
@@ -6062,7 +7478,7 @@
                 </a:tc>
                 <a:tc>
                   <a:txBody>
-                    <a:bodyPr anchor="t" rtlCol="false"/>
+                    <a:bodyPr/>
                     <a:lstStyle/>
                     <a:p>
                       <a:pPr algn="ctr">
@@ -6087,7 +7503,7 @@
                     </a:p>
                   </a:txBody>
                   <a:tcPr marL="190500" marR="190500" marT="190500" marB="190500" anchor="ctr">
-                    <a:lnL cmpd="sng" algn="ctr" cap="flat" w="38100">
+                    <a:lnL w="38100" cap="flat" cmpd="sng" algn="ctr">
                       <a:solidFill>
                         <a:srgbClr val="000000"/>
                       </a:solidFill>
@@ -6096,7 +7512,7 @@
                       <a:headEnd type="none" w="med" len="med"/>
                       <a:tailEnd type="none" w="med" len="med"/>
                     </a:lnL>
-                    <a:lnR cmpd="sng" algn="ctr" cap="flat" w="38100">
+                    <a:lnR w="38100" cap="flat" cmpd="sng" algn="ctr">
                       <a:solidFill>
                         <a:srgbClr val="000000"/>
                       </a:solidFill>
@@ -6105,7 +7521,7 @@
                       <a:headEnd type="none" w="med" len="med"/>
                       <a:tailEnd type="none" w="med" len="med"/>
                     </a:lnR>
-                    <a:lnT cmpd="sng" algn="ctr" cap="flat" w="38100">
+                    <a:lnT w="38100" cap="flat" cmpd="sng" algn="ctr">
                       <a:solidFill>
                         <a:srgbClr val="000000"/>
                       </a:solidFill>
@@ -6114,7 +7530,7 @@
                       <a:headEnd type="none" w="med" len="med"/>
                       <a:tailEnd type="none" w="med" len="med"/>
                     </a:lnT>
-                    <a:lnB cmpd="sng" algn="ctr" cap="flat" w="38100">
+                    <a:lnB w="38100" cap="flat" cmpd="sng" algn="ctr">
                       <a:solidFill>
                         <a:srgbClr val="000000"/>
                       </a:solidFill>
@@ -6125,11 +7541,16 @@
                     </a:lnB>
                   </a:tcPr>
                 </a:tc>
+                <a:extLst>
+                  <a:ext uri="{0D108BD9-81ED-4DB2-BD59-A6C34878D82A}">
+                    <a16:rowId xmlns:a16="http://schemas.microsoft.com/office/drawing/2014/main" val="10001"/>
+                  </a:ext>
+                </a:extLst>
               </a:tr>
               <a:tr h="1160445">
                 <a:tc>
                   <a:txBody>
-                    <a:bodyPr anchor="t" rtlCol="false"/>
+                    <a:bodyPr/>
                     <a:lstStyle/>
                     <a:p>
                       <a:pPr algn="ctr">
@@ -6154,7 +7575,7 @@
                     </a:p>
                   </a:txBody>
                   <a:tcPr marL="190500" marR="190500" marT="190500" marB="190500" anchor="ctr">
-                    <a:lnL cmpd="sng" algn="ctr" cap="flat" w="38100">
+                    <a:lnL w="38100" cap="flat" cmpd="sng" algn="ctr">
                       <a:solidFill>
                         <a:srgbClr val="000000"/>
                       </a:solidFill>
@@ -6163,7 +7584,7 @@
                       <a:headEnd type="none" w="med" len="med"/>
                       <a:tailEnd type="none" w="med" len="med"/>
                     </a:lnL>
-                    <a:lnR cmpd="sng" algn="ctr" cap="flat" w="38100">
+                    <a:lnR w="38100" cap="flat" cmpd="sng" algn="ctr">
                       <a:solidFill>
                         <a:srgbClr val="000000"/>
                       </a:solidFill>
@@ -6172,7 +7593,7 @@
                       <a:headEnd type="none" w="med" len="med"/>
                       <a:tailEnd type="none" w="med" len="med"/>
                     </a:lnR>
-                    <a:lnT cmpd="sng" algn="ctr" cap="flat" w="38100">
+                    <a:lnT w="38100" cap="flat" cmpd="sng" algn="ctr">
                       <a:solidFill>
                         <a:srgbClr val="000000"/>
                       </a:solidFill>
@@ -6181,7 +7602,7 @@
                       <a:headEnd type="none" w="med" len="med"/>
                       <a:tailEnd type="none" w="med" len="med"/>
                     </a:lnT>
-                    <a:lnB cmpd="sng" algn="ctr" cap="flat" w="38100">
+                    <a:lnB w="38100" cap="flat" cmpd="sng" algn="ctr">
                       <a:solidFill>
                         <a:srgbClr val="000000"/>
                       </a:solidFill>
@@ -6194,7 +7615,7 @@
                 </a:tc>
                 <a:tc>
                   <a:txBody>
-                    <a:bodyPr anchor="t" rtlCol="false"/>
+                    <a:bodyPr/>
                     <a:lstStyle/>
                     <a:p>
                       <a:pPr algn="ctr">
@@ -6219,7 +7640,7 @@
                     </a:p>
                   </a:txBody>
                   <a:tcPr marL="190500" marR="190500" marT="190500" marB="190500" anchor="ctr">
-                    <a:lnL cmpd="sng" algn="ctr" cap="flat" w="38100">
+                    <a:lnL w="38100" cap="flat" cmpd="sng" algn="ctr">
                       <a:solidFill>
                         <a:srgbClr val="000000"/>
                       </a:solidFill>
@@ -6228,7 +7649,7 @@
                       <a:headEnd type="none" w="med" len="med"/>
                       <a:tailEnd type="none" w="med" len="med"/>
                     </a:lnL>
-                    <a:lnR cmpd="sng" algn="ctr" cap="flat" w="38100">
+                    <a:lnR w="38100" cap="flat" cmpd="sng" algn="ctr">
                       <a:solidFill>
                         <a:srgbClr val="000000"/>
                       </a:solidFill>
@@ -6237,7 +7658,7 @@
                       <a:headEnd type="none" w="med" len="med"/>
                       <a:tailEnd type="none" w="med" len="med"/>
                     </a:lnR>
-                    <a:lnT cmpd="sng" algn="ctr" cap="flat" w="38100">
+                    <a:lnT w="38100" cap="flat" cmpd="sng" algn="ctr">
                       <a:solidFill>
                         <a:srgbClr val="000000"/>
                       </a:solidFill>
@@ -6246,7 +7667,7 @@
                       <a:headEnd type="none" w="med" len="med"/>
                       <a:tailEnd type="none" w="med" len="med"/>
                     </a:lnT>
-                    <a:lnB cmpd="sng" algn="ctr" cap="flat" w="38100">
+                    <a:lnB w="38100" cap="flat" cmpd="sng" algn="ctr">
                       <a:solidFill>
                         <a:srgbClr val="000000"/>
                       </a:solidFill>
@@ -6259,7 +7680,7 @@
                 </a:tc>
                 <a:tc>
                   <a:txBody>
-                    <a:bodyPr anchor="t" rtlCol="false"/>
+                    <a:bodyPr/>
                     <a:lstStyle/>
                     <a:p>
                       <a:pPr algn="ctr">
@@ -6284,7 +7705,7 @@
                     </a:p>
                   </a:txBody>
                   <a:tcPr marL="190500" marR="190500" marT="190500" marB="190500" anchor="ctr">
-                    <a:lnL cmpd="sng" algn="ctr" cap="flat" w="38100">
+                    <a:lnL w="38100" cap="flat" cmpd="sng" algn="ctr">
                       <a:solidFill>
                         <a:srgbClr val="000000"/>
                       </a:solidFill>
@@ -6293,7 +7714,7 @@
                       <a:headEnd type="none" w="med" len="med"/>
                       <a:tailEnd type="none" w="med" len="med"/>
                     </a:lnL>
-                    <a:lnR cmpd="sng" algn="ctr" cap="flat" w="38100">
+                    <a:lnR w="38100" cap="flat" cmpd="sng" algn="ctr">
                       <a:solidFill>
                         <a:srgbClr val="000000"/>
                       </a:solidFill>
@@ -6302,7 +7723,7 @@
                       <a:headEnd type="none" w="med" len="med"/>
                       <a:tailEnd type="none" w="med" len="med"/>
                     </a:lnR>
-                    <a:lnT cmpd="sng" algn="ctr" cap="flat" w="38100">
+                    <a:lnT w="38100" cap="flat" cmpd="sng" algn="ctr">
                       <a:solidFill>
                         <a:srgbClr val="000000"/>
                       </a:solidFill>
@@ -6311,7 +7732,7 @@
                       <a:headEnd type="none" w="med" len="med"/>
                       <a:tailEnd type="none" w="med" len="med"/>
                     </a:lnT>
-                    <a:lnB cmpd="sng" algn="ctr" cap="flat" w="38100">
+                    <a:lnB w="38100" cap="flat" cmpd="sng" algn="ctr">
                       <a:solidFill>
                         <a:srgbClr val="000000"/>
                       </a:solidFill>
@@ -6324,7 +7745,7 @@
                 </a:tc>
                 <a:tc>
                   <a:txBody>
-                    <a:bodyPr anchor="t" rtlCol="false"/>
+                    <a:bodyPr/>
                     <a:lstStyle/>
                     <a:p>
                       <a:pPr algn="ctr">
@@ -6349,7 +7770,7 @@
                     </a:p>
                   </a:txBody>
                   <a:tcPr marL="190500" marR="190500" marT="190500" marB="190500" anchor="ctr">
-                    <a:lnL cmpd="sng" algn="ctr" cap="flat" w="38100">
+                    <a:lnL w="38100" cap="flat" cmpd="sng" algn="ctr">
                       <a:solidFill>
                         <a:srgbClr val="000000"/>
                       </a:solidFill>
@@ -6358,7 +7779,7 @@
                       <a:headEnd type="none" w="med" len="med"/>
                       <a:tailEnd type="none" w="med" len="med"/>
                     </a:lnL>
-                    <a:lnR cmpd="sng" algn="ctr" cap="flat" w="38100">
+                    <a:lnR w="38100" cap="flat" cmpd="sng" algn="ctr">
                       <a:solidFill>
                         <a:srgbClr val="000000"/>
                       </a:solidFill>
@@ -6367,7 +7788,7 @@
                       <a:headEnd type="none" w="med" len="med"/>
                       <a:tailEnd type="none" w="med" len="med"/>
                     </a:lnR>
-                    <a:lnT cmpd="sng" algn="ctr" cap="flat" w="38100">
+                    <a:lnT w="38100" cap="flat" cmpd="sng" algn="ctr">
                       <a:solidFill>
                         <a:srgbClr val="000000"/>
                       </a:solidFill>
@@ -6376,7 +7797,7 @@
                       <a:headEnd type="none" w="med" len="med"/>
                       <a:tailEnd type="none" w="med" len="med"/>
                     </a:lnT>
-                    <a:lnB cmpd="sng" algn="ctr" cap="flat" w="38100">
+                    <a:lnB w="38100" cap="flat" cmpd="sng" algn="ctr">
                       <a:solidFill>
                         <a:srgbClr val="000000"/>
                       </a:solidFill>
@@ -6389,7 +7810,7 @@
                 </a:tc>
                 <a:tc>
                   <a:txBody>
-                    <a:bodyPr anchor="t" rtlCol="false"/>
+                    <a:bodyPr/>
                     <a:lstStyle/>
                     <a:p>
                       <a:pPr algn="ctr">
@@ -6414,7 +7835,7 @@
                     </a:p>
                   </a:txBody>
                   <a:tcPr marL="190500" marR="190500" marT="190500" marB="190500" anchor="ctr">
-                    <a:lnL cmpd="sng" algn="ctr" cap="flat" w="38100">
+                    <a:lnL w="38100" cap="flat" cmpd="sng" algn="ctr">
                       <a:solidFill>
                         <a:srgbClr val="000000"/>
                       </a:solidFill>
@@ -6423,7 +7844,7 @@
                       <a:headEnd type="none" w="med" len="med"/>
                       <a:tailEnd type="none" w="med" len="med"/>
                     </a:lnL>
-                    <a:lnR cmpd="sng" algn="ctr" cap="flat" w="38100">
+                    <a:lnR w="38100" cap="flat" cmpd="sng" algn="ctr">
                       <a:solidFill>
                         <a:srgbClr val="000000"/>
                       </a:solidFill>
@@ -6432,7 +7853,7 @@
                       <a:headEnd type="none" w="med" len="med"/>
                       <a:tailEnd type="none" w="med" len="med"/>
                     </a:lnR>
-                    <a:lnT cmpd="sng" algn="ctr" cap="flat" w="38100">
+                    <a:lnT w="38100" cap="flat" cmpd="sng" algn="ctr">
                       <a:solidFill>
                         <a:srgbClr val="000000"/>
                       </a:solidFill>
@@ -6441,7 +7862,7 @@
                       <a:headEnd type="none" w="med" len="med"/>
                       <a:tailEnd type="none" w="med" len="med"/>
                     </a:lnT>
-                    <a:lnB cmpd="sng" algn="ctr" cap="flat" w="38100">
+                    <a:lnB w="38100" cap="flat" cmpd="sng" algn="ctr">
                       <a:solidFill>
                         <a:srgbClr val="000000"/>
                       </a:solidFill>
@@ -6454,7 +7875,7 @@
                 </a:tc>
                 <a:tc>
                   <a:txBody>
-                    <a:bodyPr anchor="t" rtlCol="false"/>
+                    <a:bodyPr/>
                     <a:lstStyle/>
                     <a:p>
                       <a:pPr algn="ctr">
@@ -6479,7 +7900,7 @@
                     </a:p>
                   </a:txBody>
                   <a:tcPr marL="190500" marR="190500" marT="190500" marB="190500" anchor="ctr">
-                    <a:lnL cmpd="sng" algn="ctr" cap="flat" w="38100">
+                    <a:lnL w="38100" cap="flat" cmpd="sng" algn="ctr">
                       <a:solidFill>
                         <a:srgbClr val="000000"/>
                       </a:solidFill>
@@ -6488,7 +7909,7 @@
                       <a:headEnd type="none" w="med" len="med"/>
                       <a:tailEnd type="none" w="med" len="med"/>
                     </a:lnL>
-                    <a:lnR cmpd="sng" algn="ctr" cap="flat" w="38100">
+                    <a:lnR w="38100" cap="flat" cmpd="sng" algn="ctr">
                       <a:solidFill>
                         <a:srgbClr val="000000"/>
                       </a:solidFill>
@@ -6497,7 +7918,7 @@
                       <a:headEnd type="none" w="med" len="med"/>
                       <a:tailEnd type="none" w="med" len="med"/>
                     </a:lnR>
-                    <a:lnT cmpd="sng" algn="ctr" cap="flat" w="38100">
+                    <a:lnT w="38100" cap="flat" cmpd="sng" algn="ctr">
                       <a:solidFill>
                         <a:srgbClr val="000000"/>
                       </a:solidFill>
@@ -6506,7 +7927,7 @@
                       <a:headEnd type="none" w="med" len="med"/>
                       <a:tailEnd type="none" w="med" len="med"/>
                     </a:lnT>
-                    <a:lnB cmpd="sng" algn="ctr" cap="flat" w="38100">
+                    <a:lnB w="38100" cap="flat" cmpd="sng" algn="ctr">
                       <a:solidFill>
                         <a:srgbClr val="000000"/>
                       </a:solidFill>
@@ -6519,7 +7940,7 @@
                 </a:tc>
                 <a:tc>
                   <a:txBody>
-                    <a:bodyPr anchor="t" rtlCol="false"/>
+                    <a:bodyPr/>
                     <a:lstStyle/>
                     <a:p>
                       <a:pPr algn="ctr">
@@ -6544,7 +7965,7 @@
                     </a:p>
                   </a:txBody>
                   <a:tcPr marL="190500" marR="190500" marT="190500" marB="190500" anchor="ctr">
-                    <a:lnL cmpd="sng" algn="ctr" cap="flat" w="38100">
+                    <a:lnL w="38100" cap="flat" cmpd="sng" algn="ctr">
                       <a:solidFill>
                         <a:srgbClr val="000000"/>
                       </a:solidFill>
@@ -6553,7 +7974,7 @@
                       <a:headEnd type="none" w="med" len="med"/>
                       <a:tailEnd type="none" w="med" len="med"/>
                     </a:lnL>
-                    <a:lnR cmpd="sng" algn="ctr" cap="flat" w="38100">
+                    <a:lnR w="38100" cap="flat" cmpd="sng" algn="ctr">
                       <a:solidFill>
                         <a:srgbClr val="000000"/>
                       </a:solidFill>
@@ -6562,7 +7983,7 @@
                       <a:headEnd type="none" w="med" len="med"/>
                       <a:tailEnd type="none" w="med" len="med"/>
                     </a:lnR>
-                    <a:lnT cmpd="sng" algn="ctr" cap="flat" w="38100">
+                    <a:lnT w="38100" cap="flat" cmpd="sng" algn="ctr">
                       <a:solidFill>
                         <a:srgbClr val="000000"/>
                       </a:solidFill>
@@ -6571,7 +7992,7 @@
                       <a:headEnd type="none" w="med" len="med"/>
                       <a:tailEnd type="none" w="med" len="med"/>
                     </a:lnT>
-                    <a:lnB cmpd="sng" algn="ctr" cap="flat" w="38100">
+                    <a:lnB w="38100" cap="flat" cmpd="sng" algn="ctr">
                       <a:solidFill>
                         <a:srgbClr val="000000"/>
                       </a:solidFill>
@@ -6582,11 +8003,16 @@
                     </a:lnB>
                   </a:tcPr>
                 </a:tc>
+                <a:extLst>
+                  <a:ext uri="{0D108BD9-81ED-4DB2-BD59-A6C34878D82A}">
+                    <a16:rowId xmlns:a16="http://schemas.microsoft.com/office/drawing/2014/main" val="10002"/>
+                  </a:ext>
+                </a:extLst>
               </a:tr>
               <a:tr h="1160445">
                 <a:tc>
                   <a:txBody>
-                    <a:bodyPr anchor="t" rtlCol="false"/>
+                    <a:bodyPr/>
                     <a:lstStyle/>
                     <a:p>
                       <a:pPr algn="ctr">
@@ -6611,7 +8037,7 @@
                     </a:p>
                   </a:txBody>
                   <a:tcPr marL="190500" marR="190500" marT="190500" marB="190500" anchor="ctr">
-                    <a:lnL cmpd="sng" algn="ctr" cap="flat" w="38100">
+                    <a:lnL w="38100" cap="flat" cmpd="sng" algn="ctr">
                       <a:solidFill>
                         <a:srgbClr val="000000"/>
                       </a:solidFill>
@@ -6620,7 +8046,7 @@
                       <a:headEnd type="none" w="med" len="med"/>
                       <a:tailEnd type="none" w="med" len="med"/>
                     </a:lnL>
-                    <a:lnR cmpd="sng" algn="ctr" cap="flat" w="38100">
+                    <a:lnR w="38100" cap="flat" cmpd="sng" algn="ctr">
                       <a:solidFill>
                         <a:srgbClr val="000000"/>
                       </a:solidFill>
@@ -6629,7 +8055,7 @@
                       <a:headEnd type="none" w="med" len="med"/>
                       <a:tailEnd type="none" w="med" len="med"/>
                     </a:lnR>
-                    <a:lnT cmpd="sng" algn="ctr" cap="flat" w="38100">
+                    <a:lnT w="38100" cap="flat" cmpd="sng" algn="ctr">
                       <a:solidFill>
                         <a:srgbClr val="000000"/>
                       </a:solidFill>
@@ -6638,7 +8064,7 @@
                       <a:headEnd type="none" w="med" len="med"/>
                       <a:tailEnd type="none" w="med" len="med"/>
                     </a:lnT>
-                    <a:lnB cmpd="sng" algn="ctr" cap="flat" w="38100">
+                    <a:lnB w="38100" cap="flat" cmpd="sng" algn="ctr">
                       <a:solidFill>
                         <a:srgbClr val="000000"/>
                       </a:solidFill>
@@ -6651,7 +8077,7 @@
                 </a:tc>
                 <a:tc>
                   <a:txBody>
-                    <a:bodyPr anchor="t" rtlCol="false"/>
+                    <a:bodyPr/>
                     <a:lstStyle/>
                     <a:p>
                       <a:pPr algn="ctr">
@@ -6676,7 +8102,7 @@
                     </a:p>
                   </a:txBody>
                   <a:tcPr marL="190500" marR="190500" marT="190500" marB="190500" anchor="ctr">
-                    <a:lnL cmpd="sng" algn="ctr" cap="flat" w="38100">
+                    <a:lnL w="38100" cap="flat" cmpd="sng" algn="ctr">
                       <a:solidFill>
                         <a:srgbClr val="000000"/>
                       </a:solidFill>
@@ -6685,7 +8111,7 @@
                       <a:headEnd type="none" w="med" len="med"/>
                       <a:tailEnd type="none" w="med" len="med"/>
                     </a:lnL>
-                    <a:lnR cmpd="sng" algn="ctr" cap="flat" w="38100">
+                    <a:lnR w="38100" cap="flat" cmpd="sng" algn="ctr">
                       <a:solidFill>
                         <a:srgbClr val="000000"/>
                       </a:solidFill>
@@ -6694,7 +8120,7 @@
                       <a:headEnd type="none" w="med" len="med"/>
                       <a:tailEnd type="none" w="med" len="med"/>
                     </a:lnR>
-                    <a:lnT cmpd="sng" algn="ctr" cap="flat" w="38100">
+                    <a:lnT w="38100" cap="flat" cmpd="sng" algn="ctr">
                       <a:solidFill>
                         <a:srgbClr val="000000"/>
                       </a:solidFill>
@@ -6703,7 +8129,7 @@
                       <a:headEnd type="none" w="med" len="med"/>
                       <a:tailEnd type="none" w="med" len="med"/>
                     </a:lnT>
-                    <a:lnB cmpd="sng" algn="ctr" cap="flat" w="38100">
+                    <a:lnB w="38100" cap="flat" cmpd="sng" algn="ctr">
                       <a:solidFill>
                         <a:srgbClr val="000000"/>
                       </a:solidFill>
@@ -6716,7 +8142,7 @@
                 </a:tc>
                 <a:tc>
                   <a:txBody>
-                    <a:bodyPr anchor="t" rtlCol="false"/>
+                    <a:bodyPr/>
                     <a:lstStyle/>
                     <a:p>
                       <a:pPr algn="ctr">
@@ -6741,7 +8167,7 @@
                     </a:p>
                   </a:txBody>
                   <a:tcPr marL="190500" marR="190500" marT="190500" marB="190500" anchor="ctr">
-                    <a:lnL cmpd="sng" algn="ctr" cap="flat" w="38100">
+                    <a:lnL w="38100" cap="flat" cmpd="sng" algn="ctr">
                       <a:solidFill>
                         <a:srgbClr val="000000"/>
                       </a:solidFill>
@@ -6750,7 +8176,7 @@
                       <a:headEnd type="none" w="med" len="med"/>
                       <a:tailEnd type="none" w="med" len="med"/>
                     </a:lnL>
-                    <a:lnR cmpd="sng" algn="ctr" cap="flat" w="38100">
+                    <a:lnR w="38100" cap="flat" cmpd="sng" algn="ctr">
                       <a:solidFill>
                         <a:srgbClr val="000000"/>
                       </a:solidFill>
@@ -6759,7 +8185,7 @@
                       <a:headEnd type="none" w="med" len="med"/>
                       <a:tailEnd type="none" w="med" len="med"/>
                     </a:lnR>
-                    <a:lnT cmpd="sng" algn="ctr" cap="flat" w="38100">
+                    <a:lnT w="38100" cap="flat" cmpd="sng" algn="ctr">
                       <a:solidFill>
                         <a:srgbClr val="000000"/>
                       </a:solidFill>
@@ -6768,7 +8194,7 @@
                       <a:headEnd type="none" w="med" len="med"/>
                       <a:tailEnd type="none" w="med" len="med"/>
                     </a:lnT>
-                    <a:lnB cmpd="sng" algn="ctr" cap="flat" w="38100">
+                    <a:lnB w="38100" cap="flat" cmpd="sng" algn="ctr">
                       <a:solidFill>
                         <a:srgbClr val="000000"/>
                       </a:solidFill>
@@ -6781,7 +8207,7 @@
                 </a:tc>
                 <a:tc>
                   <a:txBody>
-                    <a:bodyPr anchor="t" rtlCol="false"/>
+                    <a:bodyPr/>
                     <a:lstStyle/>
                     <a:p>
                       <a:pPr algn="ctr">
@@ -6806,7 +8232,7 @@
                     </a:p>
                   </a:txBody>
                   <a:tcPr marL="190500" marR="190500" marT="190500" marB="190500" anchor="ctr">
-                    <a:lnL cmpd="sng" algn="ctr" cap="flat" w="38100">
+                    <a:lnL w="38100" cap="flat" cmpd="sng" algn="ctr">
                       <a:solidFill>
                         <a:srgbClr val="000000"/>
                       </a:solidFill>
@@ -6815,7 +8241,7 @@
                       <a:headEnd type="none" w="med" len="med"/>
                       <a:tailEnd type="none" w="med" len="med"/>
                     </a:lnL>
-                    <a:lnR cmpd="sng" algn="ctr" cap="flat" w="38100">
+                    <a:lnR w="38100" cap="flat" cmpd="sng" algn="ctr">
                       <a:solidFill>
                         <a:srgbClr val="000000"/>
                       </a:solidFill>
@@ -6824,7 +8250,7 @@
                       <a:headEnd type="none" w="med" len="med"/>
                       <a:tailEnd type="none" w="med" len="med"/>
                     </a:lnR>
-                    <a:lnT cmpd="sng" algn="ctr" cap="flat" w="38100">
+                    <a:lnT w="38100" cap="flat" cmpd="sng" algn="ctr">
                       <a:solidFill>
                         <a:srgbClr val="000000"/>
                       </a:solidFill>
@@ -6833,7 +8259,7 @@
                       <a:headEnd type="none" w="med" len="med"/>
                       <a:tailEnd type="none" w="med" len="med"/>
                     </a:lnT>
-                    <a:lnB cmpd="sng" algn="ctr" cap="flat" w="38100">
+                    <a:lnB w="38100" cap="flat" cmpd="sng" algn="ctr">
                       <a:solidFill>
                         <a:srgbClr val="000000"/>
                       </a:solidFill>
@@ -6846,7 +8272,7 @@
                 </a:tc>
                 <a:tc>
                   <a:txBody>
-                    <a:bodyPr anchor="t" rtlCol="false"/>
+                    <a:bodyPr/>
                     <a:lstStyle/>
                     <a:p>
                       <a:pPr algn="ctr">
@@ -6890,7 +8316,7 @@
                     </a:p>
                   </a:txBody>
                   <a:tcPr marL="190500" marR="190500" marT="190500" marB="190500" anchor="ctr">
-                    <a:lnL cmpd="sng" algn="ctr" cap="flat" w="38100">
+                    <a:lnL w="38100" cap="flat" cmpd="sng" algn="ctr">
                       <a:solidFill>
                         <a:srgbClr val="000000"/>
                       </a:solidFill>
@@ -6899,7 +8325,7 @@
                       <a:headEnd type="none" w="med" len="med"/>
                       <a:tailEnd type="none" w="med" len="med"/>
                     </a:lnL>
-                    <a:lnR cmpd="sng" algn="ctr" cap="flat" w="38100">
+                    <a:lnR w="38100" cap="flat" cmpd="sng" algn="ctr">
                       <a:solidFill>
                         <a:srgbClr val="000000"/>
                       </a:solidFill>
@@ -6908,7 +8334,7 @@
                       <a:headEnd type="none" w="med" len="med"/>
                       <a:tailEnd type="none" w="med" len="med"/>
                     </a:lnR>
-                    <a:lnT cmpd="sng" algn="ctr" cap="flat" w="38100">
+                    <a:lnT w="38100" cap="flat" cmpd="sng" algn="ctr">
                       <a:solidFill>
                         <a:srgbClr val="000000"/>
                       </a:solidFill>
@@ -6917,7 +8343,7 @@
                       <a:headEnd type="none" w="med" len="med"/>
                       <a:tailEnd type="none" w="med" len="med"/>
                     </a:lnT>
-                    <a:lnB cmpd="sng" algn="ctr" cap="flat" w="38100">
+                    <a:lnB w="38100" cap="flat" cmpd="sng" algn="ctr">
                       <a:solidFill>
                         <a:srgbClr val="000000"/>
                       </a:solidFill>
@@ -6930,7 +8356,7 @@
                 </a:tc>
                 <a:tc>
                   <a:txBody>
-                    <a:bodyPr anchor="t" rtlCol="false"/>
+                    <a:bodyPr/>
                     <a:lstStyle/>
                     <a:p>
                       <a:pPr algn="ctr">
@@ -6955,7 +8381,7 @@
                     </a:p>
                   </a:txBody>
                   <a:tcPr marL="190500" marR="190500" marT="190500" marB="190500" anchor="ctr">
-                    <a:lnL cmpd="sng" algn="ctr" cap="flat" w="38100">
+                    <a:lnL w="38100" cap="flat" cmpd="sng" algn="ctr">
                       <a:solidFill>
                         <a:srgbClr val="000000"/>
                       </a:solidFill>
@@ -6964,7 +8390,7 @@
                       <a:headEnd type="none" w="med" len="med"/>
                       <a:tailEnd type="none" w="med" len="med"/>
                     </a:lnL>
-                    <a:lnR cmpd="sng" algn="ctr" cap="flat" w="38100">
+                    <a:lnR w="38100" cap="flat" cmpd="sng" algn="ctr">
                       <a:solidFill>
                         <a:srgbClr val="000000"/>
                       </a:solidFill>
@@ -6973,7 +8399,7 @@
                       <a:headEnd type="none" w="med" len="med"/>
                       <a:tailEnd type="none" w="med" len="med"/>
                     </a:lnR>
-                    <a:lnT cmpd="sng" algn="ctr" cap="flat" w="38100">
+                    <a:lnT w="38100" cap="flat" cmpd="sng" algn="ctr">
                       <a:solidFill>
                         <a:srgbClr val="000000"/>
                       </a:solidFill>
@@ -6982,7 +8408,7 @@
                       <a:headEnd type="none" w="med" len="med"/>
                       <a:tailEnd type="none" w="med" len="med"/>
                     </a:lnT>
-                    <a:lnB cmpd="sng" algn="ctr" cap="flat" w="38100">
+                    <a:lnB w="38100" cap="flat" cmpd="sng" algn="ctr">
                       <a:solidFill>
                         <a:srgbClr val="000000"/>
                       </a:solidFill>
@@ -6995,7 +8421,7 @@
                 </a:tc>
                 <a:tc>
                   <a:txBody>
-                    <a:bodyPr anchor="t" rtlCol="false"/>
+                    <a:bodyPr/>
                     <a:lstStyle/>
                     <a:p>
                       <a:pPr algn="ctr">
@@ -7020,7 +8446,7 @@
                     </a:p>
                   </a:txBody>
                   <a:tcPr marL="190500" marR="190500" marT="190500" marB="190500" anchor="ctr">
-                    <a:lnL cmpd="sng" algn="ctr" cap="flat" w="38100">
+                    <a:lnL w="38100" cap="flat" cmpd="sng" algn="ctr">
                       <a:solidFill>
                         <a:srgbClr val="000000"/>
                       </a:solidFill>
@@ -7029,7 +8455,7 @@
                       <a:headEnd type="none" w="med" len="med"/>
                       <a:tailEnd type="none" w="med" len="med"/>
                     </a:lnL>
-                    <a:lnR cmpd="sng" algn="ctr" cap="flat" w="38100">
+                    <a:lnR w="38100" cap="flat" cmpd="sng" algn="ctr">
                       <a:solidFill>
                         <a:srgbClr val="000000"/>
                       </a:solidFill>
@@ -7038,7 +8464,7 @@
                       <a:headEnd type="none" w="med" len="med"/>
                       <a:tailEnd type="none" w="med" len="med"/>
                     </a:lnR>
-                    <a:lnT cmpd="sng" algn="ctr" cap="flat" w="38100">
+                    <a:lnT w="38100" cap="flat" cmpd="sng" algn="ctr">
                       <a:solidFill>
                         <a:srgbClr val="000000"/>
                       </a:solidFill>
@@ -7047,7 +8473,7 @@
                       <a:headEnd type="none" w="med" len="med"/>
                       <a:tailEnd type="none" w="med" len="med"/>
                     </a:lnT>
-                    <a:lnB cmpd="sng" algn="ctr" cap="flat" w="38100">
+                    <a:lnB w="38100" cap="flat" cmpd="sng" algn="ctr">
                       <a:solidFill>
                         <a:srgbClr val="000000"/>
                       </a:solidFill>
@@ -7058,6 +8484,11 @@
                     </a:lnB>
                   </a:tcPr>
                 </a:tc>
+                <a:extLst>
+                  <a:ext uri="{0D108BD9-81ED-4DB2-BD59-A6C34878D82A}">
+                    <a16:rowId xmlns:a16="http://schemas.microsoft.com/office/drawing/2014/main" val="10003"/>
+                  </a:ext>
+                </a:extLst>
               </a:tr>
             </a:tbl>
           </a:graphicData>
@@ -7065,12 +8496,12 @@
       </p:graphicFrame>
       <p:sp>
         <p:nvSpPr>
-          <p:cNvPr name="TextBox 7" id="7"/>
-          <p:cNvSpPr txBox="true"/>
+          <p:cNvPr id="7" name="TextBox 7"/>
+          <p:cNvSpPr txBox="1"/>
           <p:nvPr/>
         </p:nvSpPr>
         <p:spPr>
-          <a:xfrm rot="0">
+          <a:xfrm>
             <a:off x="5984137" y="354172"/>
             <a:ext cx="6319726" cy="1172179"/>
           </a:xfrm>
@@ -7079,12 +8510,12 @@
           </a:prstGeom>
         </p:spPr>
         <p:txBody>
-          <a:bodyPr anchor="t" rtlCol="false" tIns="0" lIns="0" bIns="0" rIns="0">
+          <a:bodyPr lIns="0" tIns="0" rIns="0" bIns="0" rtlCol="0" anchor="t">
             <a:spAutoFit/>
           </a:bodyPr>
           <a:lstStyle/>
           <a:p>
-            <a:pPr algn="ctr" marL="0" indent="0" lvl="0">
+            <a:pPr marL="0" lvl="0" indent="0" algn="ctr">
               <a:lnSpc>
                 <a:spcPts val="7717"/>
               </a:lnSpc>
@@ -7106,12 +8537,12 @@
       </p:sp>
       <p:sp>
         <p:nvSpPr>
-          <p:cNvPr name="TextBox 8" id="8"/>
-          <p:cNvSpPr txBox="true"/>
+          <p:cNvPr id="8" name="TextBox 8"/>
+          <p:cNvSpPr txBox="1"/>
           <p:nvPr/>
         </p:nvSpPr>
         <p:spPr>
-          <a:xfrm rot="0">
+          <a:xfrm>
             <a:off x="1981391" y="1640514"/>
             <a:ext cx="6034818" cy="848586"/>
           </a:xfrm>
@@ -7120,7 +8551,7 @@
           </a:prstGeom>
         </p:spPr>
         <p:txBody>
-          <a:bodyPr anchor="t" rtlCol="false" tIns="0" lIns="0" bIns="0" rIns="0">
+          <a:bodyPr lIns="0" tIns="0" rIns="0" bIns="0" rtlCol="0" anchor="t">
             <a:spAutoFit/>
           </a:bodyPr>
           <a:lstStyle/>
@@ -7131,7 +8562,7 @@
               </a:lnSpc>
             </a:pPr>
             <a:r>
-              <a:rPr lang="en-US" sz="4972" b="true">
+              <a:rPr lang="en-US" sz="4972" b="1">
                 <a:solidFill>
                   <a:srgbClr val="272530"/>
                 </a:solidFill>
@@ -7153,14 +8584,15 @@
 </p:sld>
 </file>
 
-<file path=ppt/slides/slide5.xml><?xml version="1.0" encoding="utf-8"?>
-<p:sld xmlns:p="http://schemas.openxmlformats.org/presentationml/2006/main" xmlns:a="http://schemas.openxmlformats.org/drawingml/2006/main" xmlns:r="http://schemas.openxmlformats.org/officeDocument/2006/relationships">
+<file path=ppt/slides/slide7.xml><?xml version="1.0" encoding="utf-8"?>
+<p:sld xmlns:a="http://schemas.openxmlformats.org/drawingml/2006/main" xmlns:r="http://schemas.openxmlformats.org/officeDocument/2006/relationships" xmlns:p="http://schemas.openxmlformats.org/presentationml/2006/main">
   <p:cSld>
     <p:bg>
       <p:bgPr>
         <a:solidFill>
           <a:srgbClr val="FFFBF5"/>
         </a:solidFill>
+        <a:effectLst/>
       </p:bgPr>
     </p:bg>
     <p:spTree>
@@ -7179,12 +8611,12 @@
       </p:grpSpPr>
       <p:sp>
         <p:nvSpPr>
-          <p:cNvPr name="Freeform 2" id="2"/>
+          <p:cNvPr id="2" name="Freeform 2"/>
           <p:cNvSpPr/>
           <p:nvPr/>
         </p:nvSpPr>
         <p:spPr>
-          <a:xfrm flipH="false" flipV="false" rot="0">
+          <a:xfrm>
             <a:off x="0" y="5414629"/>
             <a:ext cx="4261110" cy="4872371"/>
           </a:xfrm>
@@ -7193,9 +8625,9 @@
             <a:gdLst/>
             <a:ahLst/>
             <a:cxnLst/>
-            <a:rect r="r" b="b" t="t" l="l"/>
+            <a:rect l="l" t="t" r="r" b="b"/>
             <a:pathLst>
-              <a:path h="4872371" w="4261110">
+              <a:path w="4261110" h="4872371">
                 <a:moveTo>
                   <a:pt x="0" y="0"/>
                 </a:moveTo>
@@ -7216,27 +8648,27 @@
             </a:pathLst>
           </a:custGeom>
           <a:blipFill>
-            <a:blip r:embed="rId2">
+            <a:blip>
               <a:extLst>
                 <a:ext uri="{96DAC541-7B7A-43D3-8B79-37D633B846F1}">
-                  <asvg:svgBlip xmlns:asvg="http://schemas.microsoft.com/office/drawing/2016/SVG/main" r:embed="rId3"/>
+                  <asvg:svgBlip xmlns:asvg="http://schemas.microsoft.com/office/drawing/2016/SVG/main" r:embed="rId2"/>
                 </a:ext>
               </a:extLst>
             </a:blip>
             <a:stretch>
-              <a:fillRect l="0" t="0" r="0" b="0"/>
+              <a:fillRect/>
             </a:stretch>
           </a:blipFill>
         </p:spPr>
       </p:sp>
       <p:sp>
         <p:nvSpPr>
-          <p:cNvPr name="Freeform 3" id="3"/>
+          <p:cNvPr id="3" name="Freeform 3"/>
           <p:cNvSpPr/>
           <p:nvPr/>
         </p:nvSpPr>
         <p:spPr>
-          <a:xfrm flipH="true" flipV="true" rot="0">
+          <a:xfrm flipH="1" flipV="1">
             <a:off x="13934338" y="-32160"/>
             <a:ext cx="4353662" cy="4978199"/>
           </a:xfrm>
@@ -7245,9 +8677,9 @@
             <a:gdLst/>
             <a:ahLst/>
             <a:cxnLst/>
-            <a:rect r="r" b="b" t="t" l="l"/>
+            <a:rect l="l" t="t" r="r" b="b"/>
             <a:pathLst>
-              <a:path h="4978199" w="4353662">
+              <a:path w="4353662" h="4978199">
                 <a:moveTo>
                   <a:pt x="4353662" y="4978199"/>
                 </a:moveTo>
@@ -7268,27 +8700,27 @@
             </a:pathLst>
           </a:custGeom>
           <a:blipFill>
-            <a:blip r:embed="rId2">
+            <a:blip>
               <a:extLst>
                 <a:ext uri="{96DAC541-7B7A-43D3-8B79-37D633B846F1}">
-                  <asvg:svgBlip xmlns:asvg="http://schemas.microsoft.com/office/drawing/2016/SVG/main" r:embed="rId3"/>
+                  <asvg:svgBlip xmlns:asvg="http://schemas.microsoft.com/office/drawing/2016/SVG/main" r:embed="rId2"/>
                 </a:ext>
               </a:extLst>
             </a:blip>
             <a:stretch>
-              <a:fillRect l="0" t="0" r="0" b="0"/>
+              <a:fillRect/>
             </a:stretch>
           </a:blipFill>
         </p:spPr>
       </p:sp>
       <p:sp>
         <p:nvSpPr>
-          <p:cNvPr name="Freeform 4" id="4"/>
+          <p:cNvPr id="4" name="Freeform 4"/>
           <p:cNvSpPr/>
           <p:nvPr/>
         </p:nvSpPr>
         <p:spPr>
-          <a:xfrm flipH="true" flipV="false" rot="0">
+          <a:xfrm flipH="1">
             <a:off x="13934338" y="5361715"/>
             <a:ext cx="4353662" cy="4978199"/>
           </a:xfrm>
@@ -7297,9 +8729,9 @@
             <a:gdLst/>
             <a:ahLst/>
             <a:cxnLst/>
-            <a:rect r="r" b="b" t="t" l="l"/>
+            <a:rect l="l" t="t" r="r" b="b"/>
             <a:pathLst>
-              <a:path h="4978199" w="4353662">
+              <a:path w="4353662" h="4978199">
                 <a:moveTo>
                   <a:pt x="4353662" y="0"/>
                 </a:moveTo>
@@ -7320,27 +8752,27 @@
             </a:pathLst>
           </a:custGeom>
           <a:blipFill>
-            <a:blip r:embed="rId2">
+            <a:blip>
               <a:extLst>
                 <a:ext uri="{96DAC541-7B7A-43D3-8B79-37D633B846F1}">
-                  <asvg:svgBlip xmlns:asvg="http://schemas.microsoft.com/office/drawing/2016/SVG/main" r:embed="rId3"/>
+                  <asvg:svgBlip xmlns:asvg="http://schemas.microsoft.com/office/drawing/2016/SVG/main" r:embed="rId2"/>
                 </a:ext>
               </a:extLst>
             </a:blip>
             <a:stretch>
-              <a:fillRect l="0" t="0" r="0" b="0"/>
+              <a:fillRect/>
             </a:stretch>
           </a:blipFill>
         </p:spPr>
       </p:sp>
       <p:sp>
         <p:nvSpPr>
-          <p:cNvPr name="Freeform 5" id="5"/>
+          <p:cNvPr id="5" name="Freeform 5"/>
           <p:cNvSpPr/>
           <p:nvPr/>
         </p:nvSpPr>
         <p:spPr>
-          <a:xfrm flipH="false" flipV="true" rot="0">
+          <a:xfrm flipV="1">
             <a:off x="0" y="0"/>
             <a:ext cx="4353662" cy="4978199"/>
           </a:xfrm>
@@ -7349,9 +8781,9 @@
             <a:gdLst/>
             <a:ahLst/>
             <a:cxnLst/>
-            <a:rect r="r" b="b" t="t" l="l"/>
+            <a:rect l="l" t="t" r="r" b="b"/>
             <a:pathLst>
-              <a:path h="4978199" w="4353662">
+              <a:path w="4353662" h="4978199">
                 <a:moveTo>
                   <a:pt x="0" y="4978199"/>
                 </a:moveTo>
@@ -7372,27 +8804,27 @@
             </a:pathLst>
           </a:custGeom>
           <a:blipFill>
-            <a:blip r:embed="rId2">
+            <a:blip>
               <a:extLst>
                 <a:ext uri="{96DAC541-7B7A-43D3-8B79-37D633B846F1}">
-                  <asvg:svgBlip xmlns:asvg="http://schemas.microsoft.com/office/drawing/2016/SVG/main" r:embed="rId3"/>
+                  <asvg:svgBlip xmlns:asvg="http://schemas.microsoft.com/office/drawing/2016/SVG/main" r:embed="rId2"/>
                 </a:ext>
               </a:extLst>
             </a:blip>
             <a:stretch>
-              <a:fillRect l="0" t="0" r="0" b="0"/>
+              <a:fillRect/>
             </a:stretch>
           </a:blipFill>
         </p:spPr>
       </p:sp>
       <p:grpSp>
         <p:nvGrpSpPr>
-          <p:cNvPr name="Group 6" id="6"/>
+          <p:cNvPr id="6" name="Group 6"/>
           <p:cNvGrpSpPr/>
           <p:nvPr/>
         </p:nvGrpSpPr>
         <p:grpSpPr>
-          <a:xfrm rot="0">
+          <a:xfrm>
             <a:off x="1324975" y="3032134"/>
             <a:ext cx="4659162" cy="4659162"/>
             <a:chOff x="0" y="0"/>
@@ -7401,12 +8833,12 @@
         </p:grpSpPr>
         <p:sp>
           <p:nvSpPr>
-            <p:cNvPr name="Freeform 7" id="7"/>
+            <p:cNvPr id="7" name="Freeform 7"/>
             <p:cNvSpPr/>
             <p:nvPr/>
           </p:nvSpPr>
           <p:spPr>
-            <a:xfrm flipH="false" flipV="false" rot="0">
+            <a:xfrm>
               <a:off x="0" y="0"/>
               <a:ext cx="812800" cy="812800"/>
             </a:xfrm>
@@ -7415,9 +8847,9 @@
               <a:gdLst/>
               <a:ahLst/>
               <a:cxnLst/>
-              <a:rect r="r" b="b" t="t" l="l"/>
+              <a:rect l="l" t="t" r="r" b="b"/>
               <a:pathLst>
-                <a:path h="812800" w="812800">
+                <a:path w="812800" h="812800">
                   <a:moveTo>
                     <a:pt x="38218" y="0"/>
                   </a:moveTo>
@@ -7458,9 +8890,9 @@
               </a:pathLst>
             </a:custGeom>
             <a:blipFill>
-              <a:blip r:embed="rId4"/>
+              <a:blip r:embed="rId3"/>
               <a:stretch>
-                <a:fillRect l="0" t="0" r="0" b="0"/>
+                <a:fillRect/>
               </a:stretch>
             </a:blipFill>
           </p:spPr>
@@ -7468,12 +8900,12 @@
       </p:grpSp>
       <p:grpSp>
         <p:nvGrpSpPr>
-          <p:cNvPr name="Group 8" id="8"/>
+          <p:cNvPr id="8" name="Group 8"/>
           <p:cNvGrpSpPr/>
           <p:nvPr/>
         </p:nvGrpSpPr>
         <p:grpSpPr>
-          <a:xfrm rot="0">
+          <a:xfrm>
             <a:off x="6768143" y="3032134"/>
             <a:ext cx="4659162" cy="4659162"/>
             <a:chOff x="0" y="0"/>
@@ -7482,12 +8914,12 @@
         </p:grpSpPr>
         <p:sp>
           <p:nvSpPr>
-            <p:cNvPr name="Freeform 9" id="9"/>
+            <p:cNvPr id="9" name="Freeform 9"/>
             <p:cNvSpPr/>
             <p:nvPr/>
           </p:nvSpPr>
           <p:spPr>
-            <a:xfrm flipH="false" flipV="false" rot="0">
+            <a:xfrm>
               <a:off x="0" y="0"/>
               <a:ext cx="812800" cy="812800"/>
             </a:xfrm>
@@ -7496,9 +8928,9 @@
               <a:gdLst/>
               <a:ahLst/>
               <a:cxnLst/>
-              <a:rect r="r" b="b" t="t" l="l"/>
+              <a:rect l="l" t="t" r="r" b="b"/>
               <a:pathLst>
-                <a:path h="812800" w="812800">
+                <a:path w="812800" h="812800">
                   <a:moveTo>
                     <a:pt x="38218" y="0"/>
                   </a:moveTo>
@@ -7539,9 +8971,9 @@
               </a:pathLst>
             </a:custGeom>
             <a:blipFill>
-              <a:blip r:embed="rId4"/>
+              <a:blip r:embed="rId3"/>
               <a:stretch>
-                <a:fillRect l="0" t="0" r="0" b="0"/>
+                <a:fillRect/>
               </a:stretch>
             </a:blipFill>
           </p:spPr>
@@ -7549,12 +8981,12 @@
       </p:grpSp>
       <p:grpSp>
         <p:nvGrpSpPr>
-          <p:cNvPr name="Group 10" id="10"/>
+          <p:cNvPr id="10" name="Group 10"/>
           <p:cNvGrpSpPr/>
           <p:nvPr/>
         </p:nvGrpSpPr>
         <p:grpSpPr>
-          <a:xfrm rot="0">
+          <a:xfrm>
             <a:off x="12303863" y="3032134"/>
             <a:ext cx="4659162" cy="4659162"/>
             <a:chOff x="0" y="0"/>
@@ -7563,12 +8995,12 @@
         </p:grpSpPr>
         <p:sp>
           <p:nvSpPr>
-            <p:cNvPr name="Freeform 11" id="11"/>
+            <p:cNvPr id="11" name="Freeform 11"/>
             <p:cNvSpPr/>
             <p:nvPr/>
           </p:nvSpPr>
           <p:spPr>
-            <a:xfrm flipH="false" flipV="false" rot="0">
+            <a:xfrm>
               <a:off x="0" y="0"/>
               <a:ext cx="812800" cy="812800"/>
             </a:xfrm>
@@ -7577,9 +9009,9 @@
               <a:gdLst/>
               <a:ahLst/>
               <a:cxnLst/>
-              <a:rect r="r" b="b" t="t" l="l"/>
+              <a:rect l="l" t="t" r="r" b="b"/>
               <a:pathLst>
-                <a:path h="812800" w="812800">
+                <a:path w="812800" h="812800">
                   <a:moveTo>
                     <a:pt x="38218" y="0"/>
                   </a:moveTo>
@@ -7620,9 +9052,9 @@
               </a:pathLst>
             </a:custGeom>
             <a:blipFill>
-              <a:blip r:embed="rId4"/>
+              <a:blip r:embed="rId3"/>
               <a:stretch>
-                <a:fillRect l="0" t="0" r="0" b="0"/>
+                <a:fillRect/>
               </a:stretch>
             </a:blipFill>
           </p:spPr>
@@ -7630,12 +9062,12 @@
       </p:grpSp>
       <p:sp>
         <p:nvSpPr>
-          <p:cNvPr name="TextBox 12" id="12"/>
-          <p:cNvSpPr txBox="true"/>
+          <p:cNvPr id="12" name="TextBox 12"/>
+          <p:cNvSpPr txBox="1"/>
           <p:nvPr/>
         </p:nvSpPr>
         <p:spPr>
-          <a:xfrm rot="0">
+          <a:xfrm>
             <a:off x="5984137" y="354172"/>
             <a:ext cx="6319726" cy="1172179"/>
           </a:xfrm>
@@ -7644,12 +9076,12 @@
           </a:prstGeom>
         </p:spPr>
         <p:txBody>
-          <a:bodyPr anchor="t" rtlCol="false" tIns="0" lIns="0" bIns="0" rIns="0">
+          <a:bodyPr lIns="0" tIns="0" rIns="0" bIns="0" rtlCol="0" anchor="t">
             <a:spAutoFit/>
           </a:bodyPr>
           <a:lstStyle/>
           <a:p>
-            <a:pPr algn="ctr" marL="0" indent="0" lvl="0">
+            <a:pPr marL="0" lvl="0" indent="0" algn="ctr">
               <a:lnSpc>
                 <a:spcPts val="7717"/>
               </a:lnSpc>
@@ -7671,12 +9103,12 @@
       </p:sp>
       <p:sp>
         <p:nvSpPr>
-          <p:cNvPr name="TextBox 13" id="13"/>
-          <p:cNvSpPr txBox="true"/>
+          <p:cNvPr id="13" name="TextBox 13"/>
+          <p:cNvSpPr txBox="1"/>
           <p:nvPr/>
         </p:nvSpPr>
         <p:spPr>
-          <a:xfrm rot="0">
+          <a:xfrm>
             <a:off x="1981391" y="1640514"/>
             <a:ext cx="8753374" cy="848586"/>
           </a:xfrm>
@@ -7685,7 +9117,7 @@
           </a:prstGeom>
         </p:spPr>
         <p:txBody>
-          <a:bodyPr anchor="t" rtlCol="false" tIns="0" lIns="0" bIns="0" rIns="0">
+          <a:bodyPr lIns="0" tIns="0" rIns="0" bIns="0" rtlCol="0" anchor="t">
             <a:spAutoFit/>
           </a:bodyPr>
           <a:lstStyle/>
@@ -7696,7 +9128,7 @@
               </a:lnSpc>
             </a:pPr>
             <a:r>
-              <a:rPr lang="en-US" sz="4972" b="true">
+              <a:rPr lang="en-US" sz="4972" b="1">
                 <a:solidFill>
                   <a:srgbClr val="272530"/>
                 </a:solidFill>
@@ -7712,12 +9144,12 @@
       </p:sp>
       <p:sp>
         <p:nvSpPr>
-          <p:cNvPr name="TextBox 14" id="14"/>
-          <p:cNvSpPr txBox="true"/>
+          <p:cNvPr id="14" name="TextBox 14"/>
+          <p:cNvSpPr txBox="1"/>
           <p:nvPr/>
         </p:nvSpPr>
         <p:spPr>
-          <a:xfrm rot="0">
+          <a:xfrm>
             <a:off x="1731561" y="3260427"/>
             <a:ext cx="1598057" cy="887095"/>
           </a:xfrm>
@@ -7726,7 +9158,7 @@
           </a:prstGeom>
         </p:spPr>
         <p:txBody>
-          <a:bodyPr anchor="t" rtlCol="false" tIns="0" lIns="0" bIns="0" rIns="0">
+          <a:bodyPr lIns="0" tIns="0" rIns="0" bIns="0" rtlCol="0" anchor="t">
             <a:spAutoFit/>
           </a:bodyPr>
           <a:lstStyle/>
@@ -7737,7 +9169,7 @@
               </a:lnSpc>
             </a:pPr>
             <a:r>
-              <a:rPr lang="en-US" sz="5199" b="true">
+              <a:rPr lang="en-US" sz="5199" b="1">
                 <a:solidFill>
                   <a:srgbClr val="FFBF00"/>
                 </a:solidFill>
@@ -7753,12 +9185,12 @@
       </p:sp>
       <p:sp>
         <p:nvSpPr>
-          <p:cNvPr name="TextBox 15" id="15"/>
-          <p:cNvSpPr txBox="true"/>
+          <p:cNvPr id="15" name="TextBox 15"/>
+          <p:cNvSpPr txBox="1"/>
           <p:nvPr/>
         </p:nvSpPr>
         <p:spPr>
-          <a:xfrm rot="0">
+          <a:xfrm>
             <a:off x="12839282" y="3260427"/>
             <a:ext cx="1794161" cy="887095"/>
           </a:xfrm>
@@ -7767,7 +9199,7 @@
           </a:prstGeom>
         </p:spPr>
         <p:txBody>
-          <a:bodyPr anchor="t" rtlCol="false" tIns="0" lIns="0" bIns="0" rIns="0">
+          <a:bodyPr lIns="0" tIns="0" rIns="0" bIns="0" rtlCol="0" anchor="t">
             <a:spAutoFit/>
           </a:bodyPr>
           <a:lstStyle/>
@@ -7778,7 +9210,7 @@
               </a:lnSpc>
             </a:pPr>
             <a:r>
-              <a:rPr lang="en-US" sz="5199" b="true">
+              <a:rPr lang="en-US" sz="5199" b="1">
                 <a:solidFill>
                   <a:srgbClr val="FFBF00"/>
                 </a:solidFill>
@@ -7794,12 +9226,12 @@
       </p:sp>
       <p:sp>
         <p:nvSpPr>
-          <p:cNvPr name="TextBox 16" id="16"/>
-          <p:cNvSpPr txBox="true"/>
+          <p:cNvPr id="16" name="TextBox 16"/>
+          <p:cNvSpPr txBox="1"/>
           <p:nvPr/>
         </p:nvSpPr>
         <p:spPr>
-          <a:xfrm rot="0">
+          <a:xfrm>
             <a:off x="7206595" y="3260427"/>
             <a:ext cx="1657112" cy="887095"/>
           </a:xfrm>
@@ -7808,7 +9240,7 @@
           </a:prstGeom>
         </p:spPr>
         <p:txBody>
-          <a:bodyPr anchor="t" rtlCol="false" tIns="0" lIns="0" bIns="0" rIns="0">
+          <a:bodyPr lIns="0" tIns="0" rIns="0" bIns="0" rtlCol="0" anchor="t">
             <a:spAutoFit/>
           </a:bodyPr>
           <a:lstStyle/>
@@ -7819,7 +9251,7 @@
               </a:lnSpc>
             </a:pPr>
             <a:r>
-              <a:rPr lang="en-US" sz="5199" b="true">
+              <a:rPr lang="en-US" sz="5199" b="1">
                 <a:solidFill>
                   <a:srgbClr val="FFBF00"/>
                 </a:solidFill>
@@ -7835,12 +9267,12 @@
       </p:sp>
       <p:sp>
         <p:nvSpPr>
-          <p:cNvPr name="TextBox 17" id="17"/>
-          <p:cNvSpPr txBox="true"/>
+          <p:cNvPr id="17" name="TextBox 17"/>
+          <p:cNvSpPr txBox="1"/>
           <p:nvPr/>
         </p:nvSpPr>
         <p:spPr>
-          <a:xfrm rot="0">
+          <a:xfrm>
             <a:off x="1408576" y="4080847"/>
             <a:ext cx="4575561" cy="629919"/>
           </a:xfrm>
@@ -7849,12 +9281,12 @@
           </a:prstGeom>
         </p:spPr>
         <p:txBody>
-          <a:bodyPr anchor="t" rtlCol="false" tIns="0" lIns="0" bIns="0" rIns="0">
+          <a:bodyPr lIns="0" tIns="0" rIns="0" bIns="0" rtlCol="0" anchor="t">
             <a:spAutoFit/>
           </a:bodyPr>
           <a:lstStyle/>
           <a:p>
-            <a:pPr algn="ctr" marL="0" indent="0" lvl="0">
+            <a:pPr marL="0" lvl="0" indent="0" algn="ctr">
               <a:lnSpc>
                 <a:spcPts val="5180"/>
               </a:lnSpc>
@@ -7863,7 +9295,7 @@
               </a:spcBef>
             </a:pPr>
             <a:r>
-              <a:rPr lang="en-US" b="true" sz="3700" strike="noStrike" u="none">
+              <a:rPr lang="en-US" sz="3700" b="1" u="none" strike="noStrike">
                 <a:solidFill>
                   <a:srgbClr val="FFBF00"/>
                 </a:solidFill>
@@ -7879,12 +9311,12 @@
       </p:sp>
       <p:sp>
         <p:nvSpPr>
-          <p:cNvPr name="TextBox 18" id="18"/>
-          <p:cNvSpPr txBox="true"/>
+          <p:cNvPr id="18" name="TextBox 18"/>
+          <p:cNvSpPr txBox="1"/>
           <p:nvPr/>
         </p:nvSpPr>
         <p:spPr>
-          <a:xfrm rot="0">
+          <a:xfrm>
             <a:off x="1477725" y="5004745"/>
             <a:ext cx="4353662" cy="2846070"/>
           </a:xfrm>
@@ -7893,7 +9325,7 @@
           </a:prstGeom>
         </p:spPr>
         <p:txBody>
-          <a:bodyPr anchor="t" rtlCol="false" tIns="0" lIns="0" bIns="0" rIns="0">
+          <a:bodyPr lIns="0" tIns="0" rIns="0" bIns="0" rtlCol="0" anchor="t">
             <a:spAutoFit/>
           </a:bodyPr>
           <a:lstStyle/>
@@ -7922,17 +9354,26 @@
                 <a:spcPts val="3780"/>
               </a:lnSpc>
             </a:pPr>
+            <a:endParaRPr lang="en-US" sz="2700">
+              <a:solidFill>
+                <a:srgbClr val="FFFFFF"/>
+              </a:solidFill>
+              <a:latin typeface="Canva Sans"/>
+              <a:ea typeface="Canva Sans"/>
+              <a:cs typeface="Canva Sans"/>
+              <a:sym typeface="Canva Sans"/>
+            </a:endParaRPr>
           </a:p>
         </p:txBody>
       </p:sp>
       <p:sp>
         <p:nvSpPr>
-          <p:cNvPr name="TextBox 19" id="19"/>
-          <p:cNvSpPr txBox="true"/>
+          <p:cNvPr id="19" name="TextBox 19"/>
+          <p:cNvSpPr txBox="1"/>
           <p:nvPr/>
         </p:nvSpPr>
         <p:spPr>
-          <a:xfrm rot="0">
+          <a:xfrm>
             <a:off x="7003245" y="4898414"/>
             <a:ext cx="4317586" cy="2861393"/>
           </a:xfrm>
@@ -7941,12 +9382,12 @@
           </a:prstGeom>
         </p:spPr>
         <p:txBody>
-          <a:bodyPr anchor="t" rtlCol="false" tIns="0" lIns="0" bIns="0" rIns="0">
+          <a:bodyPr lIns="0" tIns="0" rIns="0" bIns="0" rtlCol="0" anchor="t">
             <a:spAutoFit/>
           </a:bodyPr>
           <a:lstStyle/>
           <a:p>
-            <a:pPr algn="ctr" marL="0" indent="0" lvl="0">
+            <a:pPr marL="0" lvl="0" indent="0" algn="ctr">
               <a:lnSpc>
                 <a:spcPts val="3257"/>
               </a:lnSpc>
@@ -7955,7 +9396,7 @@
               </a:spcBef>
             </a:pPr>
             <a:r>
-              <a:rPr lang="en-US" sz="2326" strike="noStrike" u="none">
+              <a:rPr lang="en-US" sz="2326" u="none" strike="noStrike">
                 <a:solidFill>
                   <a:srgbClr val="FFFFFF"/>
                 </a:solidFill>
@@ -7968,7 +9409,7 @@
             </a:r>
           </a:p>
           <a:p>
-            <a:pPr algn="ctr" marL="0" indent="0" lvl="0">
+            <a:pPr marL="0" lvl="0" indent="0" algn="ctr">
               <a:lnSpc>
                 <a:spcPts val="3257"/>
               </a:lnSpc>
@@ -7976,17 +9417,26 @@
                 <a:spcPct val="0"/>
               </a:spcBef>
             </a:pPr>
+            <a:endParaRPr lang="en-US" sz="2326" u="none" strike="noStrike">
+              <a:solidFill>
+                <a:srgbClr val="FFFFFF"/>
+              </a:solidFill>
+              <a:latin typeface="Canva Sans"/>
+              <a:ea typeface="Canva Sans"/>
+              <a:cs typeface="Canva Sans"/>
+              <a:sym typeface="Canva Sans"/>
+            </a:endParaRPr>
           </a:p>
         </p:txBody>
       </p:sp>
       <p:sp>
         <p:nvSpPr>
-          <p:cNvPr name="TextBox 20" id="20"/>
-          <p:cNvSpPr txBox="true"/>
+          <p:cNvPr id="20" name="TextBox 20"/>
+          <p:cNvSpPr txBox="1"/>
           <p:nvPr/>
         </p:nvSpPr>
         <p:spPr>
-          <a:xfrm rot="0">
+          <a:xfrm>
             <a:off x="6809944" y="4080847"/>
             <a:ext cx="4575561" cy="629919"/>
           </a:xfrm>
@@ -7995,12 +9445,12 @@
           </a:prstGeom>
         </p:spPr>
         <p:txBody>
-          <a:bodyPr anchor="t" rtlCol="false" tIns="0" lIns="0" bIns="0" rIns="0">
+          <a:bodyPr lIns="0" tIns="0" rIns="0" bIns="0" rtlCol="0" anchor="t">
             <a:spAutoFit/>
           </a:bodyPr>
           <a:lstStyle/>
           <a:p>
-            <a:pPr algn="ctr" marL="0" indent="0" lvl="0">
+            <a:pPr marL="0" lvl="0" indent="0" algn="ctr">
               <a:lnSpc>
                 <a:spcPts val="5180"/>
               </a:lnSpc>
@@ -8009,7 +9459,7 @@
               </a:spcBef>
             </a:pPr>
             <a:r>
-              <a:rPr lang="en-US" b="true" sz="3700">
+              <a:rPr lang="en-US" sz="3700" b="1">
                 <a:solidFill>
                   <a:srgbClr val="FFBF00"/>
                 </a:solidFill>
@@ -8025,12 +9475,12 @@
       </p:sp>
       <p:sp>
         <p:nvSpPr>
-          <p:cNvPr name="TextBox 21" id="21"/>
-          <p:cNvSpPr txBox="true"/>
+          <p:cNvPr id="21" name="TextBox 21"/>
+          <p:cNvSpPr txBox="1"/>
           <p:nvPr/>
         </p:nvSpPr>
         <p:spPr>
-          <a:xfrm rot="0">
+          <a:xfrm>
             <a:off x="12303863" y="4080847"/>
             <a:ext cx="4575561" cy="629919"/>
           </a:xfrm>
@@ -8039,12 +9489,12 @@
           </a:prstGeom>
         </p:spPr>
         <p:txBody>
-          <a:bodyPr anchor="t" rtlCol="false" tIns="0" lIns="0" bIns="0" rIns="0">
+          <a:bodyPr lIns="0" tIns="0" rIns="0" bIns="0" rtlCol="0" anchor="t">
             <a:spAutoFit/>
           </a:bodyPr>
           <a:lstStyle/>
           <a:p>
-            <a:pPr algn="ctr" marL="0" indent="0" lvl="0">
+            <a:pPr marL="0" lvl="0" indent="0" algn="ctr">
               <a:lnSpc>
                 <a:spcPts val="5180"/>
               </a:lnSpc>
@@ -8053,7 +9503,7 @@
               </a:spcBef>
             </a:pPr>
             <a:r>
-              <a:rPr lang="en-US" b="true" sz="3700">
+              <a:rPr lang="en-US" sz="3700" b="1">
                 <a:solidFill>
                   <a:srgbClr val="FFBF00"/>
                 </a:solidFill>
@@ -8069,12 +9519,12 @@
       </p:sp>
       <p:sp>
         <p:nvSpPr>
-          <p:cNvPr name="TextBox 22" id="22"/>
-          <p:cNvSpPr txBox="true"/>
+          <p:cNvPr id="22" name="TextBox 22"/>
+          <p:cNvSpPr txBox="1"/>
           <p:nvPr/>
         </p:nvSpPr>
         <p:spPr>
-          <a:xfrm rot="0">
+          <a:xfrm>
             <a:off x="12474651" y="4930574"/>
             <a:ext cx="4317586" cy="2040572"/>
           </a:xfrm>
@@ -8083,12 +9533,12 @@
           </a:prstGeom>
         </p:spPr>
         <p:txBody>
-          <a:bodyPr anchor="t" rtlCol="false" tIns="0" lIns="0" bIns="0" rIns="0">
+          <a:bodyPr lIns="0" tIns="0" rIns="0" bIns="0" rtlCol="0" anchor="t">
             <a:spAutoFit/>
           </a:bodyPr>
           <a:lstStyle/>
           <a:p>
-            <a:pPr algn="ctr" marL="0" indent="0" lvl="0">
+            <a:pPr marL="0" lvl="0" indent="0" algn="ctr">
               <a:lnSpc>
                 <a:spcPts val="3257"/>
               </a:lnSpc>
@@ -8109,7 +9559,7 @@
               <a:t>STAC-3</a:t>
             </a:r>
             <a:r>
-              <a:rPr lang="en-US" sz="2326" strike="noStrike" u="none">
+              <a:rPr lang="en-US" sz="2326" u="none" strike="noStrike">
                 <a:solidFill>
                   <a:srgbClr val="FFFFFF"/>
                 </a:solidFill>
@@ -8118,679 +9568,7 @@
                 <a:cs typeface="Canva Sans"/>
                 <a:sym typeface="Canva Sans"/>
               </a:rPr>
-              <a:t> </a:t>
-            </a:r>
-            <a:r>
-              <a:rPr lang="en-US" sz="2326" strike="noStrike" u="none">
-                <a:solidFill>
-                  <a:srgbClr val="FFFFFF"/>
-                </a:solidFill>
-                <a:latin typeface="Canva Sans"/>
-                <a:ea typeface="Canva Sans"/>
-                <a:cs typeface="Canva Sans"/>
-                <a:sym typeface="Canva Sans"/>
-              </a:rPr>
-              <a:t>i</a:t>
-            </a:r>
-            <a:r>
-              <a:rPr lang="en-US" sz="2326" strike="noStrike" u="none">
-                <a:solidFill>
-                  <a:srgbClr val="FFFFFF"/>
-                </a:solidFill>
-                <a:latin typeface="Canva Sans"/>
-                <a:ea typeface="Canva Sans"/>
-                <a:cs typeface="Canva Sans"/>
-                <a:sym typeface="Canva Sans"/>
-              </a:rPr>
-              <a:t>s a s</a:t>
-            </a:r>
-            <a:r>
-              <a:rPr lang="en-US" sz="2326" strike="noStrike" u="none">
-                <a:solidFill>
-                  <a:srgbClr val="FFFFFF"/>
-                </a:solidFill>
-                <a:latin typeface="Canva Sans"/>
-                <a:ea typeface="Canva Sans"/>
-                <a:cs typeface="Canva Sans"/>
-                <a:sym typeface="Canva Sans"/>
-              </a:rPr>
-              <a:t>m</a:t>
-            </a:r>
-            <a:r>
-              <a:rPr lang="en-US" sz="2326" strike="noStrike" u="none">
-                <a:solidFill>
-                  <a:srgbClr val="FFFFFF"/>
-                </a:solidFill>
-                <a:latin typeface="Canva Sans"/>
-                <a:ea typeface="Canva Sans"/>
-                <a:cs typeface="Canva Sans"/>
-                <a:sym typeface="Canva Sans"/>
-              </a:rPr>
-              <a:t>a</a:t>
-            </a:r>
-            <a:r>
-              <a:rPr lang="en-US" sz="2326" strike="noStrike" u="none">
-                <a:solidFill>
-                  <a:srgbClr val="FFFFFF"/>
-                </a:solidFill>
-                <a:latin typeface="Canva Sans"/>
-                <a:ea typeface="Canva Sans"/>
-                <a:cs typeface="Canva Sans"/>
-                <a:sym typeface="Canva Sans"/>
-              </a:rPr>
-              <a:t>ll, </a:t>
-            </a:r>
-            <a:r>
-              <a:rPr lang="en-US" sz="2326" strike="noStrike" u="none">
-                <a:solidFill>
-                  <a:srgbClr val="FFFFFF"/>
-                </a:solidFill>
-                <a:latin typeface="Canva Sans"/>
-                <a:ea typeface="Canva Sans"/>
-                <a:cs typeface="Canva Sans"/>
-                <a:sym typeface="Canva Sans"/>
-              </a:rPr>
-              <a:t>c</a:t>
-            </a:r>
-            <a:r>
-              <a:rPr lang="en-US" sz="2326" strike="noStrike" u="none">
-                <a:solidFill>
-                  <a:srgbClr val="FFFFFF"/>
-                </a:solidFill>
-                <a:latin typeface="Canva Sans"/>
-                <a:ea typeface="Canva Sans"/>
-                <a:cs typeface="Canva Sans"/>
-                <a:sym typeface="Canva Sans"/>
-              </a:rPr>
-              <a:t>ool</a:t>
-            </a:r>
-            <a:r>
-              <a:rPr lang="en-US" sz="2326" strike="noStrike" u="none">
-                <a:solidFill>
-                  <a:srgbClr val="FFFFFF"/>
-                </a:solidFill>
-                <a:latin typeface="Canva Sans"/>
-                <a:ea typeface="Canva Sans"/>
-                <a:cs typeface="Canva Sans"/>
-                <a:sym typeface="Canva Sans"/>
-              </a:rPr>
-              <a:t> s</a:t>
-            </a:r>
-            <a:r>
-              <a:rPr lang="en-US" sz="2326" strike="noStrike" u="none">
-                <a:solidFill>
-                  <a:srgbClr val="FFFFFF"/>
-                </a:solidFill>
-                <a:latin typeface="Canva Sans"/>
-                <a:ea typeface="Canva Sans"/>
-                <a:cs typeface="Canva Sans"/>
-                <a:sym typeface="Canva Sans"/>
-              </a:rPr>
-              <a:t>tar</a:t>
-            </a:r>
-            <a:r>
-              <a:rPr lang="en-US" sz="2326" strike="noStrike" u="none">
-                <a:solidFill>
-                  <a:srgbClr val="FFFFFF"/>
-                </a:solidFill>
-                <a:latin typeface="Canva Sans"/>
-                <a:ea typeface="Canva Sans"/>
-                <a:cs typeface="Canva Sans"/>
-                <a:sym typeface="Canva Sans"/>
-              </a:rPr>
-              <a:t> </a:t>
-            </a:r>
-            <a:r>
-              <a:rPr lang="en-US" sz="2326" strike="noStrike" u="none">
-                <a:solidFill>
-                  <a:srgbClr val="FFFFFF"/>
-                </a:solidFill>
-                <a:latin typeface="Canva Sans"/>
-                <a:ea typeface="Canva Sans"/>
-                <a:cs typeface="Canva Sans"/>
-                <a:sym typeface="Canva Sans"/>
-              </a:rPr>
-              <a:t>(an</a:t>
-            </a:r>
-            <a:r>
-              <a:rPr lang="en-US" sz="2326" strike="noStrike" u="none">
-                <a:solidFill>
-                  <a:srgbClr val="FFFFFF"/>
-                </a:solidFill>
-                <a:latin typeface="Canva Sans"/>
-                <a:ea typeface="Canva Sans"/>
-                <a:cs typeface="Canva Sans"/>
-                <a:sym typeface="Canva Sans"/>
-              </a:rPr>
-              <a:t> </a:t>
-            </a:r>
-            <a:r>
-              <a:rPr lang="en-US" sz="2326" strike="noStrike" u="none">
-                <a:solidFill>
-                  <a:srgbClr val="FFFFFF"/>
-                </a:solidFill>
-                <a:latin typeface="Canva Sans"/>
-                <a:ea typeface="Canva Sans"/>
-                <a:cs typeface="Canva Sans"/>
-                <a:sym typeface="Canva Sans"/>
-              </a:rPr>
-              <a:t>M-dw</a:t>
-            </a:r>
-            <a:r>
-              <a:rPr lang="en-US" sz="2326" strike="noStrike" u="none">
-                <a:solidFill>
-                  <a:srgbClr val="FFFFFF"/>
-                </a:solidFill>
-                <a:latin typeface="Canva Sans"/>
-                <a:ea typeface="Canva Sans"/>
-                <a:cs typeface="Canva Sans"/>
-                <a:sym typeface="Canva Sans"/>
-              </a:rPr>
-              <a:t>ar</a:t>
-            </a:r>
-            <a:r>
-              <a:rPr lang="en-US" sz="2326" strike="noStrike" u="none">
-                <a:solidFill>
-                  <a:srgbClr val="FFFFFF"/>
-                </a:solidFill>
-                <a:latin typeface="Canva Sans"/>
-                <a:ea typeface="Canva Sans"/>
-                <a:cs typeface="Canva Sans"/>
-                <a:sym typeface="Canva Sans"/>
-              </a:rPr>
-              <a:t>f).</a:t>
-            </a:r>
-            <a:r>
-              <a:rPr lang="en-US" sz="2326" strike="noStrike" u="none">
-                <a:solidFill>
-                  <a:srgbClr val="FFFFFF"/>
-                </a:solidFill>
-                <a:latin typeface="Canva Sans"/>
-                <a:ea typeface="Canva Sans"/>
-                <a:cs typeface="Canva Sans"/>
-                <a:sym typeface="Canva Sans"/>
-              </a:rPr>
-              <a:t> </a:t>
-            </a:r>
-            <a:r>
-              <a:rPr lang="en-US" sz="2326" strike="noStrike" u="none">
-                <a:solidFill>
-                  <a:srgbClr val="FFFFFF"/>
-                </a:solidFill>
-                <a:latin typeface="Canva Sans"/>
-                <a:ea typeface="Canva Sans"/>
-                <a:cs typeface="Canva Sans"/>
-                <a:sym typeface="Canva Sans"/>
-              </a:rPr>
-              <a:t>S</a:t>
-            </a:r>
-            <a:r>
-              <a:rPr lang="en-US" sz="2326" strike="noStrike" u="none">
-                <a:solidFill>
-                  <a:srgbClr val="FFFFFF"/>
-                </a:solidFill>
-                <a:latin typeface="Canva Sans"/>
-                <a:ea typeface="Canva Sans"/>
-                <a:cs typeface="Canva Sans"/>
-                <a:sym typeface="Canva Sans"/>
-              </a:rPr>
-              <a:t>t</a:t>
-            </a:r>
-            <a:r>
-              <a:rPr lang="en-US" sz="2326" strike="noStrike" u="none">
-                <a:solidFill>
-                  <a:srgbClr val="FFFFFF"/>
-                </a:solidFill>
-                <a:latin typeface="Canva Sans"/>
-                <a:ea typeface="Canva Sans"/>
-                <a:cs typeface="Canva Sans"/>
-                <a:sym typeface="Canva Sans"/>
-              </a:rPr>
-              <a:t>ars</a:t>
-            </a:r>
-            <a:r>
-              <a:rPr lang="en-US" sz="2326" strike="noStrike" u="none">
-                <a:solidFill>
-                  <a:srgbClr val="FFFFFF"/>
-                </a:solidFill>
-                <a:latin typeface="Canva Sans"/>
-                <a:ea typeface="Canva Sans"/>
-                <a:cs typeface="Canva Sans"/>
-                <a:sym typeface="Canva Sans"/>
-              </a:rPr>
-              <a:t> </a:t>
-            </a:r>
-            <a:r>
-              <a:rPr lang="en-US" sz="2326" strike="noStrike" u="none">
-                <a:solidFill>
-                  <a:srgbClr val="FFFFFF"/>
-                </a:solidFill>
-                <a:latin typeface="Canva Sans"/>
-                <a:ea typeface="Canva Sans"/>
-                <a:cs typeface="Canva Sans"/>
-                <a:sym typeface="Canva Sans"/>
-              </a:rPr>
-              <a:t>lik</a:t>
-            </a:r>
-            <a:r>
-              <a:rPr lang="en-US" sz="2326" strike="noStrike" u="none">
-                <a:solidFill>
-                  <a:srgbClr val="FFFFFF"/>
-                </a:solidFill>
-                <a:latin typeface="Canva Sans"/>
-                <a:ea typeface="Canva Sans"/>
-                <a:cs typeface="Canva Sans"/>
-                <a:sym typeface="Canva Sans"/>
-              </a:rPr>
-              <a:t>e th</a:t>
-            </a:r>
-            <a:r>
-              <a:rPr lang="en-US" sz="2326" strike="noStrike" u="none">
-                <a:solidFill>
-                  <a:srgbClr val="FFFFFF"/>
-                </a:solidFill>
-                <a:latin typeface="Canva Sans"/>
-                <a:ea typeface="Canva Sans"/>
-                <a:cs typeface="Canva Sans"/>
-                <a:sym typeface="Canva Sans"/>
-              </a:rPr>
-              <a:t>i</a:t>
-            </a:r>
-            <a:r>
-              <a:rPr lang="en-US" sz="2326" strike="noStrike" u="none">
-                <a:solidFill>
-                  <a:srgbClr val="FFFFFF"/>
-                </a:solidFill>
-                <a:latin typeface="Canva Sans"/>
-                <a:ea typeface="Canva Sans"/>
-                <a:cs typeface="Canva Sans"/>
-                <a:sym typeface="Canva Sans"/>
-              </a:rPr>
-              <a:t>s b</a:t>
-            </a:r>
-            <a:r>
-              <a:rPr lang="en-US" sz="2326" strike="noStrike" u="none">
-                <a:solidFill>
-                  <a:srgbClr val="FFFFFF"/>
-                </a:solidFill>
-                <a:latin typeface="Canva Sans"/>
-                <a:ea typeface="Canva Sans"/>
-                <a:cs typeface="Canva Sans"/>
-                <a:sym typeface="Canva Sans"/>
-              </a:rPr>
-              <a:t>urn for</a:t>
-            </a:r>
-            <a:r>
-              <a:rPr lang="en-US" sz="2326" strike="noStrike" u="none">
-                <a:solidFill>
-                  <a:srgbClr val="FFFFFF"/>
-                </a:solidFill>
-                <a:latin typeface="Canva Sans"/>
-                <a:ea typeface="Canva Sans"/>
-                <a:cs typeface="Canva Sans"/>
-                <a:sym typeface="Canva Sans"/>
-              </a:rPr>
-              <a:t> </a:t>
-            </a:r>
-            <a:r>
-              <a:rPr lang="en-US" sz="2326" strike="noStrike" u="none">
-                <a:solidFill>
-                  <a:srgbClr val="FFFFFF"/>
-                </a:solidFill>
-                <a:latin typeface="Canva Sans"/>
-                <a:ea typeface="Canva Sans"/>
-                <a:cs typeface="Canva Sans"/>
-                <a:sym typeface="Canva Sans"/>
-              </a:rPr>
-              <a:t>a</a:t>
-            </a:r>
-            <a:r>
-              <a:rPr lang="en-US" sz="2326" strike="noStrike" u="none">
-                <a:solidFill>
-                  <a:srgbClr val="FFFFFF"/>
-                </a:solidFill>
-                <a:latin typeface="Canva Sans"/>
-                <a:ea typeface="Canva Sans"/>
-                <a:cs typeface="Canva Sans"/>
-                <a:sym typeface="Canva Sans"/>
-              </a:rPr>
-              <a:t> </a:t>
-            </a:r>
-            <a:r>
-              <a:rPr lang="en-US" sz="2326" strike="noStrike" u="none">
-                <a:solidFill>
-                  <a:srgbClr val="FFFFFF"/>
-                </a:solidFill>
-                <a:latin typeface="Canva Sans"/>
-                <a:ea typeface="Canva Sans"/>
-                <a:cs typeface="Canva Sans"/>
-                <a:sym typeface="Canva Sans"/>
-              </a:rPr>
-              <a:t>v</a:t>
-            </a:r>
-            <a:r>
-              <a:rPr lang="en-US" sz="2326" strike="noStrike" u="none">
-                <a:solidFill>
-                  <a:srgbClr val="FFFFFF"/>
-                </a:solidFill>
-                <a:latin typeface="Canva Sans"/>
-                <a:ea typeface="Canva Sans"/>
-                <a:cs typeface="Canva Sans"/>
-                <a:sym typeface="Canva Sans"/>
-              </a:rPr>
-              <a:t>e</a:t>
-            </a:r>
-            <a:r>
-              <a:rPr lang="en-US" sz="2326" strike="noStrike" u="none">
-                <a:solidFill>
-                  <a:srgbClr val="FFFFFF"/>
-                </a:solidFill>
-                <a:latin typeface="Canva Sans"/>
-                <a:ea typeface="Canva Sans"/>
-                <a:cs typeface="Canva Sans"/>
-                <a:sym typeface="Canva Sans"/>
-              </a:rPr>
-              <a:t>ry</a:t>
-            </a:r>
-            <a:r>
-              <a:rPr lang="en-US" sz="2326" strike="noStrike" u="none">
-                <a:solidFill>
-                  <a:srgbClr val="FFFFFF"/>
-                </a:solidFill>
-                <a:latin typeface="Canva Sans"/>
-                <a:ea typeface="Canva Sans"/>
-                <a:cs typeface="Canva Sans"/>
-                <a:sym typeface="Canva Sans"/>
-              </a:rPr>
-              <a:t> lo</a:t>
-            </a:r>
-            <a:r>
-              <a:rPr lang="en-US" sz="2326" strike="noStrike" u="none">
-                <a:solidFill>
-                  <a:srgbClr val="FFFFFF"/>
-                </a:solidFill>
-                <a:latin typeface="Canva Sans"/>
-                <a:ea typeface="Canva Sans"/>
-                <a:cs typeface="Canva Sans"/>
-                <a:sym typeface="Canva Sans"/>
-              </a:rPr>
-              <a:t>ng</a:t>
-            </a:r>
-            <a:r>
-              <a:rPr lang="en-US" sz="2326" strike="noStrike" u="none">
-                <a:solidFill>
-                  <a:srgbClr val="FFFFFF"/>
-                </a:solidFill>
-                <a:latin typeface="Canva Sans"/>
-                <a:ea typeface="Canva Sans"/>
-                <a:cs typeface="Canva Sans"/>
-                <a:sym typeface="Canva Sans"/>
-              </a:rPr>
-              <a:t> t</a:t>
-            </a:r>
-            <a:r>
-              <a:rPr lang="en-US" sz="2326" strike="noStrike" u="none">
-                <a:solidFill>
-                  <a:srgbClr val="FFFFFF"/>
-                </a:solidFill>
-                <a:latin typeface="Canva Sans"/>
-                <a:ea typeface="Canva Sans"/>
-                <a:cs typeface="Canva Sans"/>
-                <a:sym typeface="Canva Sans"/>
-              </a:rPr>
-              <a:t>ime,</a:t>
-            </a:r>
-            <a:r>
-              <a:rPr lang="en-US" sz="2326" strike="noStrike" u="none">
-                <a:solidFill>
-                  <a:srgbClr val="FFFFFF"/>
-                </a:solidFill>
-                <a:latin typeface="Canva Sans"/>
-                <a:ea typeface="Canva Sans"/>
-                <a:cs typeface="Canva Sans"/>
-                <a:sym typeface="Canva Sans"/>
-              </a:rPr>
-              <a:t> s</a:t>
-            </a:r>
-            <a:r>
-              <a:rPr lang="en-US" sz="2326" strike="noStrike" u="none">
-                <a:solidFill>
-                  <a:srgbClr val="FFFFFF"/>
-                </a:solidFill>
-                <a:latin typeface="Canva Sans"/>
-                <a:ea typeface="Canva Sans"/>
-                <a:cs typeface="Canva Sans"/>
-                <a:sym typeface="Canva Sans"/>
-              </a:rPr>
-              <a:t>o</a:t>
-            </a:r>
-            <a:r>
-              <a:rPr lang="en-US" sz="2326" strike="noStrike" u="none">
-                <a:solidFill>
-                  <a:srgbClr val="FFFFFF"/>
-                </a:solidFill>
-                <a:latin typeface="Canva Sans"/>
-                <a:ea typeface="Canva Sans"/>
-                <a:cs typeface="Canva Sans"/>
-                <a:sym typeface="Canva Sans"/>
-              </a:rPr>
-              <a:t> </a:t>
-            </a:r>
-            <a:r>
-              <a:rPr lang="en-US" sz="2326" strike="noStrike" u="none">
-                <a:solidFill>
-                  <a:srgbClr val="FFFFFF"/>
-                </a:solidFill>
-                <a:latin typeface="Canva Sans"/>
-                <a:ea typeface="Canva Sans"/>
-                <a:cs typeface="Canva Sans"/>
-                <a:sym typeface="Canva Sans"/>
-              </a:rPr>
-              <a:t>th</a:t>
-            </a:r>
-            <a:r>
-              <a:rPr lang="en-US" sz="2326" strike="noStrike" u="none">
-                <a:solidFill>
-                  <a:srgbClr val="FFFFFF"/>
-                </a:solidFill>
-                <a:latin typeface="Canva Sans"/>
-                <a:ea typeface="Canva Sans"/>
-                <a:cs typeface="Canva Sans"/>
-                <a:sym typeface="Canva Sans"/>
-              </a:rPr>
-              <a:t>e b</a:t>
-            </a:r>
-            <a:r>
-              <a:rPr lang="en-US" sz="2326" strike="noStrike" u="none">
-                <a:solidFill>
-                  <a:srgbClr val="FFFFFF"/>
-                </a:solidFill>
-                <a:latin typeface="Canva Sans"/>
-                <a:ea typeface="Canva Sans"/>
-                <a:cs typeface="Canva Sans"/>
-                <a:sym typeface="Canva Sans"/>
-              </a:rPr>
-              <a:t>a</a:t>
-            </a:r>
-            <a:r>
-              <a:rPr lang="en-US" sz="2326" strike="noStrike" u="none">
-                <a:solidFill>
-                  <a:srgbClr val="FFFFFF"/>
-                </a:solidFill>
-                <a:latin typeface="Canva Sans"/>
-                <a:ea typeface="Canva Sans"/>
-                <a:cs typeface="Canva Sans"/>
-                <a:sym typeface="Canva Sans"/>
-              </a:rPr>
-              <a:t>s</a:t>
-            </a:r>
-            <a:r>
-              <a:rPr lang="en-US" sz="2326" strike="noStrike" u="none">
-                <a:solidFill>
-                  <a:srgbClr val="FFFFFF"/>
-                </a:solidFill>
-                <a:latin typeface="Canva Sans"/>
-                <a:ea typeface="Canva Sans"/>
-                <a:cs typeface="Canva Sans"/>
-                <a:sym typeface="Canva Sans"/>
-              </a:rPr>
-              <a:t>e</a:t>
-            </a:r>
-            <a:r>
-              <a:rPr lang="en-US" sz="2326" strike="noStrike" u="none">
-                <a:solidFill>
-                  <a:srgbClr val="FFFFFF"/>
-                </a:solidFill>
-                <a:latin typeface="Canva Sans"/>
-                <a:ea typeface="Canva Sans"/>
-                <a:cs typeface="Canva Sans"/>
-                <a:sym typeface="Canva Sans"/>
-              </a:rPr>
-              <a:t> wo</a:t>
-            </a:r>
-            <a:r>
-              <a:rPr lang="en-US" sz="2326" strike="noStrike" u="none">
-                <a:solidFill>
-                  <a:srgbClr val="FFFFFF"/>
-                </a:solidFill>
-                <a:latin typeface="Canva Sans"/>
-                <a:ea typeface="Canva Sans"/>
-                <a:cs typeface="Canva Sans"/>
-                <a:sym typeface="Canva Sans"/>
-              </a:rPr>
-              <a:t>uld</a:t>
-            </a:r>
-            <a:r>
-              <a:rPr lang="en-US" sz="2326" strike="noStrike" u="none">
-                <a:solidFill>
-                  <a:srgbClr val="FFFFFF"/>
-                </a:solidFill>
-                <a:latin typeface="Canva Sans"/>
-                <a:ea typeface="Canva Sans"/>
-                <a:cs typeface="Canva Sans"/>
-                <a:sym typeface="Canva Sans"/>
-              </a:rPr>
-              <a:t> </a:t>
-            </a:r>
-            <a:r>
-              <a:rPr lang="en-US" sz="2326" strike="noStrike" u="none">
-                <a:solidFill>
-                  <a:srgbClr val="FFFFFF"/>
-                </a:solidFill>
-                <a:latin typeface="Canva Sans"/>
-                <a:ea typeface="Canva Sans"/>
-                <a:cs typeface="Canva Sans"/>
-                <a:sym typeface="Canva Sans"/>
-              </a:rPr>
-              <a:t>hav</a:t>
-            </a:r>
-            <a:r>
-              <a:rPr lang="en-US" sz="2326" strike="noStrike" u="none">
-                <a:solidFill>
-                  <a:srgbClr val="FFFFFF"/>
-                </a:solidFill>
-                <a:latin typeface="Canva Sans"/>
-                <a:ea typeface="Canva Sans"/>
-                <a:cs typeface="Canva Sans"/>
-                <a:sym typeface="Canva Sans"/>
-              </a:rPr>
-              <a:t>e a </a:t>
-            </a:r>
-            <a:r>
-              <a:rPr lang="en-US" sz="2326" strike="noStrike" u="none">
-                <a:solidFill>
-                  <a:srgbClr val="FFFFFF"/>
-                </a:solidFill>
-                <a:latin typeface="Canva Sans"/>
-                <a:ea typeface="Canva Sans"/>
-                <a:cs typeface="Canva Sans"/>
-                <a:sym typeface="Canva Sans"/>
-              </a:rPr>
-              <a:t>saf</a:t>
-            </a:r>
-            <a:r>
-              <a:rPr lang="en-US" sz="2326" strike="noStrike" u="none">
-                <a:solidFill>
-                  <a:srgbClr val="FFFFFF"/>
-                </a:solidFill>
-                <a:latin typeface="Canva Sans"/>
-                <a:ea typeface="Canva Sans"/>
-                <a:cs typeface="Canva Sans"/>
-                <a:sym typeface="Canva Sans"/>
-              </a:rPr>
-              <a:t>e</a:t>
-            </a:r>
-            <a:r>
-              <a:rPr lang="en-US" sz="2326" strike="noStrike" u="none">
-                <a:solidFill>
-                  <a:srgbClr val="FFFFFF"/>
-                </a:solidFill>
-                <a:latin typeface="Canva Sans"/>
-                <a:ea typeface="Canva Sans"/>
-                <a:cs typeface="Canva Sans"/>
-                <a:sym typeface="Canva Sans"/>
-              </a:rPr>
-              <a:t>, s</a:t>
-            </a:r>
-            <a:r>
-              <a:rPr lang="en-US" sz="2326" strike="noStrike" u="none">
-                <a:solidFill>
-                  <a:srgbClr val="FFFFFF"/>
-                </a:solidFill>
-                <a:latin typeface="Canva Sans"/>
-                <a:ea typeface="Canva Sans"/>
-                <a:cs typeface="Canva Sans"/>
-                <a:sym typeface="Canva Sans"/>
-              </a:rPr>
-              <a:t>t</a:t>
-            </a:r>
-            <a:r>
-              <a:rPr lang="en-US" sz="2326" strike="noStrike" u="none">
-                <a:solidFill>
-                  <a:srgbClr val="FFFFFF"/>
-                </a:solidFill>
-                <a:latin typeface="Canva Sans"/>
-                <a:ea typeface="Canva Sans"/>
-                <a:cs typeface="Canva Sans"/>
-                <a:sym typeface="Canva Sans"/>
-              </a:rPr>
-              <a:t>a</a:t>
-            </a:r>
-            <a:r>
-              <a:rPr lang="en-US" sz="2326" strike="noStrike" u="none">
-                <a:solidFill>
-                  <a:srgbClr val="FFFFFF"/>
-                </a:solidFill>
-                <a:latin typeface="Canva Sans"/>
-                <a:ea typeface="Canva Sans"/>
-                <a:cs typeface="Canva Sans"/>
-                <a:sym typeface="Canva Sans"/>
-              </a:rPr>
-              <a:t>ble ho</a:t>
-            </a:r>
-            <a:r>
-              <a:rPr lang="en-US" sz="2326" strike="noStrike" u="none">
-                <a:solidFill>
-                  <a:srgbClr val="FFFFFF"/>
-                </a:solidFill>
-                <a:latin typeface="Canva Sans"/>
-                <a:ea typeface="Canva Sans"/>
-                <a:cs typeface="Canva Sans"/>
-                <a:sym typeface="Canva Sans"/>
-              </a:rPr>
-              <a:t>me</a:t>
-            </a:r>
-            <a:r>
-              <a:rPr lang="en-US" sz="2326" strike="noStrike" u="none">
-                <a:solidFill>
-                  <a:srgbClr val="FFFFFF"/>
-                </a:solidFill>
-                <a:latin typeface="Canva Sans"/>
-                <a:ea typeface="Canva Sans"/>
-                <a:cs typeface="Canva Sans"/>
-                <a:sym typeface="Canva Sans"/>
-              </a:rPr>
-              <a:t>.</a:t>
+              <a:t> is a small, cool star (an M-dwarf). Stars like this burn for a very long time, so the base would have a safe, stable home.</a:t>
             </a:r>
           </a:p>
         </p:txBody>
